--- a/Презентация1.pptx
+++ b/Презентация1.pptx
@@ -2,15 +2,14 @@
 <file path=ppt/presentation.xml><?xml version="1.0" encoding="utf-8"?>
 <p:presentation xmlns:a="http://schemas.openxmlformats.org/drawingml/2006/main" xmlns:r="http://schemas.openxmlformats.org/officeDocument/2006/relationships" xmlns:p="http://schemas.openxmlformats.org/presentationml/2006/main" saveSubsetFonts="1">
   <p:sldMasterIdLst>
-    <p:sldMasterId id="2147483648" r:id="rId1"/>
+    <p:sldMasterId id="2147483767" r:id="rId1"/>
   </p:sldMasterIdLst>
   <p:sldIdLst>
     <p:sldId id="256" r:id="rId2"/>
-    <p:sldId id="257" r:id="rId3"/>
-    <p:sldId id="258" r:id="rId4"/>
-    <p:sldId id="260" r:id="rId5"/>
-    <p:sldId id="261" r:id="rId6"/>
-    <p:sldId id="259" r:id="rId7"/>
+    <p:sldId id="258" r:id="rId3"/>
+    <p:sldId id="263" r:id="rId4"/>
+    <p:sldId id="264" r:id="rId5"/>
+    <p:sldId id="265" r:id="rId6"/>
   </p:sldIdLst>
   <p:sldSz cx="12192000" cy="6858000"/>
   <p:notesSz cx="6858000" cy="9144000"/>
@@ -18,7 +17,7 @@
     <a:defPPr>
       <a:defRPr lang="en-US"/>
     </a:defPPr>
-    <a:lvl1pPr marL="0" algn="l" defTabSz="914400" rtl="0" eaLnBrk="1" latinLnBrk="0" hangingPunct="1">
+    <a:lvl1pPr marL="0" algn="l" defTabSz="457200" rtl="0" eaLnBrk="1" latinLnBrk="0" hangingPunct="1">
       <a:defRPr sz="1800" kern="1200">
         <a:solidFill>
           <a:schemeClr val="tx1"/>
@@ -28,7 +27,7 @@
         <a:cs typeface="+mn-cs"/>
       </a:defRPr>
     </a:lvl1pPr>
-    <a:lvl2pPr marL="457200" algn="l" defTabSz="914400" rtl="0" eaLnBrk="1" latinLnBrk="0" hangingPunct="1">
+    <a:lvl2pPr marL="457200" algn="l" defTabSz="457200" rtl="0" eaLnBrk="1" latinLnBrk="0" hangingPunct="1">
       <a:defRPr sz="1800" kern="1200">
         <a:solidFill>
           <a:schemeClr val="tx1"/>
@@ -38,7 +37,7 @@
         <a:cs typeface="+mn-cs"/>
       </a:defRPr>
     </a:lvl2pPr>
-    <a:lvl3pPr marL="914400" algn="l" defTabSz="914400" rtl="0" eaLnBrk="1" latinLnBrk="0" hangingPunct="1">
+    <a:lvl3pPr marL="914400" algn="l" defTabSz="457200" rtl="0" eaLnBrk="1" latinLnBrk="0" hangingPunct="1">
       <a:defRPr sz="1800" kern="1200">
         <a:solidFill>
           <a:schemeClr val="tx1"/>
@@ -48,7 +47,7 @@
         <a:cs typeface="+mn-cs"/>
       </a:defRPr>
     </a:lvl3pPr>
-    <a:lvl4pPr marL="1371600" algn="l" defTabSz="914400" rtl="0" eaLnBrk="1" latinLnBrk="0" hangingPunct="1">
+    <a:lvl4pPr marL="1371600" algn="l" defTabSz="457200" rtl="0" eaLnBrk="1" latinLnBrk="0" hangingPunct="1">
       <a:defRPr sz="1800" kern="1200">
         <a:solidFill>
           <a:schemeClr val="tx1"/>
@@ -58,7 +57,7 @@
         <a:cs typeface="+mn-cs"/>
       </a:defRPr>
     </a:lvl4pPr>
-    <a:lvl5pPr marL="1828800" algn="l" defTabSz="914400" rtl="0" eaLnBrk="1" latinLnBrk="0" hangingPunct="1">
+    <a:lvl5pPr marL="1828800" algn="l" defTabSz="457200" rtl="0" eaLnBrk="1" latinLnBrk="0" hangingPunct="1">
       <a:defRPr sz="1800" kern="1200">
         <a:solidFill>
           <a:schemeClr val="tx1"/>
@@ -68,7 +67,7 @@
         <a:cs typeface="+mn-cs"/>
       </a:defRPr>
     </a:lvl5pPr>
-    <a:lvl6pPr marL="2286000" algn="l" defTabSz="914400" rtl="0" eaLnBrk="1" latinLnBrk="0" hangingPunct="1">
+    <a:lvl6pPr marL="2286000" algn="l" defTabSz="457200" rtl="0" eaLnBrk="1" latinLnBrk="0" hangingPunct="1">
       <a:defRPr sz="1800" kern="1200">
         <a:solidFill>
           <a:schemeClr val="tx1"/>
@@ -78,7 +77,7 @@
         <a:cs typeface="+mn-cs"/>
       </a:defRPr>
     </a:lvl6pPr>
-    <a:lvl7pPr marL="2743200" algn="l" defTabSz="914400" rtl="0" eaLnBrk="1" latinLnBrk="0" hangingPunct="1">
+    <a:lvl7pPr marL="2743200" algn="l" defTabSz="457200" rtl="0" eaLnBrk="1" latinLnBrk="0" hangingPunct="1">
       <a:defRPr sz="1800" kern="1200">
         <a:solidFill>
           <a:schemeClr val="tx1"/>
@@ -88,7 +87,7 @@
         <a:cs typeface="+mn-cs"/>
       </a:defRPr>
     </a:lvl7pPr>
-    <a:lvl8pPr marL="3200400" algn="l" defTabSz="914400" rtl="0" eaLnBrk="1" latinLnBrk="0" hangingPunct="1">
+    <a:lvl8pPr marL="3200400" algn="l" defTabSz="457200" rtl="0" eaLnBrk="1" latinLnBrk="0" hangingPunct="1">
       <a:defRPr sz="1800" kern="1200">
         <a:solidFill>
           <a:schemeClr val="tx1"/>
@@ -98,7 +97,7 @@
         <a:cs typeface="+mn-cs"/>
       </a:defRPr>
     </a:lvl8pPr>
-    <a:lvl9pPr marL="3657600" algn="l" defTabSz="914400" rtl="0" eaLnBrk="1" latinLnBrk="0" hangingPunct="1">
+    <a:lvl9pPr marL="3657600" algn="l" defTabSz="457200" rtl="0" eaLnBrk="1" latinLnBrk="0" hangingPunct="1">
       <a:defRPr sz="1800" kern="1200">
         <a:solidFill>
           <a:schemeClr val="tx1"/>
@@ -109,11 +108,16 @@
       </a:defRPr>
     </a:lvl9pPr>
   </p:defaultTextStyle>
+  <p:extLst>
+    <p:ext uri="{EFAFB233-063F-42B5-8137-9DF3F51BA10A}">
+      <p15:sldGuideLst xmlns:p15="http://schemas.microsoft.com/office/powerpoint/2012/main"/>
+    </p:ext>
+  </p:extLst>
 </p:presentation>
 </file>
 
 <file path=ppt/slideLayouts/slideLayout1.xml><?xml version="1.0" encoding="utf-8"?>
-<p:sldLayout xmlns:a="http://schemas.openxmlformats.org/drawingml/2006/main" xmlns:r="http://schemas.openxmlformats.org/officeDocument/2006/relationships" xmlns:p="http://schemas.openxmlformats.org/presentationml/2006/main" type="title" preserve="1">
+<p:sldLayout xmlns:a="http://schemas.openxmlformats.org/drawingml/2006/main" xmlns:r="http://schemas.openxmlformats.org/officeDocument/2006/relationships" xmlns:p="http://schemas.openxmlformats.org/presentationml/2006/main" showMasterSp="0" type="title" preserve="1">
   <p:cSld name="Титульный слайд">
     <p:spTree>
       <p:nvGrpSpPr>
@@ -131,7 +135,83 @@
       </p:grpSpPr>
       <p:sp>
         <p:nvSpPr>
-          <p:cNvPr id="2" name="Заголовок 1"/>
+          <p:cNvPr id="7" name="Rectangle 6"/>
+          <p:cNvSpPr/>
+          <p:nvPr/>
+        </p:nvSpPr>
+        <p:spPr>
+          <a:xfrm>
+            <a:off x="3175" y="6400800"/>
+            <a:ext cx="12188825" cy="457200"/>
+          </a:xfrm>
+          <a:prstGeom prst="rect">
+            <a:avLst/>
+          </a:prstGeom>
+          <a:solidFill>
+            <a:schemeClr val="accent2"/>
+          </a:solidFill>
+          <a:ln>
+            <a:noFill/>
+          </a:ln>
+        </p:spPr>
+        <p:style>
+          <a:lnRef idx="2">
+            <a:schemeClr val="accent1">
+              <a:shade val="50000"/>
+            </a:schemeClr>
+          </a:lnRef>
+          <a:fillRef idx="1">
+            <a:schemeClr val="accent1"/>
+          </a:fillRef>
+          <a:effectRef idx="0">
+            <a:schemeClr val="accent1"/>
+          </a:effectRef>
+          <a:fontRef idx="minor">
+            <a:schemeClr val="lt1"/>
+          </a:fontRef>
+        </p:style>
+      </p:sp>
+      <p:sp>
+        <p:nvSpPr>
+          <p:cNvPr id="8" name="Rectangle 7"/>
+          <p:cNvSpPr/>
+          <p:nvPr/>
+        </p:nvSpPr>
+        <p:spPr>
+          <a:xfrm>
+            <a:off x="15" y="6334316"/>
+            <a:ext cx="12188825" cy="64008"/>
+          </a:xfrm>
+          <a:prstGeom prst="rect">
+            <a:avLst/>
+          </a:prstGeom>
+          <a:solidFill>
+            <a:schemeClr val="accent1"/>
+          </a:solidFill>
+          <a:ln>
+            <a:noFill/>
+          </a:ln>
+        </p:spPr>
+        <p:style>
+          <a:lnRef idx="2">
+            <a:schemeClr val="accent1">
+              <a:shade val="50000"/>
+            </a:schemeClr>
+          </a:lnRef>
+          <a:fillRef idx="1">
+            <a:schemeClr val="accent1"/>
+          </a:fillRef>
+          <a:effectRef idx="0">
+            <a:schemeClr val="accent1"/>
+          </a:effectRef>
+          <a:fontRef idx="minor">
+            <a:schemeClr val="lt1"/>
+          </a:fontRef>
+        </p:style>
+      </p:sp>
+      <p:sp>
+        <p:nvSpPr>
+          <p:cNvPr id="2" name="Title 1"/>
           <p:cNvSpPr>
             <a:spLocks noGrp="1"/>
           </p:cNvSpPr>
@@ -141,29 +221,41 @@
         </p:nvSpPr>
         <p:spPr>
           <a:xfrm>
-            <a:off x="1524000" y="1122363"/>
-            <a:ext cx="9144000" cy="2387600"/>
-          </a:xfrm>
-        </p:spPr>
-        <p:txBody>
-          <a:bodyPr anchor="b"/>
+            <a:off x="1097280" y="758952"/>
+            <a:ext cx="10058400" cy="3566160"/>
+          </a:xfrm>
+        </p:spPr>
+        <p:txBody>
+          <a:bodyPr anchor="b">
+            <a:normAutofit/>
+          </a:bodyPr>
           <a:lstStyle>
-            <a:lvl1pPr algn="ctr">
-              <a:defRPr sz="6000"/>
+            <a:lvl1pPr algn="l">
+              <a:lnSpc>
+                <a:spcPct val="85000"/>
+              </a:lnSpc>
+              <a:defRPr sz="8000" spc="-50" baseline="0">
+                <a:solidFill>
+                  <a:schemeClr val="tx1">
+                    <a:lumMod val="85000"/>
+                    <a:lumOff val="15000"/>
+                  </a:schemeClr>
+                </a:solidFill>
+              </a:defRPr>
             </a:lvl1pPr>
           </a:lstStyle>
           <a:p>
             <a:r>
-              <a:rPr lang="ru-RU" smtClean="0"/>
+              <a:rPr lang="ru-RU"/>
               <a:t>Образец заголовка</a:t>
             </a:r>
-            <a:endParaRPr lang="en-US"/>
-          </a:p>
-        </p:txBody>
-      </p:sp>
-      <p:sp>
-        <p:nvSpPr>
-          <p:cNvPr id="3" name="Подзаголовок 2"/>
+            <a:endParaRPr lang="en-US" dirty="0"/>
+          </a:p>
+        </p:txBody>
+      </p:sp>
+      <p:sp>
+        <p:nvSpPr>
+          <p:cNvPr id="3" name="Subtitle 2"/>
           <p:cNvSpPr>
             <a:spLocks noGrp="1"/>
           </p:cNvSpPr>
@@ -173,62 +265,69 @@
         </p:nvSpPr>
         <p:spPr>
           <a:xfrm>
-            <a:off x="1524000" y="3602038"/>
-            <a:ext cx="9144000" cy="1655762"/>
-          </a:xfrm>
-        </p:spPr>
-        <p:txBody>
-          <a:bodyPr/>
+            <a:off x="1100051" y="4455620"/>
+            <a:ext cx="10058400" cy="1143000"/>
+          </a:xfrm>
+        </p:spPr>
+        <p:txBody>
+          <a:bodyPr lIns="91440" rIns="91440">
+            <a:normAutofit/>
+          </a:bodyPr>
           <a:lstStyle>
-            <a:lvl1pPr marL="0" indent="0" algn="ctr">
-              <a:buNone/>
-              <a:defRPr sz="2400"/>
+            <a:lvl1pPr marL="0" indent="0" algn="l">
+              <a:buNone/>
+              <a:defRPr sz="2400" cap="all" spc="200" baseline="0">
+                <a:solidFill>
+                  <a:schemeClr val="tx2"/>
+                </a:solidFill>
+                <a:latin typeface="+mj-lt"/>
+              </a:defRPr>
             </a:lvl1pPr>
             <a:lvl2pPr marL="457200" indent="0" algn="ctr">
               <a:buNone/>
-              <a:defRPr sz="2000"/>
+              <a:defRPr sz="2400"/>
             </a:lvl2pPr>
             <a:lvl3pPr marL="914400" indent="0" algn="ctr">
               <a:buNone/>
-              <a:defRPr sz="1800"/>
+              <a:defRPr sz="2400"/>
             </a:lvl3pPr>
             <a:lvl4pPr marL="1371600" indent="0" algn="ctr">
               <a:buNone/>
-              <a:defRPr sz="1600"/>
+              <a:defRPr sz="2000"/>
             </a:lvl4pPr>
             <a:lvl5pPr marL="1828800" indent="0" algn="ctr">
               <a:buNone/>
-              <a:defRPr sz="1600"/>
+              <a:defRPr sz="2000"/>
             </a:lvl5pPr>
             <a:lvl6pPr marL="2286000" indent="0" algn="ctr">
               <a:buNone/>
-              <a:defRPr sz="1600"/>
+              <a:defRPr sz="2000"/>
             </a:lvl6pPr>
             <a:lvl7pPr marL="2743200" indent="0" algn="ctr">
               <a:buNone/>
-              <a:defRPr sz="1600"/>
+              <a:defRPr sz="2000"/>
             </a:lvl7pPr>
             <a:lvl8pPr marL="3200400" indent="0" algn="ctr">
               <a:buNone/>
-              <a:defRPr sz="1600"/>
+              <a:defRPr sz="2000"/>
             </a:lvl8pPr>
             <a:lvl9pPr marL="3657600" indent="0" algn="ctr">
               <a:buNone/>
-              <a:defRPr sz="1600"/>
+              <a:defRPr sz="2000"/>
             </a:lvl9pPr>
           </a:lstStyle>
           <a:p>
             <a:r>
-              <a:rPr lang="ru-RU" smtClean="0"/>
+              <a:rPr lang="ru-RU"/>
               <a:t>Образец подзаголовка</a:t>
             </a:r>
-            <a:endParaRPr lang="en-US"/>
-          </a:p>
-        </p:txBody>
-      </p:sp>
-      <p:sp>
-        <p:nvSpPr>
-          <p:cNvPr id="4" name="Дата 3"/>
+            <a:endParaRPr lang="en-US" dirty="0"/>
+          </a:p>
+        </p:txBody>
+      </p:sp>
+      <p:sp>
+        <p:nvSpPr>
+          <p:cNvPr id="4" name="Date Placeholder 3"/>
           <p:cNvSpPr>
             <a:spLocks noGrp="1"/>
           </p:cNvSpPr>
@@ -243,7 +342,7 @@
           <a:p>
             <a:fld id="{1202CAAE-B88B-4A0D-9AC5-2205A6F72F37}" type="datetimeFigureOut">
               <a:rPr lang="en-US" smtClean="0"/>
-              <a:t>12/17/2024</a:t>
+              <a:t>12/18/2024</a:t>
             </a:fld>
             <a:endParaRPr lang="en-US"/>
           </a:p>
@@ -251,7 +350,7 @@
       </p:sp>
       <p:sp>
         <p:nvSpPr>
-          <p:cNvPr id="5" name="Нижний колонтитул 4"/>
+          <p:cNvPr id="5" name="Footer Placeholder 4"/>
           <p:cNvSpPr>
             <a:spLocks noGrp="1"/>
           </p:cNvSpPr>
@@ -270,7 +369,7 @@
       </p:sp>
       <p:sp>
         <p:nvSpPr>
-          <p:cNvPr id="6" name="Номер слайда 5"/>
+          <p:cNvPr id="6" name="Slide Number Placeholder 5"/>
           <p:cNvSpPr>
             <a:spLocks noGrp="1"/>
           </p:cNvSpPr>
@@ -291,10 +390,48 @@
           </a:p>
         </p:txBody>
       </p:sp>
+      <p:cxnSp>
+        <p:nvCxnSpPr>
+          <p:cNvPr id="9" name="Straight Connector 8"/>
+          <p:cNvCxnSpPr/>
+          <p:nvPr/>
+        </p:nvCxnSpPr>
+        <p:spPr>
+          <a:xfrm>
+            <a:off x="1207658" y="4343400"/>
+            <a:ext cx="9875520" cy="0"/>
+          </a:xfrm>
+          <a:prstGeom prst="line">
+            <a:avLst/>
+          </a:prstGeom>
+          <a:ln w="6350">
+            <a:solidFill>
+              <a:schemeClr val="tx1">
+                <a:lumMod val="50000"/>
+                <a:lumOff val="50000"/>
+              </a:schemeClr>
+            </a:solidFill>
+          </a:ln>
+        </p:spPr>
+        <p:style>
+          <a:lnRef idx="1">
+            <a:schemeClr val="accent1"/>
+          </a:lnRef>
+          <a:fillRef idx="0">
+            <a:schemeClr val="accent1"/>
+          </a:fillRef>
+          <a:effectRef idx="0">
+            <a:schemeClr val="accent1"/>
+          </a:effectRef>
+          <a:fontRef idx="minor">
+            <a:schemeClr val="tx1"/>
+          </a:fontRef>
+        </p:style>
+      </p:cxnSp>
     </p:spTree>
     <p:extLst>
       <p:ext uri="{BB962C8B-B14F-4D97-AF65-F5344CB8AC3E}">
-        <p14:creationId xmlns:p14="http://schemas.microsoft.com/office/powerpoint/2010/main" val="2498413064"/>
+        <p14:creationId xmlns:p14="http://schemas.microsoft.com/office/powerpoint/2010/main" val="3077928094"/>
       </p:ext>
     </p:extLst>
   </p:cSld>
@@ -323,7 +460,7 @@
       </p:grpSpPr>
       <p:sp>
         <p:nvSpPr>
-          <p:cNvPr id="2" name="Заголовок 1"/>
+          <p:cNvPr id="2" name="Title 1"/>
           <p:cNvSpPr>
             <a:spLocks noGrp="1"/>
           </p:cNvSpPr>
@@ -337,16 +474,16 @@
           <a:lstStyle/>
           <a:p>
             <a:r>
-              <a:rPr lang="ru-RU" smtClean="0"/>
+              <a:rPr lang="ru-RU"/>
               <a:t>Образец заголовка</a:t>
             </a:r>
-            <a:endParaRPr lang="en-US"/>
-          </a:p>
-        </p:txBody>
-      </p:sp>
-      <p:sp>
-        <p:nvSpPr>
-          <p:cNvPr id="3" name="Вертикальный текст 2"/>
+            <a:endParaRPr lang="en-US" dirty="0"/>
+          </a:p>
+        </p:txBody>
+      </p:sp>
+      <p:sp>
+        <p:nvSpPr>
+          <p:cNvPr id="3" name="Vertical Text Placeholder 2"/>
           <p:cNvSpPr>
             <a:spLocks noGrp="1"/>
           </p:cNvSpPr>
@@ -356,49 +493,49 @@
         </p:nvSpPr>
         <p:spPr/>
         <p:txBody>
-          <a:bodyPr vert="eaVert"/>
+          <a:bodyPr vert="eaVert" lIns="45720" tIns="0" rIns="45720" bIns="0"/>
           <a:lstStyle/>
           <a:p>
             <a:pPr lvl="0"/>
             <a:r>
-              <a:rPr lang="ru-RU" smtClean="0"/>
+              <a:rPr lang="ru-RU"/>
               <a:t>Образец текста</a:t>
             </a:r>
           </a:p>
           <a:p>
             <a:pPr lvl="1"/>
             <a:r>
-              <a:rPr lang="ru-RU" smtClean="0"/>
+              <a:rPr lang="ru-RU"/>
               <a:t>Второй уровень</a:t>
             </a:r>
           </a:p>
           <a:p>
             <a:pPr lvl="2"/>
             <a:r>
-              <a:rPr lang="ru-RU" smtClean="0"/>
+              <a:rPr lang="ru-RU"/>
               <a:t>Третий уровень</a:t>
             </a:r>
           </a:p>
           <a:p>
             <a:pPr lvl="3"/>
             <a:r>
-              <a:rPr lang="ru-RU" smtClean="0"/>
+              <a:rPr lang="ru-RU"/>
               <a:t>Четвертый уровень</a:t>
             </a:r>
           </a:p>
           <a:p>
             <a:pPr lvl="4"/>
             <a:r>
-              <a:rPr lang="ru-RU" smtClean="0"/>
+              <a:rPr lang="ru-RU"/>
               <a:t>Пятый уровень</a:t>
             </a:r>
-            <a:endParaRPr lang="en-US"/>
-          </a:p>
-        </p:txBody>
-      </p:sp>
-      <p:sp>
-        <p:nvSpPr>
-          <p:cNvPr id="4" name="Дата 3"/>
+            <a:endParaRPr lang="en-US" dirty="0"/>
+          </a:p>
+        </p:txBody>
+      </p:sp>
+      <p:sp>
+        <p:nvSpPr>
+          <p:cNvPr id="4" name="Date Placeholder 3"/>
           <p:cNvSpPr>
             <a:spLocks noGrp="1"/>
           </p:cNvSpPr>
@@ -413,7 +550,7 @@
           <a:p>
             <a:fld id="{1202CAAE-B88B-4A0D-9AC5-2205A6F72F37}" type="datetimeFigureOut">
               <a:rPr lang="en-US" smtClean="0"/>
-              <a:t>12/17/2024</a:t>
+              <a:t>12/18/2024</a:t>
             </a:fld>
             <a:endParaRPr lang="en-US"/>
           </a:p>
@@ -421,7 +558,7 @@
       </p:sp>
       <p:sp>
         <p:nvSpPr>
-          <p:cNvPr id="5" name="Нижний колонтитул 4"/>
+          <p:cNvPr id="5" name="Footer Placeholder 4"/>
           <p:cNvSpPr>
             <a:spLocks noGrp="1"/>
           </p:cNvSpPr>
@@ -440,7 +577,7 @@
       </p:sp>
       <p:sp>
         <p:nvSpPr>
-          <p:cNvPr id="6" name="Номер слайда 5"/>
+          <p:cNvPr id="6" name="Slide Number Placeholder 5"/>
           <p:cNvSpPr>
             <a:spLocks noGrp="1"/>
           </p:cNvSpPr>
@@ -464,7 +601,7 @@
     </p:spTree>
     <p:extLst>
       <p:ext uri="{BB962C8B-B14F-4D97-AF65-F5344CB8AC3E}">
-        <p14:creationId xmlns:p14="http://schemas.microsoft.com/office/powerpoint/2010/main" val="749153164"/>
+        <p14:creationId xmlns:p14="http://schemas.microsoft.com/office/powerpoint/2010/main" val="2489124978"/>
       </p:ext>
     </p:extLst>
   </p:cSld>
@@ -475,7 +612,7 @@
 </file>
 
 <file path=ppt/slideLayouts/slideLayout11.xml><?xml version="1.0" encoding="utf-8"?>
-<p:sldLayout xmlns:a="http://schemas.openxmlformats.org/drawingml/2006/main" xmlns:r="http://schemas.openxmlformats.org/officeDocument/2006/relationships" xmlns:p="http://schemas.openxmlformats.org/presentationml/2006/main" type="vertTitleAndTx" preserve="1">
+<p:sldLayout xmlns:a="http://schemas.openxmlformats.org/drawingml/2006/main" xmlns:r="http://schemas.openxmlformats.org/officeDocument/2006/relationships" xmlns:p="http://schemas.openxmlformats.org/presentationml/2006/main" showMasterSp="0" type="vertTitleAndTx" preserve="1">
   <p:cSld name="Вертикальный заголовок и текст">
     <p:spTree>
       <p:nvGrpSpPr>
@@ -493,7 +630,83 @@
       </p:grpSpPr>
       <p:sp>
         <p:nvSpPr>
-          <p:cNvPr id="2" name="Вертикальный заголовок 1"/>
+          <p:cNvPr id="7" name="Rectangle 6"/>
+          <p:cNvSpPr/>
+          <p:nvPr/>
+        </p:nvSpPr>
+        <p:spPr>
+          <a:xfrm>
+            <a:off x="3175" y="6400800"/>
+            <a:ext cx="12188825" cy="457200"/>
+          </a:xfrm>
+          <a:prstGeom prst="rect">
+            <a:avLst/>
+          </a:prstGeom>
+          <a:solidFill>
+            <a:schemeClr val="accent2"/>
+          </a:solidFill>
+          <a:ln>
+            <a:noFill/>
+          </a:ln>
+        </p:spPr>
+        <p:style>
+          <a:lnRef idx="2">
+            <a:schemeClr val="accent1">
+              <a:shade val="50000"/>
+            </a:schemeClr>
+          </a:lnRef>
+          <a:fillRef idx="1">
+            <a:schemeClr val="accent1"/>
+          </a:fillRef>
+          <a:effectRef idx="0">
+            <a:schemeClr val="accent1"/>
+          </a:effectRef>
+          <a:fontRef idx="minor">
+            <a:schemeClr val="lt1"/>
+          </a:fontRef>
+        </p:style>
+      </p:sp>
+      <p:sp>
+        <p:nvSpPr>
+          <p:cNvPr id="8" name="Rectangle 7"/>
+          <p:cNvSpPr/>
+          <p:nvPr/>
+        </p:nvSpPr>
+        <p:spPr>
+          <a:xfrm>
+            <a:off x="15" y="6334316"/>
+            <a:ext cx="12188825" cy="64008"/>
+          </a:xfrm>
+          <a:prstGeom prst="rect">
+            <a:avLst/>
+          </a:prstGeom>
+          <a:solidFill>
+            <a:schemeClr val="accent1"/>
+          </a:solidFill>
+          <a:ln>
+            <a:noFill/>
+          </a:ln>
+        </p:spPr>
+        <p:style>
+          <a:lnRef idx="2">
+            <a:schemeClr val="accent1">
+              <a:shade val="50000"/>
+            </a:schemeClr>
+          </a:lnRef>
+          <a:fillRef idx="1">
+            <a:schemeClr val="accent1"/>
+          </a:fillRef>
+          <a:effectRef idx="0">
+            <a:schemeClr val="accent1"/>
+          </a:effectRef>
+          <a:fontRef idx="minor">
+            <a:schemeClr val="lt1"/>
+          </a:fontRef>
+        </p:style>
+      </p:sp>
+      <p:sp>
+        <p:nvSpPr>
+          <p:cNvPr id="2" name="Vertical Title 1"/>
           <p:cNvSpPr>
             <a:spLocks noGrp="1"/>
           </p:cNvSpPr>
@@ -503,8 +716,8 @@
         </p:nvSpPr>
         <p:spPr>
           <a:xfrm>
-            <a:off x="8724900" y="365125"/>
-            <a:ext cx="2628900" cy="5811838"/>
+            <a:off x="8724900" y="414778"/>
+            <a:ext cx="2628900" cy="5757421"/>
           </a:xfrm>
         </p:spPr>
         <p:txBody>
@@ -512,16 +725,16 @@
           <a:lstStyle/>
           <a:p>
             <a:r>
-              <a:rPr lang="ru-RU" smtClean="0"/>
+              <a:rPr lang="ru-RU"/>
               <a:t>Образец заголовка</a:t>
             </a:r>
-            <a:endParaRPr lang="en-US"/>
-          </a:p>
-        </p:txBody>
-      </p:sp>
-      <p:sp>
-        <p:nvSpPr>
-          <p:cNvPr id="3" name="Вертикальный текст 2"/>
+            <a:endParaRPr lang="en-US" dirty="0"/>
+          </a:p>
+        </p:txBody>
+      </p:sp>
+      <p:sp>
+        <p:nvSpPr>
+          <p:cNvPr id="3" name="Vertical Text Placeholder 2"/>
           <p:cNvSpPr>
             <a:spLocks noGrp="1"/>
           </p:cNvSpPr>
@@ -531,54 +744,54 @@
         </p:nvSpPr>
         <p:spPr>
           <a:xfrm>
-            <a:off x="838200" y="365125"/>
-            <a:ext cx="7734300" cy="5811838"/>
-          </a:xfrm>
-        </p:spPr>
-        <p:txBody>
-          <a:bodyPr vert="eaVert"/>
+            <a:off x="838200" y="414778"/>
+            <a:ext cx="7734300" cy="5757422"/>
+          </a:xfrm>
+        </p:spPr>
+        <p:txBody>
+          <a:bodyPr vert="eaVert" lIns="45720" tIns="0" rIns="45720" bIns="0"/>
           <a:lstStyle/>
           <a:p>
             <a:pPr lvl="0"/>
             <a:r>
-              <a:rPr lang="ru-RU" smtClean="0"/>
+              <a:rPr lang="ru-RU"/>
               <a:t>Образец текста</a:t>
             </a:r>
           </a:p>
           <a:p>
             <a:pPr lvl="1"/>
             <a:r>
-              <a:rPr lang="ru-RU" smtClean="0"/>
+              <a:rPr lang="ru-RU"/>
               <a:t>Второй уровень</a:t>
             </a:r>
           </a:p>
           <a:p>
             <a:pPr lvl="2"/>
             <a:r>
-              <a:rPr lang="ru-RU" smtClean="0"/>
+              <a:rPr lang="ru-RU"/>
               <a:t>Третий уровень</a:t>
             </a:r>
           </a:p>
           <a:p>
             <a:pPr lvl="3"/>
             <a:r>
-              <a:rPr lang="ru-RU" smtClean="0"/>
+              <a:rPr lang="ru-RU"/>
               <a:t>Четвертый уровень</a:t>
             </a:r>
           </a:p>
           <a:p>
             <a:pPr lvl="4"/>
             <a:r>
-              <a:rPr lang="ru-RU" smtClean="0"/>
+              <a:rPr lang="ru-RU"/>
               <a:t>Пятый уровень</a:t>
             </a:r>
-            <a:endParaRPr lang="en-US"/>
-          </a:p>
-        </p:txBody>
-      </p:sp>
-      <p:sp>
-        <p:nvSpPr>
-          <p:cNvPr id="4" name="Дата 3"/>
+            <a:endParaRPr lang="en-US" dirty="0"/>
+          </a:p>
+        </p:txBody>
+      </p:sp>
+      <p:sp>
+        <p:nvSpPr>
+          <p:cNvPr id="4" name="Date Placeholder 3"/>
           <p:cNvSpPr>
             <a:spLocks noGrp="1"/>
           </p:cNvSpPr>
@@ -593,7 +806,7 @@
           <a:p>
             <a:fld id="{1202CAAE-B88B-4A0D-9AC5-2205A6F72F37}" type="datetimeFigureOut">
               <a:rPr lang="en-US" smtClean="0"/>
-              <a:t>12/17/2024</a:t>
+              <a:t>12/18/2024</a:t>
             </a:fld>
             <a:endParaRPr lang="en-US"/>
           </a:p>
@@ -601,7 +814,7 @@
       </p:sp>
       <p:sp>
         <p:nvSpPr>
-          <p:cNvPr id="5" name="Нижний колонтитул 4"/>
+          <p:cNvPr id="5" name="Footer Placeholder 4"/>
           <p:cNvSpPr>
             <a:spLocks noGrp="1"/>
           </p:cNvSpPr>
@@ -620,7 +833,7 @@
       </p:sp>
       <p:sp>
         <p:nvSpPr>
-          <p:cNvPr id="6" name="Номер слайда 5"/>
+          <p:cNvPr id="6" name="Slide Number Placeholder 5"/>
           <p:cNvSpPr>
             <a:spLocks noGrp="1"/>
           </p:cNvSpPr>
@@ -644,7 +857,7 @@
     </p:spTree>
     <p:extLst>
       <p:ext uri="{BB962C8B-B14F-4D97-AF65-F5344CB8AC3E}">
-        <p14:creationId xmlns:p14="http://schemas.microsoft.com/office/powerpoint/2010/main" val="1193228562"/>
+        <p14:creationId xmlns:p14="http://schemas.microsoft.com/office/powerpoint/2010/main" val="3107638451"/>
       </p:ext>
     </p:extLst>
   </p:cSld>
@@ -673,7 +886,7 @@
       </p:grpSpPr>
       <p:sp>
         <p:nvSpPr>
-          <p:cNvPr id="2" name="Заголовок 1"/>
+          <p:cNvPr id="2" name="Title 1"/>
           <p:cNvSpPr>
             <a:spLocks noGrp="1"/>
           </p:cNvSpPr>
@@ -684,19 +897,23 @@
         <p:spPr/>
         <p:txBody>
           <a:bodyPr/>
-          <a:lstStyle/>
-          <a:p>
-            <a:r>
-              <a:rPr lang="ru-RU" smtClean="0"/>
+          <a:lstStyle>
+            <a:lvl1pPr marL="0">
+              <a:defRPr/>
+            </a:lvl1pPr>
+          </a:lstStyle>
+          <a:p>
+            <a:r>
+              <a:rPr lang="ru-RU"/>
               <a:t>Образец заголовка</a:t>
             </a:r>
-            <a:endParaRPr lang="en-US"/>
-          </a:p>
-        </p:txBody>
-      </p:sp>
-      <p:sp>
-        <p:nvSpPr>
-          <p:cNvPr id="3" name="Объект 2"/>
+            <a:endParaRPr lang="en-US" dirty="0"/>
+          </a:p>
+        </p:txBody>
+      </p:sp>
+      <p:sp>
+        <p:nvSpPr>
+          <p:cNvPr id="3" name="Content Placeholder 2"/>
           <p:cNvSpPr>
             <a:spLocks noGrp="1"/>
           </p:cNvSpPr>
@@ -711,44 +928,44 @@
           <a:p>
             <a:pPr lvl="0"/>
             <a:r>
-              <a:rPr lang="ru-RU" smtClean="0"/>
+              <a:rPr lang="ru-RU"/>
               <a:t>Образец текста</a:t>
             </a:r>
           </a:p>
           <a:p>
             <a:pPr lvl="1"/>
             <a:r>
-              <a:rPr lang="ru-RU" smtClean="0"/>
+              <a:rPr lang="ru-RU"/>
               <a:t>Второй уровень</a:t>
             </a:r>
           </a:p>
           <a:p>
             <a:pPr lvl="2"/>
             <a:r>
-              <a:rPr lang="ru-RU" smtClean="0"/>
+              <a:rPr lang="ru-RU"/>
               <a:t>Третий уровень</a:t>
             </a:r>
           </a:p>
           <a:p>
             <a:pPr lvl="3"/>
             <a:r>
-              <a:rPr lang="ru-RU" smtClean="0"/>
+              <a:rPr lang="ru-RU"/>
               <a:t>Четвертый уровень</a:t>
             </a:r>
           </a:p>
           <a:p>
             <a:pPr lvl="4"/>
             <a:r>
-              <a:rPr lang="ru-RU" smtClean="0"/>
+              <a:rPr lang="ru-RU"/>
               <a:t>Пятый уровень</a:t>
             </a:r>
-            <a:endParaRPr lang="en-US"/>
-          </a:p>
-        </p:txBody>
-      </p:sp>
-      <p:sp>
-        <p:nvSpPr>
-          <p:cNvPr id="4" name="Дата 3"/>
+            <a:endParaRPr lang="en-US" dirty="0"/>
+          </a:p>
+        </p:txBody>
+      </p:sp>
+      <p:sp>
+        <p:nvSpPr>
+          <p:cNvPr id="4" name="Date Placeholder 3"/>
           <p:cNvSpPr>
             <a:spLocks noGrp="1"/>
           </p:cNvSpPr>
@@ -763,7 +980,7 @@
           <a:p>
             <a:fld id="{1202CAAE-B88B-4A0D-9AC5-2205A6F72F37}" type="datetimeFigureOut">
               <a:rPr lang="en-US" smtClean="0"/>
-              <a:t>12/17/2024</a:t>
+              <a:t>12/18/2024</a:t>
             </a:fld>
             <a:endParaRPr lang="en-US"/>
           </a:p>
@@ -771,7 +988,7 @@
       </p:sp>
       <p:sp>
         <p:nvSpPr>
-          <p:cNvPr id="5" name="Нижний колонтитул 4"/>
+          <p:cNvPr id="5" name="Footer Placeholder 4"/>
           <p:cNvSpPr>
             <a:spLocks noGrp="1"/>
           </p:cNvSpPr>
@@ -790,7 +1007,7 @@
       </p:sp>
       <p:sp>
         <p:nvSpPr>
-          <p:cNvPr id="6" name="Номер слайда 5"/>
+          <p:cNvPr id="6" name="Slide Number Placeholder 5"/>
           <p:cNvSpPr>
             <a:spLocks noGrp="1"/>
           </p:cNvSpPr>
@@ -814,7 +1031,7 @@
     </p:spTree>
     <p:extLst>
       <p:ext uri="{BB962C8B-B14F-4D97-AF65-F5344CB8AC3E}">
-        <p14:creationId xmlns:p14="http://schemas.microsoft.com/office/powerpoint/2010/main" val="4007504080"/>
+        <p14:creationId xmlns:p14="http://schemas.microsoft.com/office/powerpoint/2010/main" val="3158107142"/>
       </p:ext>
     </p:extLst>
   </p:cSld>
@@ -825,8 +1042,16 @@
 </file>
 
 <file path=ppt/slideLayouts/slideLayout3.xml><?xml version="1.0" encoding="utf-8"?>
-<p:sldLayout xmlns:a="http://schemas.openxmlformats.org/drawingml/2006/main" xmlns:r="http://schemas.openxmlformats.org/officeDocument/2006/relationships" xmlns:p="http://schemas.openxmlformats.org/presentationml/2006/main" type="secHead" preserve="1">
+<p:sldLayout xmlns:a="http://schemas.openxmlformats.org/drawingml/2006/main" xmlns:r="http://schemas.openxmlformats.org/officeDocument/2006/relationships" xmlns:p="http://schemas.openxmlformats.org/presentationml/2006/main" showMasterSp="0" type="secHead" preserve="1">
   <p:cSld name="Заголовок раздела">
+    <p:bg>
+      <p:bgPr>
+        <a:solidFill>
+          <a:schemeClr val="bg1"/>
+        </a:solidFill>
+        <a:effectLst/>
+      </p:bgPr>
+    </p:bg>
     <p:spTree>
       <p:nvGrpSpPr>
         <p:cNvPr id="1" name=""/>
@@ -843,7 +1068,83 @@
       </p:grpSpPr>
       <p:sp>
         <p:nvSpPr>
-          <p:cNvPr id="2" name="Заголовок 1"/>
+          <p:cNvPr id="7" name="Rectangle 6"/>
+          <p:cNvSpPr/>
+          <p:nvPr/>
+        </p:nvSpPr>
+        <p:spPr>
+          <a:xfrm>
+            <a:off x="3175" y="6400800"/>
+            <a:ext cx="12188825" cy="457200"/>
+          </a:xfrm>
+          <a:prstGeom prst="rect">
+            <a:avLst/>
+          </a:prstGeom>
+          <a:solidFill>
+            <a:schemeClr val="accent2"/>
+          </a:solidFill>
+          <a:ln>
+            <a:noFill/>
+          </a:ln>
+        </p:spPr>
+        <p:style>
+          <a:lnRef idx="2">
+            <a:schemeClr val="accent1">
+              <a:shade val="50000"/>
+            </a:schemeClr>
+          </a:lnRef>
+          <a:fillRef idx="1">
+            <a:schemeClr val="accent1"/>
+          </a:fillRef>
+          <a:effectRef idx="0">
+            <a:schemeClr val="accent1"/>
+          </a:effectRef>
+          <a:fontRef idx="minor">
+            <a:schemeClr val="lt1"/>
+          </a:fontRef>
+        </p:style>
+      </p:sp>
+      <p:sp>
+        <p:nvSpPr>
+          <p:cNvPr id="8" name="Rectangle 7"/>
+          <p:cNvSpPr/>
+          <p:nvPr/>
+        </p:nvSpPr>
+        <p:spPr>
+          <a:xfrm>
+            <a:off x="15" y="6334316"/>
+            <a:ext cx="12188825" cy="64008"/>
+          </a:xfrm>
+          <a:prstGeom prst="rect">
+            <a:avLst/>
+          </a:prstGeom>
+          <a:solidFill>
+            <a:schemeClr val="accent1"/>
+          </a:solidFill>
+          <a:ln>
+            <a:noFill/>
+          </a:ln>
+        </p:spPr>
+        <p:style>
+          <a:lnRef idx="2">
+            <a:schemeClr val="accent1">
+              <a:shade val="50000"/>
+            </a:schemeClr>
+          </a:lnRef>
+          <a:fillRef idx="1">
+            <a:schemeClr val="accent1"/>
+          </a:fillRef>
+          <a:effectRef idx="0">
+            <a:schemeClr val="accent1"/>
+          </a:effectRef>
+          <a:fontRef idx="minor">
+            <a:schemeClr val="lt1"/>
+          </a:fontRef>
+        </p:style>
+      </p:sp>
+      <p:sp>
+        <p:nvSpPr>
+          <p:cNvPr id="2" name="Title 1"/>
           <p:cNvSpPr>
             <a:spLocks noGrp="1"/>
           </p:cNvSpPr>
@@ -853,58 +1154,71 @@
         </p:nvSpPr>
         <p:spPr>
           <a:xfrm>
-            <a:off x="831850" y="1709738"/>
-            <a:ext cx="10515600" cy="2852737"/>
-          </a:xfrm>
-        </p:spPr>
-        <p:txBody>
-          <a:bodyPr anchor="b"/>
+            <a:off x="1097280" y="758952"/>
+            <a:ext cx="10058400" cy="3566160"/>
+          </a:xfrm>
+        </p:spPr>
+        <p:txBody>
+          <a:bodyPr anchor="b" anchorCtr="0">
+            <a:normAutofit/>
+          </a:bodyPr>
           <a:lstStyle>
             <a:lvl1pPr>
-              <a:defRPr sz="6000"/>
-            </a:lvl1pPr>
-          </a:lstStyle>
-          <a:p>
-            <a:r>
-              <a:rPr lang="ru-RU" smtClean="0"/>
-              <a:t>Образец заголовка</a:t>
-            </a:r>
-            <a:endParaRPr lang="en-US"/>
-          </a:p>
-        </p:txBody>
-      </p:sp>
-      <p:sp>
-        <p:nvSpPr>
-          <p:cNvPr id="3" name="Текст 2"/>
-          <p:cNvSpPr>
-            <a:spLocks noGrp="1"/>
-          </p:cNvSpPr>
-          <p:nvPr>
-            <p:ph type="body" idx="1"/>
-          </p:nvPr>
-        </p:nvSpPr>
-        <p:spPr>
-          <a:xfrm>
-            <a:off x="831850" y="4589463"/>
-            <a:ext cx="10515600" cy="1500187"/>
-          </a:xfrm>
-        </p:spPr>
-        <p:txBody>
-          <a:bodyPr/>
-          <a:lstStyle>
-            <a:lvl1pPr marL="0" indent="0">
-              <a:buNone/>
-              <a:defRPr sz="2400">
+              <a:lnSpc>
+                <a:spcPct val="85000"/>
+              </a:lnSpc>
+              <a:defRPr sz="8000" b="0">
                 <a:solidFill>
                   <a:schemeClr val="tx1">
-                    <a:tint val="75000"/>
+                    <a:lumMod val="85000"/>
+                    <a:lumOff val="15000"/>
                   </a:schemeClr>
                 </a:solidFill>
               </a:defRPr>
             </a:lvl1pPr>
+          </a:lstStyle>
+          <a:p>
+            <a:r>
+              <a:rPr lang="ru-RU"/>
+              <a:t>Образец заголовка</a:t>
+            </a:r>
+            <a:endParaRPr lang="en-US" dirty="0"/>
+          </a:p>
+        </p:txBody>
+      </p:sp>
+      <p:sp>
+        <p:nvSpPr>
+          <p:cNvPr id="3" name="Text Placeholder 2"/>
+          <p:cNvSpPr>
+            <a:spLocks noGrp="1"/>
+          </p:cNvSpPr>
+          <p:nvPr>
+            <p:ph type="body" idx="1"/>
+          </p:nvPr>
+        </p:nvSpPr>
+        <p:spPr>
+          <a:xfrm>
+            <a:off x="1097280" y="4453128"/>
+            <a:ext cx="10058400" cy="1143000"/>
+          </a:xfrm>
+        </p:spPr>
+        <p:txBody>
+          <a:bodyPr lIns="91440" rIns="91440" anchor="t" anchorCtr="0">
+            <a:normAutofit/>
+          </a:bodyPr>
+          <a:lstStyle>
+            <a:lvl1pPr marL="0" indent="0">
+              <a:buNone/>
+              <a:defRPr sz="2400" cap="all" spc="200" baseline="0">
+                <a:solidFill>
+                  <a:schemeClr val="tx2"/>
+                </a:solidFill>
+                <a:latin typeface="+mj-lt"/>
+              </a:defRPr>
+            </a:lvl1pPr>
             <a:lvl2pPr marL="457200" indent="0">
               <a:buNone/>
-              <a:defRPr sz="2000">
+              <a:defRPr sz="1800">
                 <a:solidFill>
                   <a:schemeClr val="tx1">
                     <a:tint val="75000"/>
@@ -914,7 +1228,7 @@
             </a:lvl2pPr>
             <a:lvl3pPr marL="914400" indent="0">
               <a:buNone/>
-              <a:defRPr sz="1800">
+              <a:defRPr sz="1600">
                 <a:solidFill>
                   <a:schemeClr val="tx1">
                     <a:tint val="75000"/>
@@ -924,7 +1238,7 @@
             </a:lvl3pPr>
             <a:lvl4pPr marL="1371600" indent="0">
               <a:buNone/>
-              <a:defRPr sz="1600">
+              <a:defRPr sz="1400">
                 <a:solidFill>
                   <a:schemeClr val="tx1">
                     <a:tint val="75000"/>
@@ -934,7 +1248,7 @@
             </a:lvl4pPr>
             <a:lvl5pPr marL="1828800" indent="0">
               <a:buNone/>
-              <a:defRPr sz="1600">
+              <a:defRPr sz="1400">
                 <a:solidFill>
                   <a:schemeClr val="tx1">
                     <a:tint val="75000"/>
@@ -944,7 +1258,7 @@
             </a:lvl5pPr>
             <a:lvl6pPr marL="2286000" indent="0">
               <a:buNone/>
-              <a:defRPr sz="1600">
+              <a:defRPr sz="1400">
                 <a:solidFill>
                   <a:schemeClr val="tx1">
                     <a:tint val="75000"/>
@@ -954,7 +1268,7 @@
             </a:lvl6pPr>
             <a:lvl7pPr marL="2743200" indent="0">
               <a:buNone/>
-              <a:defRPr sz="1600">
+              <a:defRPr sz="1400">
                 <a:solidFill>
                   <a:schemeClr val="tx1">
                     <a:tint val="75000"/>
@@ -964,7 +1278,7 @@
             </a:lvl7pPr>
             <a:lvl8pPr marL="3200400" indent="0">
               <a:buNone/>
-              <a:defRPr sz="1600">
+              <a:defRPr sz="1400">
                 <a:solidFill>
                   <a:schemeClr val="tx1">
                     <a:tint val="75000"/>
@@ -974,7 +1288,7 @@
             </a:lvl8pPr>
             <a:lvl9pPr marL="3657600" indent="0">
               <a:buNone/>
-              <a:defRPr sz="1600">
+              <a:defRPr sz="1400">
                 <a:solidFill>
                   <a:schemeClr val="tx1">
                     <a:tint val="75000"/>
@@ -986,7 +1300,7 @@
           <a:p>
             <a:pPr lvl="0"/>
             <a:r>
-              <a:rPr lang="ru-RU" smtClean="0"/>
+              <a:rPr lang="ru-RU"/>
               <a:t>Образец текста</a:t>
             </a:r>
           </a:p>
@@ -994,7 +1308,7 @@
       </p:sp>
       <p:sp>
         <p:nvSpPr>
-          <p:cNvPr id="4" name="Дата 3"/>
+          <p:cNvPr id="4" name="Date Placeholder 3"/>
           <p:cNvSpPr>
             <a:spLocks noGrp="1"/>
           </p:cNvSpPr>
@@ -1009,7 +1323,7 @@
           <a:p>
             <a:fld id="{1202CAAE-B88B-4A0D-9AC5-2205A6F72F37}" type="datetimeFigureOut">
               <a:rPr lang="en-US" smtClean="0"/>
-              <a:t>12/17/2024</a:t>
+              <a:t>12/18/2024</a:t>
             </a:fld>
             <a:endParaRPr lang="en-US"/>
           </a:p>
@@ -1017,7 +1331,7 @@
       </p:sp>
       <p:sp>
         <p:nvSpPr>
-          <p:cNvPr id="5" name="Нижний колонтитул 4"/>
+          <p:cNvPr id="5" name="Footer Placeholder 4"/>
           <p:cNvSpPr>
             <a:spLocks noGrp="1"/>
           </p:cNvSpPr>
@@ -1036,7 +1350,7 @@
       </p:sp>
       <p:sp>
         <p:nvSpPr>
-          <p:cNvPr id="6" name="Номер слайда 5"/>
+          <p:cNvPr id="6" name="Slide Number Placeholder 5"/>
           <p:cNvSpPr>
             <a:spLocks noGrp="1"/>
           </p:cNvSpPr>
@@ -1057,10 +1371,48 @@
           </a:p>
         </p:txBody>
       </p:sp>
+      <p:cxnSp>
+        <p:nvCxnSpPr>
+          <p:cNvPr id="9" name="Straight Connector 8"/>
+          <p:cNvCxnSpPr/>
+          <p:nvPr/>
+        </p:nvCxnSpPr>
+        <p:spPr>
+          <a:xfrm>
+            <a:off x="1207658" y="4343400"/>
+            <a:ext cx="9875520" cy="0"/>
+          </a:xfrm>
+          <a:prstGeom prst="line">
+            <a:avLst/>
+          </a:prstGeom>
+          <a:ln w="6350">
+            <a:solidFill>
+              <a:schemeClr val="tx1">
+                <a:lumMod val="50000"/>
+                <a:lumOff val="50000"/>
+              </a:schemeClr>
+            </a:solidFill>
+          </a:ln>
+        </p:spPr>
+        <p:style>
+          <a:lnRef idx="1">
+            <a:schemeClr val="accent1"/>
+          </a:lnRef>
+          <a:fillRef idx="0">
+            <a:schemeClr val="accent1"/>
+          </a:fillRef>
+          <a:effectRef idx="0">
+            <a:schemeClr val="accent1"/>
+          </a:effectRef>
+          <a:fontRef idx="minor">
+            <a:schemeClr val="tx1"/>
+          </a:fontRef>
+        </p:style>
+      </p:cxnSp>
     </p:spTree>
     <p:extLst>
       <p:ext uri="{BB962C8B-B14F-4D97-AF65-F5344CB8AC3E}">
-        <p14:creationId xmlns:p14="http://schemas.microsoft.com/office/powerpoint/2010/main" val="2651348898"/>
+        <p14:creationId xmlns:p14="http://schemas.microsoft.com/office/powerpoint/2010/main" val="3174968316"/>
       </p:ext>
     </p:extLst>
   </p:cSld>
@@ -1089,7 +1441,7 @@
       </p:grpSpPr>
       <p:sp>
         <p:nvSpPr>
-          <p:cNvPr id="2" name="Заголовок 1"/>
+          <p:cNvPr id="8" name="Title 7"/>
           <p:cNvSpPr>
             <a:spLocks noGrp="1"/>
           </p:cNvSpPr>
@@ -1097,22 +1449,27 @@
             <p:ph type="title"/>
           </p:nvPr>
         </p:nvSpPr>
-        <p:spPr/>
+        <p:spPr>
+          <a:xfrm>
+            <a:off x="1097280" y="286603"/>
+            <a:ext cx="10058400" cy="1450757"/>
+          </a:xfrm>
+        </p:spPr>
         <p:txBody>
           <a:bodyPr/>
           <a:lstStyle/>
           <a:p>
             <a:r>
-              <a:rPr lang="ru-RU" smtClean="0"/>
+              <a:rPr lang="ru-RU"/>
               <a:t>Образец заголовка</a:t>
             </a:r>
-            <a:endParaRPr lang="en-US"/>
-          </a:p>
-        </p:txBody>
-      </p:sp>
-      <p:sp>
-        <p:nvSpPr>
-          <p:cNvPr id="3" name="Объект 2"/>
+            <a:endParaRPr lang="en-US" dirty="0"/>
+          </a:p>
+        </p:txBody>
+      </p:sp>
+      <p:sp>
+        <p:nvSpPr>
+          <p:cNvPr id="3" name="Content Placeholder 2"/>
           <p:cNvSpPr>
             <a:spLocks noGrp="1"/>
           </p:cNvSpPr>
@@ -1122,8 +1479,8 @@
         </p:nvSpPr>
         <p:spPr>
           <a:xfrm>
-            <a:off x="838200" y="1825625"/>
-            <a:ext cx="5181600" cy="4351338"/>
+            <a:off x="1097279" y="1845734"/>
+            <a:ext cx="4937760" cy="4023360"/>
           </a:xfrm>
         </p:spPr>
         <p:txBody>
@@ -1132,44 +1489,44 @@
           <a:p>
             <a:pPr lvl="0"/>
             <a:r>
-              <a:rPr lang="ru-RU" smtClean="0"/>
+              <a:rPr lang="ru-RU"/>
               <a:t>Образец текста</a:t>
             </a:r>
           </a:p>
           <a:p>
             <a:pPr lvl="1"/>
             <a:r>
-              <a:rPr lang="ru-RU" smtClean="0"/>
+              <a:rPr lang="ru-RU"/>
               <a:t>Второй уровень</a:t>
             </a:r>
           </a:p>
           <a:p>
             <a:pPr lvl="2"/>
             <a:r>
-              <a:rPr lang="ru-RU" smtClean="0"/>
+              <a:rPr lang="ru-RU"/>
               <a:t>Третий уровень</a:t>
             </a:r>
           </a:p>
           <a:p>
             <a:pPr lvl="3"/>
             <a:r>
-              <a:rPr lang="ru-RU" smtClean="0"/>
+              <a:rPr lang="ru-RU"/>
               <a:t>Четвертый уровень</a:t>
             </a:r>
           </a:p>
           <a:p>
             <a:pPr lvl="4"/>
             <a:r>
-              <a:rPr lang="ru-RU" smtClean="0"/>
+              <a:rPr lang="ru-RU"/>
               <a:t>Пятый уровень</a:t>
             </a:r>
-            <a:endParaRPr lang="en-US"/>
-          </a:p>
-        </p:txBody>
-      </p:sp>
-      <p:sp>
-        <p:nvSpPr>
-          <p:cNvPr id="4" name="Объект 3"/>
+            <a:endParaRPr lang="en-US" dirty="0"/>
+          </a:p>
+        </p:txBody>
+      </p:sp>
+      <p:sp>
+        <p:nvSpPr>
+          <p:cNvPr id="4" name="Content Placeholder 3"/>
           <p:cNvSpPr>
             <a:spLocks noGrp="1"/>
           </p:cNvSpPr>
@@ -1179,8 +1536,8 @@
         </p:nvSpPr>
         <p:spPr>
           <a:xfrm>
-            <a:off x="6172200" y="1825625"/>
-            <a:ext cx="5181600" cy="4351338"/>
+            <a:off x="6217920" y="1845735"/>
+            <a:ext cx="4937760" cy="4023360"/>
           </a:xfrm>
         </p:spPr>
         <p:txBody>
@@ -1189,44 +1546,44 @@
           <a:p>
             <a:pPr lvl="0"/>
             <a:r>
-              <a:rPr lang="ru-RU" smtClean="0"/>
+              <a:rPr lang="ru-RU"/>
               <a:t>Образец текста</a:t>
             </a:r>
           </a:p>
           <a:p>
             <a:pPr lvl="1"/>
             <a:r>
-              <a:rPr lang="ru-RU" smtClean="0"/>
+              <a:rPr lang="ru-RU"/>
               <a:t>Второй уровень</a:t>
             </a:r>
           </a:p>
           <a:p>
             <a:pPr lvl="2"/>
             <a:r>
-              <a:rPr lang="ru-RU" smtClean="0"/>
+              <a:rPr lang="ru-RU"/>
               <a:t>Третий уровень</a:t>
             </a:r>
           </a:p>
           <a:p>
             <a:pPr lvl="3"/>
             <a:r>
-              <a:rPr lang="ru-RU" smtClean="0"/>
+              <a:rPr lang="ru-RU"/>
               <a:t>Четвертый уровень</a:t>
             </a:r>
           </a:p>
           <a:p>
             <a:pPr lvl="4"/>
             <a:r>
-              <a:rPr lang="ru-RU" smtClean="0"/>
+              <a:rPr lang="ru-RU"/>
               <a:t>Пятый уровень</a:t>
             </a:r>
-            <a:endParaRPr lang="en-US"/>
-          </a:p>
-        </p:txBody>
-      </p:sp>
-      <p:sp>
-        <p:nvSpPr>
-          <p:cNvPr id="5" name="Дата 4"/>
+            <a:endParaRPr lang="en-US" dirty="0"/>
+          </a:p>
+        </p:txBody>
+      </p:sp>
+      <p:sp>
+        <p:nvSpPr>
+          <p:cNvPr id="5" name="Date Placeholder 4"/>
           <p:cNvSpPr>
             <a:spLocks noGrp="1"/>
           </p:cNvSpPr>
@@ -1241,7 +1598,7 @@
           <a:p>
             <a:fld id="{1202CAAE-B88B-4A0D-9AC5-2205A6F72F37}" type="datetimeFigureOut">
               <a:rPr lang="en-US" smtClean="0"/>
-              <a:t>12/17/2024</a:t>
+              <a:t>12/18/2024</a:t>
             </a:fld>
             <a:endParaRPr lang="en-US"/>
           </a:p>
@@ -1249,7 +1606,7 @@
       </p:sp>
       <p:sp>
         <p:nvSpPr>
-          <p:cNvPr id="6" name="Нижний колонтитул 5"/>
+          <p:cNvPr id="6" name="Footer Placeholder 5"/>
           <p:cNvSpPr>
             <a:spLocks noGrp="1"/>
           </p:cNvSpPr>
@@ -1268,7 +1625,7 @@
       </p:sp>
       <p:sp>
         <p:nvSpPr>
-          <p:cNvPr id="7" name="Номер слайда 6"/>
+          <p:cNvPr id="7" name="Slide Number Placeholder 6"/>
           <p:cNvSpPr>
             <a:spLocks noGrp="1"/>
           </p:cNvSpPr>
@@ -1292,7 +1649,7 @@
     </p:spTree>
     <p:extLst>
       <p:ext uri="{BB962C8B-B14F-4D97-AF65-F5344CB8AC3E}">
-        <p14:creationId xmlns:p14="http://schemas.microsoft.com/office/powerpoint/2010/main" val="2310927584"/>
+        <p14:creationId xmlns:p14="http://schemas.microsoft.com/office/powerpoint/2010/main" val="4259085816"/>
       </p:ext>
     </p:extLst>
   </p:cSld>
@@ -1321,7 +1678,7 @@
       </p:grpSpPr>
       <p:sp>
         <p:nvSpPr>
-          <p:cNvPr id="2" name="Заголовок 1"/>
+          <p:cNvPr id="10" name="Title 9"/>
           <p:cNvSpPr>
             <a:spLocks noGrp="1"/>
           </p:cNvSpPr>
@@ -1331,8 +1688,8 @@
         </p:nvSpPr>
         <p:spPr>
           <a:xfrm>
-            <a:off x="839788" y="365125"/>
-            <a:ext cx="10515600" cy="1325563"/>
+            <a:off x="1097280" y="286603"/>
+            <a:ext cx="10058400" cy="1450757"/>
           </a:xfrm>
         </p:spPr>
         <p:txBody>
@@ -1340,16 +1697,16 @@
           <a:lstStyle/>
           <a:p>
             <a:r>
-              <a:rPr lang="ru-RU" smtClean="0"/>
+              <a:rPr lang="ru-RU"/>
               <a:t>Образец заголовка</a:t>
             </a:r>
-            <a:endParaRPr lang="en-US"/>
-          </a:p>
-        </p:txBody>
-      </p:sp>
-      <p:sp>
-        <p:nvSpPr>
-          <p:cNvPr id="3" name="Текст 2"/>
+            <a:endParaRPr lang="en-US" dirty="0"/>
+          </a:p>
+        </p:txBody>
+      </p:sp>
+      <p:sp>
+        <p:nvSpPr>
+          <p:cNvPr id="3" name="Text Placeholder 2"/>
           <p:cNvSpPr>
             <a:spLocks noGrp="1"/>
           </p:cNvSpPr>
@@ -1359,16 +1716,22 @@
         </p:nvSpPr>
         <p:spPr>
           <a:xfrm>
-            <a:off x="839788" y="1681163"/>
-            <a:ext cx="5157787" cy="823912"/>
-          </a:xfrm>
-        </p:spPr>
-        <p:txBody>
-          <a:bodyPr anchor="b"/>
+            <a:off x="1097280" y="1846052"/>
+            <a:ext cx="4937760" cy="736282"/>
+          </a:xfrm>
+        </p:spPr>
+        <p:txBody>
+          <a:bodyPr lIns="91440" rIns="91440" anchor="ctr">
+            <a:normAutofit/>
+          </a:bodyPr>
           <a:lstStyle>
             <a:lvl1pPr marL="0" indent="0">
               <a:buNone/>
-              <a:defRPr sz="2400" b="1"/>
+              <a:defRPr sz="2000" b="0" cap="all" baseline="0">
+                <a:solidFill>
+                  <a:schemeClr val="tx2"/>
+                </a:solidFill>
+              </a:defRPr>
             </a:lvl1pPr>
             <a:lvl2pPr marL="457200" indent="0">
               <a:buNone/>
@@ -1406,7 +1769,7 @@
           <a:p>
             <a:pPr lvl="0"/>
             <a:r>
-              <a:rPr lang="ru-RU" smtClean="0"/>
+              <a:rPr lang="ru-RU"/>
               <a:t>Образец текста</a:t>
             </a:r>
           </a:p>
@@ -1414,7 +1777,7 @@
       </p:sp>
       <p:sp>
         <p:nvSpPr>
-          <p:cNvPr id="4" name="Объект 3"/>
+          <p:cNvPr id="4" name="Content Placeholder 3"/>
           <p:cNvSpPr>
             <a:spLocks noGrp="1"/>
           </p:cNvSpPr>
@@ -1424,8 +1787,8 @@
         </p:nvSpPr>
         <p:spPr>
           <a:xfrm>
-            <a:off x="839788" y="2505075"/>
-            <a:ext cx="5157787" cy="3684588"/>
+            <a:off x="1097280" y="2582334"/>
+            <a:ext cx="4937760" cy="3378200"/>
           </a:xfrm>
         </p:spPr>
         <p:txBody>
@@ -1434,44 +1797,44 @@
           <a:p>
             <a:pPr lvl="0"/>
             <a:r>
-              <a:rPr lang="ru-RU" smtClean="0"/>
+              <a:rPr lang="ru-RU"/>
               <a:t>Образец текста</a:t>
             </a:r>
           </a:p>
           <a:p>
             <a:pPr lvl="1"/>
             <a:r>
-              <a:rPr lang="ru-RU" smtClean="0"/>
+              <a:rPr lang="ru-RU"/>
               <a:t>Второй уровень</a:t>
             </a:r>
           </a:p>
           <a:p>
             <a:pPr lvl="2"/>
             <a:r>
-              <a:rPr lang="ru-RU" smtClean="0"/>
+              <a:rPr lang="ru-RU"/>
               <a:t>Третий уровень</a:t>
             </a:r>
           </a:p>
           <a:p>
             <a:pPr lvl="3"/>
             <a:r>
-              <a:rPr lang="ru-RU" smtClean="0"/>
+              <a:rPr lang="ru-RU"/>
               <a:t>Четвертый уровень</a:t>
             </a:r>
           </a:p>
           <a:p>
             <a:pPr lvl="4"/>
             <a:r>
-              <a:rPr lang="ru-RU" smtClean="0"/>
+              <a:rPr lang="ru-RU"/>
               <a:t>Пятый уровень</a:t>
             </a:r>
-            <a:endParaRPr lang="en-US"/>
-          </a:p>
-        </p:txBody>
-      </p:sp>
-      <p:sp>
-        <p:nvSpPr>
-          <p:cNvPr id="5" name="Текст 4"/>
+            <a:endParaRPr lang="en-US" dirty="0"/>
+          </a:p>
+        </p:txBody>
+      </p:sp>
+      <p:sp>
+        <p:nvSpPr>
+          <p:cNvPr id="5" name="Text Placeholder 4"/>
           <p:cNvSpPr>
             <a:spLocks noGrp="1"/>
           </p:cNvSpPr>
@@ -1481,16 +1844,22 @@
         </p:nvSpPr>
         <p:spPr>
           <a:xfrm>
-            <a:off x="6172200" y="1681163"/>
-            <a:ext cx="5183188" cy="823912"/>
-          </a:xfrm>
-        </p:spPr>
-        <p:txBody>
-          <a:bodyPr anchor="b"/>
+            <a:off x="6217920" y="1846052"/>
+            <a:ext cx="4937760" cy="736282"/>
+          </a:xfrm>
+        </p:spPr>
+        <p:txBody>
+          <a:bodyPr lIns="91440" rIns="91440" anchor="ctr">
+            <a:normAutofit/>
+          </a:bodyPr>
           <a:lstStyle>
             <a:lvl1pPr marL="0" indent="0">
               <a:buNone/>
-              <a:defRPr sz="2400" b="1"/>
+              <a:defRPr sz="2000" b="0" cap="all" baseline="0">
+                <a:solidFill>
+                  <a:schemeClr val="tx2"/>
+                </a:solidFill>
+              </a:defRPr>
             </a:lvl1pPr>
             <a:lvl2pPr marL="457200" indent="0">
               <a:buNone/>
@@ -1528,7 +1897,7 @@
           <a:p>
             <a:pPr lvl="0"/>
             <a:r>
-              <a:rPr lang="ru-RU" smtClean="0"/>
+              <a:rPr lang="ru-RU"/>
               <a:t>Образец текста</a:t>
             </a:r>
           </a:p>
@@ -1536,7 +1905,7 @@
       </p:sp>
       <p:sp>
         <p:nvSpPr>
-          <p:cNvPr id="6" name="Объект 5"/>
+          <p:cNvPr id="6" name="Content Placeholder 5"/>
           <p:cNvSpPr>
             <a:spLocks noGrp="1"/>
           </p:cNvSpPr>
@@ -1546,8 +1915,8 @@
         </p:nvSpPr>
         <p:spPr>
           <a:xfrm>
-            <a:off x="6172200" y="2505075"/>
-            <a:ext cx="5183188" cy="3684588"/>
+            <a:off x="6217920" y="2582334"/>
+            <a:ext cx="4937760" cy="3378200"/>
           </a:xfrm>
         </p:spPr>
         <p:txBody>
@@ -1556,44 +1925,44 @@
           <a:p>
             <a:pPr lvl="0"/>
             <a:r>
-              <a:rPr lang="ru-RU" smtClean="0"/>
+              <a:rPr lang="ru-RU"/>
               <a:t>Образец текста</a:t>
             </a:r>
           </a:p>
           <a:p>
             <a:pPr lvl="1"/>
             <a:r>
-              <a:rPr lang="ru-RU" smtClean="0"/>
+              <a:rPr lang="ru-RU"/>
               <a:t>Второй уровень</a:t>
             </a:r>
           </a:p>
           <a:p>
             <a:pPr lvl="2"/>
             <a:r>
-              <a:rPr lang="ru-RU" smtClean="0"/>
+              <a:rPr lang="ru-RU"/>
               <a:t>Третий уровень</a:t>
             </a:r>
           </a:p>
           <a:p>
             <a:pPr lvl="3"/>
             <a:r>
-              <a:rPr lang="ru-RU" smtClean="0"/>
+              <a:rPr lang="ru-RU"/>
               <a:t>Четвертый уровень</a:t>
             </a:r>
           </a:p>
           <a:p>
             <a:pPr lvl="4"/>
             <a:r>
-              <a:rPr lang="ru-RU" smtClean="0"/>
+              <a:rPr lang="ru-RU"/>
               <a:t>Пятый уровень</a:t>
             </a:r>
-            <a:endParaRPr lang="en-US"/>
-          </a:p>
-        </p:txBody>
-      </p:sp>
-      <p:sp>
-        <p:nvSpPr>
-          <p:cNvPr id="7" name="Дата 6"/>
+            <a:endParaRPr lang="en-US" dirty="0"/>
+          </a:p>
+        </p:txBody>
+      </p:sp>
+      <p:sp>
+        <p:nvSpPr>
+          <p:cNvPr id="7" name="Date Placeholder 6"/>
           <p:cNvSpPr>
             <a:spLocks noGrp="1"/>
           </p:cNvSpPr>
@@ -1608,7 +1977,7 @@
           <a:p>
             <a:fld id="{1202CAAE-B88B-4A0D-9AC5-2205A6F72F37}" type="datetimeFigureOut">
               <a:rPr lang="en-US" smtClean="0"/>
-              <a:t>12/17/2024</a:t>
+              <a:t>12/18/2024</a:t>
             </a:fld>
             <a:endParaRPr lang="en-US"/>
           </a:p>
@@ -1616,7 +1985,7 @@
       </p:sp>
       <p:sp>
         <p:nvSpPr>
-          <p:cNvPr id="8" name="Нижний колонтитул 7"/>
+          <p:cNvPr id="8" name="Footer Placeholder 7"/>
           <p:cNvSpPr>
             <a:spLocks noGrp="1"/>
           </p:cNvSpPr>
@@ -1635,7 +2004,7 @@
       </p:sp>
       <p:sp>
         <p:nvSpPr>
-          <p:cNvPr id="9" name="Номер слайда 8"/>
+          <p:cNvPr id="9" name="Slide Number Placeholder 8"/>
           <p:cNvSpPr>
             <a:spLocks noGrp="1"/>
           </p:cNvSpPr>
@@ -1659,7 +2028,7 @@
     </p:spTree>
     <p:extLst>
       <p:ext uri="{BB962C8B-B14F-4D97-AF65-F5344CB8AC3E}">
-        <p14:creationId xmlns:p14="http://schemas.microsoft.com/office/powerpoint/2010/main" val="3854350172"/>
+        <p14:creationId xmlns:p14="http://schemas.microsoft.com/office/powerpoint/2010/main" val="3613344848"/>
       </p:ext>
     </p:extLst>
   </p:cSld>
@@ -1688,7 +2057,7 @@
       </p:grpSpPr>
       <p:sp>
         <p:nvSpPr>
-          <p:cNvPr id="2" name="Заголовок 1"/>
+          <p:cNvPr id="2" name="Title 1"/>
           <p:cNvSpPr>
             <a:spLocks noGrp="1"/>
           </p:cNvSpPr>
@@ -1702,16 +2071,16 @@
           <a:lstStyle/>
           <a:p>
             <a:r>
-              <a:rPr lang="ru-RU" smtClean="0"/>
+              <a:rPr lang="ru-RU"/>
               <a:t>Образец заголовка</a:t>
             </a:r>
-            <a:endParaRPr lang="en-US"/>
-          </a:p>
-        </p:txBody>
-      </p:sp>
-      <p:sp>
-        <p:nvSpPr>
-          <p:cNvPr id="3" name="Дата 2"/>
+            <a:endParaRPr lang="en-US" dirty="0"/>
+          </a:p>
+        </p:txBody>
+      </p:sp>
+      <p:sp>
+        <p:nvSpPr>
+          <p:cNvPr id="3" name="Date Placeholder 2"/>
           <p:cNvSpPr>
             <a:spLocks noGrp="1"/>
           </p:cNvSpPr>
@@ -1726,7 +2095,7 @@
           <a:p>
             <a:fld id="{1202CAAE-B88B-4A0D-9AC5-2205A6F72F37}" type="datetimeFigureOut">
               <a:rPr lang="en-US" smtClean="0"/>
-              <a:t>12/17/2024</a:t>
+              <a:t>12/18/2024</a:t>
             </a:fld>
             <a:endParaRPr lang="en-US"/>
           </a:p>
@@ -1734,7 +2103,7 @@
       </p:sp>
       <p:sp>
         <p:nvSpPr>
-          <p:cNvPr id="4" name="Нижний колонтитул 3"/>
+          <p:cNvPr id="4" name="Footer Placeholder 3"/>
           <p:cNvSpPr>
             <a:spLocks noGrp="1"/>
           </p:cNvSpPr>
@@ -1753,7 +2122,7 @@
       </p:sp>
       <p:sp>
         <p:nvSpPr>
-          <p:cNvPr id="5" name="Номер слайда 4"/>
+          <p:cNvPr id="5" name="Slide Number Placeholder 4"/>
           <p:cNvSpPr>
             <a:spLocks noGrp="1"/>
           </p:cNvSpPr>
@@ -1777,7 +2146,7 @@
     </p:spTree>
     <p:extLst>
       <p:ext uri="{BB962C8B-B14F-4D97-AF65-F5344CB8AC3E}">
-        <p14:creationId xmlns:p14="http://schemas.microsoft.com/office/powerpoint/2010/main" val="3447132619"/>
+        <p14:creationId xmlns:p14="http://schemas.microsoft.com/office/powerpoint/2010/main" val="1407077285"/>
       </p:ext>
     </p:extLst>
   </p:cSld>
@@ -1788,7 +2157,7 @@
 </file>
 
 <file path=ppt/slideLayouts/slideLayout7.xml><?xml version="1.0" encoding="utf-8"?>
-<p:sldLayout xmlns:a="http://schemas.openxmlformats.org/drawingml/2006/main" xmlns:r="http://schemas.openxmlformats.org/officeDocument/2006/relationships" xmlns:p="http://schemas.openxmlformats.org/presentationml/2006/main" type="blank" preserve="1">
+<p:sldLayout xmlns:a="http://schemas.openxmlformats.org/drawingml/2006/main" xmlns:r="http://schemas.openxmlformats.org/officeDocument/2006/relationships" xmlns:p="http://schemas.openxmlformats.org/presentationml/2006/main" showMasterSp="0" type="blank" preserve="1">
   <p:cSld name="Пустой слайд">
     <p:spTree>
       <p:nvGrpSpPr>
@@ -1806,7 +2175,83 @@
       </p:grpSpPr>
       <p:sp>
         <p:nvSpPr>
-          <p:cNvPr id="2" name="Дата 1"/>
+          <p:cNvPr id="5" name="Rectangle 4"/>
+          <p:cNvSpPr/>
+          <p:nvPr/>
+        </p:nvSpPr>
+        <p:spPr>
+          <a:xfrm>
+            <a:off x="3175" y="6400800"/>
+            <a:ext cx="12188825" cy="457200"/>
+          </a:xfrm>
+          <a:prstGeom prst="rect">
+            <a:avLst/>
+          </a:prstGeom>
+          <a:solidFill>
+            <a:schemeClr val="accent2"/>
+          </a:solidFill>
+          <a:ln>
+            <a:noFill/>
+          </a:ln>
+        </p:spPr>
+        <p:style>
+          <a:lnRef idx="2">
+            <a:schemeClr val="accent1">
+              <a:shade val="50000"/>
+            </a:schemeClr>
+          </a:lnRef>
+          <a:fillRef idx="1">
+            <a:schemeClr val="accent1"/>
+          </a:fillRef>
+          <a:effectRef idx="0">
+            <a:schemeClr val="accent1"/>
+          </a:effectRef>
+          <a:fontRef idx="minor">
+            <a:schemeClr val="lt1"/>
+          </a:fontRef>
+        </p:style>
+      </p:sp>
+      <p:sp>
+        <p:nvSpPr>
+          <p:cNvPr id="6" name="Rectangle 5"/>
+          <p:cNvSpPr/>
+          <p:nvPr/>
+        </p:nvSpPr>
+        <p:spPr>
+          <a:xfrm>
+            <a:off x="15" y="6334316"/>
+            <a:ext cx="12188825" cy="64008"/>
+          </a:xfrm>
+          <a:prstGeom prst="rect">
+            <a:avLst/>
+          </a:prstGeom>
+          <a:solidFill>
+            <a:schemeClr val="accent1"/>
+          </a:solidFill>
+          <a:ln>
+            <a:noFill/>
+          </a:ln>
+        </p:spPr>
+        <p:style>
+          <a:lnRef idx="2">
+            <a:schemeClr val="accent1">
+              <a:shade val="50000"/>
+            </a:schemeClr>
+          </a:lnRef>
+          <a:fillRef idx="1">
+            <a:schemeClr val="accent1"/>
+          </a:fillRef>
+          <a:effectRef idx="0">
+            <a:schemeClr val="accent1"/>
+          </a:effectRef>
+          <a:fontRef idx="minor">
+            <a:schemeClr val="lt1"/>
+          </a:fontRef>
+        </p:style>
+      </p:sp>
+      <p:sp>
+        <p:nvSpPr>
+          <p:cNvPr id="7" name="Date Placeholder 6"/>
           <p:cNvSpPr>
             <a:spLocks noGrp="1"/>
           </p:cNvSpPr>
@@ -1821,7 +2266,7 @@
           <a:p>
             <a:fld id="{1202CAAE-B88B-4A0D-9AC5-2205A6F72F37}" type="datetimeFigureOut">
               <a:rPr lang="en-US" smtClean="0"/>
-              <a:t>12/17/2024</a:t>
+              <a:t>12/18/2024</a:t>
             </a:fld>
             <a:endParaRPr lang="en-US"/>
           </a:p>
@@ -1829,7 +2274,7 @@
       </p:sp>
       <p:sp>
         <p:nvSpPr>
-          <p:cNvPr id="3" name="Нижний колонтитул 2"/>
+          <p:cNvPr id="8" name="Footer Placeholder 7"/>
           <p:cNvSpPr>
             <a:spLocks noGrp="1"/>
           </p:cNvSpPr>
@@ -1840,7 +2285,15 @@
         <p:spPr/>
         <p:txBody>
           <a:bodyPr/>
-          <a:lstStyle/>
+          <a:lstStyle>
+            <a:lvl1pPr>
+              <a:defRPr>
+                <a:solidFill>
+                  <a:srgbClr val="FFFFFF"/>
+                </a:solidFill>
+              </a:defRPr>
+            </a:lvl1pPr>
+          </a:lstStyle>
           <a:p>
             <a:endParaRPr lang="en-US"/>
           </a:p>
@@ -1848,7 +2301,7 @@
       </p:sp>
       <p:sp>
         <p:nvSpPr>
-          <p:cNvPr id="4" name="Номер слайда 3"/>
+          <p:cNvPr id="9" name="Slide Number Placeholder 8"/>
           <p:cNvSpPr>
             <a:spLocks noGrp="1"/>
           </p:cNvSpPr>
@@ -1872,7 +2325,7 @@
     </p:spTree>
     <p:extLst>
       <p:ext uri="{BB962C8B-B14F-4D97-AF65-F5344CB8AC3E}">
-        <p14:creationId xmlns:p14="http://schemas.microsoft.com/office/powerpoint/2010/main" val="1846300201"/>
+        <p14:creationId xmlns:p14="http://schemas.microsoft.com/office/powerpoint/2010/main" val="2389201678"/>
       </p:ext>
     </p:extLst>
   </p:cSld>
@@ -1883,7 +2336,7 @@
 </file>
 
 <file path=ppt/slideLayouts/slideLayout8.xml><?xml version="1.0" encoding="utf-8"?>
-<p:sldLayout xmlns:a="http://schemas.openxmlformats.org/drawingml/2006/main" xmlns:r="http://schemas.openxmlformats.org/officeDocument/2006/relationships" xmlns:p="http://schemas.openxmlformats.org/presentationml/2006/main" type="objTx" preserve="1">
+<p:sldLayout xmlns:a="http://schemas.openxmlformats.org/drawingml/2006/main" xmlns:r="http://schemas.openxmlformats.org/officeDocument/2006/relationships" xmlns:p="http://schemas.openxmlformats.org/presentationml/2006/main" showMasterSp="0" type="objTx" preserve="1">
   <p:cSld name="Объект с подписью">
     <p:spTree>
       <p:nvGrpSpPr>
@@ -1901,7 +2354,83 @@
       </p:grpSpPr>
       <p:sp>
         <p:nvSpPr>
-          <p:cNvPr id="2" name="Заголовок 1"/>
+          <p:cNvPr id="8" name="Rectangle 7"/>
+          <p:cNvSpPr/>
+          <p:nvPr/>
+        </p:nvSpPr>
+        <p:spPr>
+          <a:xfrm>
+            <a:off x="16" y="0"/>
+            <a:ext cx="4050791" cy="6858000"/>
+          </a:xfrm>
+          <a:prstGeom prst="rect">
+            <a:avLst/>
+          </a:prstGeom>
+          <a:solidFill>
+            <a:schemeClr val="accent2"/>
+          </a:solidFill>
+          <a:ln>
+            <a:noFill/>
+          </a:ln>
+        </p:spPr>
+        <p:style>
+          <a:lnRef idx="2">
+            <a:schemeClr val="accent1">
+              <a:shade val="50000"/>
+            </a:schemeClr>
+          </a:lnRef>
+          <a:fillRef idx="1">
+            <a:schemeClr val="accent1"/>
+          </a:fillRef>
+          <a:effectRef idx="0">
+            <a:schemeClr val="accent1"/>
+          </a:effectRef>
+          <a:fontRef idx="minor">
+            <a:schemeClr val="lt1"/>
+          </a:fontRef>
+        </p:style>
+      </p:sp>
+      <p:sp>
+        <p:nvSpPr>
+          <p:cNvPr id="9" name="Rectangle 8"/>
+          <p:cNvSpPr/>
+          <p:nvPr/>
+        </p:nvSpPr>
+        <p:spPr>
+          <a:xfrm>
+            <a:off x="4040071" y="0"/>
+            <a:ext cx="64008" cy="6858000"/>
+          </a:xfrm>
+          <a:prstGeom prst="rect">
+            <a:avLst/>
+          </a:prstGeom>
+          <a:solidFill>
+            <a:schemeClr val="accent1"/>
+          </a:solidFill>
+          <a:ln>
+            <a:noFill/>
+          </a:ln>
+        </p:spPr>
+        <p:style>
+          <a:lnRef idx="2">
+            <a:schemeClr val="accent1">
+              <a:shade val="50000"/>
+            </a:schemeClr>
+          </a:lnRef>
+          <a:fillRef idx="1">
+            <a:schemeClr val="accent1"/>
+          </a:fillRef>
+          <a:effectRef idx="0">
+            <a:schemeClr val="accent1"/>
+          </a:effectRef>
+          <a:fontRef idx="minor">
+            <a:schemeClr val="lt1"/>
+          </a:fontRef>
+        </p:style>
+      </p:sp>
+      <p:sp>
+        <p:nvSpPr>
+          <p:cNvPr id="2" name="Title 1"/>
           <p:cNvSpPr>
             <a:spLocks noGrp="1"/>
           </p:cNvSpPr>
@@ -1911,232 +2440,246 @@
         </p:nvSpPr>
         <p:spPr>
           <a:xfrm>
-            <a:off x="839788" y="457200"/>
-            <a:ext cx="3932237" cy="1600200"/>
-          </a:xfrm>
-        </p:spPr>
-        <p:txBody>
-          <a:bodyPr anchor="b"/>
+            <a:off x="457200" y="594359"/>
+            <a:ext cx="3200400" cy="2286000"/>
+          </a:xfrm>
+        </p:spPr>
+        <p:txBody>
+          <a:bodyPr anchor="b">
+            <a:normAutofit/>
+          </a:bodyPr>
           <a:lstStyle>
             <a:lvl1pPr>
-              <a:defRPr sz="3200"/>
+              <a:defRPr sz="3600" b="0">
+                <a:solidFill>
+                  <a:srgbClr val="FFFFFF"/>
+                </a:solidFill>
+              </a:defRPr>
             </a:lvl1pPr>
           </a:lstStyle>
           <a:p>
             <a:r>
-              <a:rPr lang="ru-RU" smtClean="0"/>
+              <a:rPr lang="ru-RU"/>
               <a:t>Образец заголовка</a:t>
             </a:r>
+            <a:endParaRPr lang="en-US" dirty="0"/>
+          </a:p>
+        </p:txBody>
+      </p:sp>
+      <p:sp>
+        <p:nvSpPr>
+          <p:cNvPr id="3" name="Content Placeholder 2"/>
+          <p:cNvSpPr>
+            <a:spLocks noGrp="1"/>
+          </p:cNvSpPr>
+          <p:nvPr>
+            <p:ph idx="1"/>
+          </p:nvPr>
+        </p:nvSpPr>
+        <p:spPr>
+          <a:xfrm>
+            <a:off x="4800600" y="731520"/>
+            <a:ext cx="6492240" cy="5257800"/>
+          </a:xfrm>
+        </p:spPr>
+        <p:txBody>
+          <a:bodyPr/>
+          <a:lstStyle/>
+          <a:p>
+            <a:pPr lvl="0"/>
+            <a:r>
+              <a:rPr lang="ru-RU"/>
+              <a:t>Образец текста</a:t>
+            </a:r>
+          </a:p>
+          <a:p>
+            <a:pPr lvl="1"/>
+            <a:r>
+              <a:rPr lang="ru-RU"/>
+              <a:t>Второй уровень</a:t>
+            </a:r>
+          </a:p>
+          <a:p>
+            <a:pPr lvl="2"/>
+            <a:r>
+              <a:rPr lang="ru-RU"/>
+              <a:t>Третий уровень</a:t>
+            </a:r>
+          </a:p>
+          <a:p>
+            <a:pPr lvl="3"/>
+            <a:r>
+              <a:rPr lang="ru-RU"/>
+              <a:t>Четвертый уровень</a:t>
+            </a:r>
+          </a:p>
+          <a:p>
+            <a:pPr lvl="4"/>
+            <a:r>
+              <a:rPr lang="ru-RU"/>
+              <a:t>Пятый уровень</a:t>
+            </a:r>
+            <a:endParaRPr lang="en-US" dirty="0"/>
+          </a:p>
+        </p:txBody>
+      </p:sp>
+      <p:sp>
+        <p:nvSpPr>
+          <p:cNvPr id="4" name="Text Placeholder 3"/>
+          <p:cNvSpPr>
+            <a:spLocks noGrp="1"/>
+          </p:cNvSpPr>
+          <p:nvPr>
+            <p:ph type="body" sz="half" idx="2"/>
+          </p:nvPr>
+        </p:nvSpPr>
+        <p:spPr>
+          <a:xfrm>
+            <a:off x="457200" y="2926080"/>
+            <a:ext cx="3200400" cy="3379124"/>
+          </a:xfrm>
+        </p:spPr>
+        <p:txBody>
+          <a:bodyPr lIns="91440" rIns="91440">
+            <a:normAutofit/>
+          </a:bodyPr>
+          <a:lstStyle>
+            <a:lvl1pPr marL="0" indent="0">
+              <a:buNone/>
+              <a:defRPr sz="1500">
+                <a:solidFill>
+                  <a:srgbClr val="FFFFFF"/>
+                </a:solidFill>
+              </a:defRPr>
+            </a:lvl1pPr>
+            <a:lvl2pPr marL="457200" indent="0">
+              <a:buNone/>
+              <a:defRPr sz="1200"/>
+            </a:lvl2pPr>
+            <a:lvl3pPr marL="914400" indent="0">
+              <a:buNone/>
+              <a:defRPr sz="1000"/>
+            </a:lvl3pPr>
+            <a:lvl4pPr marL="1371600" indent="0">
+              <a:buNone/>
+              <a:defRPr sz="900"/>
+            </a:lvl4pPr>
+            <a:lvl5pPr marL="1828800" indent="0">
+              <a:buNone/>
+              <a:defRPr sz="900"/>
+            </a:lvl5pPr>
+            <a:lvl6pPr marL="2286000" indent="0">
+              <a:buNone/>
+              <a:defRPr sz="900"/>
+            </a:lvl6pPr>
+            <a:lvl7pPr marL="2743200" indent="0">
+              <a:buNone/>
+              <a:defRPr sz="900"/>
+            </a:lvl7pPr>
+            <a:lvl8pPr marL="3200400" indent="0">
+              <a:buNone/>
+              <a:defRPr sz="900"/>
+            </a:lvl8pPr>
+            <a:lvl9pPr marL="3657600" indent="0">
+              <a:buNone/>
+              <a:defRPr sz="900"/>
+            </a:lvl9pPr>
+          </a:lstStyle>
+          <a:p>
+            <a:pPr lvl="0"/>
+            <a:r>
+              <a:rPr lang="ru-RU"/>
+              <a:t>Образец текста</a:t>
+            </a:r>
+          </a:p>
+        </p:txBody>
+      </p:sp>
+      <p:sp>
+        <p:nvSpPr>
+          <p:cNvPr id="5" name="Date Placeholder 4"/>
+          <p:cNvSpPr>
+            <a:spLocks noGrp="1"/>
+          </p:cNvSpPr>
+          <p:nvPr>
+            <p:ph type="dt" sz="half" idx="10"/>
+          </p:nvPr>
+        </p:nvSpPr>
+        <p:spPr>
+          <a:xfrm>
+            <a:off x="465512" y="6459785"/>
+            <a:ext cx="2618510" cy="365125"/>
+          </a:xfrm>
+        </p:spPr>
+        <p:txBody>
+          <a:bodyPr/>
+          <a:lstStyle>
+            <a:lvl1pPr algn="l">
+              <a:defRPr/>
+            </a:lvl1pPr>
+          </a:lstStyle>
+          <a:p>
+            <a:fld id="{1202CAAE-B88B-4A0D-9AC5-2205A6F72F37}" type="datetimeFigureOut">
+              <a:rPr lang="en-US" smtClean="0"/>
+              <a:t>12/18/2024</a:t>
+            </a:fld>
             <a:endParaRPr lang="en-US"/>
           </a:p>
         </p:txBody>
       </p:sp>
       <p:sp>
         <p:nvSpPr>
-          <p:cNvPr id="3" name="Объект 2"/>
-          <p:cNvSpPr>
-            <a:spLocks noGrp="1"/>
-          </p:cNvSpPr>
-          <p:nvPr>
-            <p:ph idx="1"/>
-          </p:nvPr>
-        </p:nvSpPr>
-        <p:spPr>
-          <a:xfrm>
-            <a:off x="5183188" y="987425"/>
-            <a:ext cx="6172200" cy="4873625"/>
-          </a:xfrm>
-        </p:spPr>
+          <p:cNvPr id="6" name="Footer Placeholder 5"/>
+          <p:cNvSpPr>
+            <a:spLocks noGrp="1"/>
+          </p:cNvSpPr>
+          <p:nvPr>
+            <p:ph type="ftr" sz="quarter" idx="11"/>
+          </p:nvPr>
+        </p:nvSpPr>
+        <p:spPr>
+          <a:xfrm>
+            <a:off x="4800600" y="6459785"/>
+            <a:ext cx="4648200" cy="365125"/>
+          </a:xfrm>
+        </p:spPr>
+        <p:txBody>
+          <a:bodyPr/>
+          <a:lstStyle>
+            <a:lvl1pPr algn="l">
+              <a:defRPr>
+                <a:solidFill>
+                  <a:schemeClr val="tx2"/>
+                </a:solidFill>
+              </a:defRPr>
+            </a:lvl1pPr>
+          </a:lstStyle>
+          <a:p>
+            <a:endParaRPr lang="en-US"/>
+          </a:p>
+        </p:txBody>
+      </p:sp>
+      <p:sp>
+        <p:nvSpPr>
+          <p:cNvPr id="7" name="Slide Number Placeholder 6"/>
+          <p:cNvSpPr>
+            <a:spLocks noGrp="1"/>
+          </p:cNvSpPr>
+          <p:nvPr>
+            <p:ph type="sldNum" sz="quarter" idx="12"/>
+          </p:nvPr>
+        </p:nvSpPr>
+        <p:spPr/>
         <p:txBody>
           <a:bodyPr/>
           <a:lstStyle>
             <a:lvl1pPr>
-              <a:defRPr sz="3200"/>
+              <a:defRPr>
+                <a:solidFill>
+                  <a:schemeClr val="tx2"/>
+                </a:solidFill>
+              </a:defRPr>
             </a:lvl1pPr>
-            <a:lvl2pPr>
-              <a:defRPr sz="2800"/>
-            </a:lvl2pPr>
-            <a:lvl3pPr>
-              <a:defRPr sz="2400"/>
-            </a:lvl3pPr>
-            <a:lvl4pPr>
-              <a:defRPr sz="2000"/>
-            </a:lvl4pPr>
-            <a:lvl5pPr>
-              <a:defRPr sz="2000"/>
-            </a:lvl5pPr>
-            <a:lvl6pPr>
-              <a:defRPr sz="2000"/>
-            </a:lvl6pPr>
-            <a:lvl7pPr>
-              <a:defRPr sz="2000"/>
-            </a:lvl7pPr>
-            <a:lvl8pPr>
-              <a:defRPr sz="2000"/>
-            </a:lvl8pPr>
-            <a:lvl9pPr>
-              <a:defRPr sz="2000"/>
-            </a:lvl9pPr>
           </a:lstStyle>
-          <a:p>
-            <a:pPr lvl="0"/>
-            <a:r>
-              <a:rPr lang="ru-RU" smtClean="0"/>
-              <a:t>Образец текста</a:t>
-            </a:r>
-          </a:p>
-          <a:p>
-            <a:pPr lvl="1"/>
-            <a:r>
-              <a:rPr lang="ru-RU" smtClean="0"/>
-              <a:t>Второй уровень</a:t>
-            </a:r>
-          </a:p>
-          <a:p>
-            <a:pPr lvl="2"/>
-            <a:r>
-              <a:rPr lang="ru-RU" smtClean="0"/>
-              <a:t>Третий уровень</a:t>
-            </a:r>
-          </a:p>
-          <a:p>
-            <a:pPr lvl="3"/>
-            <a:r>
-              <a:rPr lang="ru-RU" smtClean="0"/>
-              <a:t>Четвертый уровень</a:t>
-            </a:r>
-          </a:p>
-          <a:p>
-            <a:pPr lvl="4"/>
-            <a:r>
-              <a:rPr lang="ru-RU" smtClean="0"/>
-              <a:t>Пятый уровень</a:t>
-            </a:r>
-            <a:endParaRPr lang="en-US"/>
-          </a:p>
-        </p:txBody>
-      </p:sp>
-      <p:sp>
-        <p:nvSpPr>
-          <p:cNvPr id="4" name="Текст 3"/>
-          <p:cNvSpPr>
-            <a:spLocks noGrp="1"/>
-          </p:cNvSpPr>
-          <p:nvPr>
-            <p:ph type="body" sz="half" idx="2"/>
-          </p:nvPr>
-        </p:nvSpPr>
-        <p:spPr>
-          <a:xfrm>
-            <a:off x="839788" y="2057400"/>
-            <a:ext cx="3932237" cy="3811588"/>
-          </a:xfrm>
-        </p:spPr>
-        <p:txBody>
-          <a:bodyPr/>
-          <a:lstStyle>
-            <a:lvl1pPr marL="0" indent="0">
-              <a:buNone/>
-              <a:defRPr sz="1600"/>
-            </a:lvl1pPr>
-            <a:lvl2pPr marL="457200" indent="0">
-              <a:buNone/>
-              <a:defRPr sz="1400"/>
-            </a:lvl2pPr>
-            <a:lvl3pPr marL="914400" indent="0">
-              <a:buNone/>
-              <a:defRPr sz="1200"/>
-            </a:lvl3pPr>
-            <a:lvl4pPr marL="1371600" indent="0">
-              <a:buNone/>
-              <a:defRPr sz="1000"/>
-            </a:lvl4pPr>
-            <a:lvl5pPr marL="1828800" indent="0">
-              <a:buNone/>
-              <a:defRPr sz="1000"/>
-            </a:lvl5pPr>
-            <a:lvl6pPr marL="2286000" indent="0">
-              <a:buNone/>
-              <a:defRPr sz="1000"/>
-            </a:lvl6pPr>
-            <a:lvl7pPr marL="2743200" indent="0">
-              <a:buNone/>
-              <a:defRPr sz="1000"/>
-            </a:lvl7pPr>
-            <a:lvl8pPr marL="3200400" indent="0">
-              <a:buNone/>
-              <a:defRPr sz="1000"/>
-            </a:lvl8pPr>
-            <a:lvl9pPr marL="3657600" indent="0">
-              <a:buNone/>
-              <a:defRPr sz="1000"/>
-            </a:lvl9pPr>
-          </a:lstStyle>
-          <a:p>
-            <a:pPr lvl="0"/>
-            <a:r>
-              <a:rPr lang="ru-RU" smtClean="0"/>
-              <a:t>Образец текста</a:t>
-            </a:r>
-          </a:p>
-        </p:txBody>
-      </p:sp>
-      <p:sp>
-        <p:nvSpPr>
-          <p:cNvPr id="5" name="Дата 4"/>
-          <p:cNvSpPr>
-            <a:spLocks noGrp="1"/>
-          </p:cNvSpPr>
-          <p:nvPr>
-            <p:ph type="dt" sz="half" idx="10"/>
-          </p:nvPr>
-        </p:nvSpPr>
-        <p:spPr/>
-        <p:txBody>
-          <a:bodyPr/>
-          <a:lstStyle/>
-          <a:p>
-            <a:fld id="{1202CAAE-B88B-4A0D-9AC5-2205A6F72F37}" type="datetimeFigureOut">
-              <a:rPr lang="en-US" smtClean="0"/>
-              <a:t>12/17/2024</a:t>
-            </a:fld>
-            <a:endParaRPr lang="en-US"/>
-          </a:p>
-        </p:txBody>
-      </p:sp>
-      <p:sp>
-        <p:nvSpPr>
-          <p:cNvPr id="6" name="Нижний колонтитул 5"/>
-          <p:cNvSpPr>
-            <a:spLocks noGrp="1"/>
-          </p:cNvSpPr>
-          <p:nvPr>
-            <p:ph type="ftr" sz="quarter" idx="11"/>
-          </p:nvPr>
-        </p:nvSpPr>
-        <p:spPr/>
-        <p:txBody>
-          <a:bodyPr/>
-          <a:lstStyle/>
-          <a:p>
-            <a:endParaRPr lang="en-US"/>
-          </a:p>
-        </p:txBody>
-      </p:sp>
-      <p:sp>
-        <p:nvSpPr>
-          <p:cNvPr id="7" name="Номер слайда 6"/>
-          <p:cNvSpPr>
-            <a:spLocks noGrp="1"/>
-          </p:cNvSpPr>
-          <p:nvPr>
-            <p:ph type="sldNum" sz="quarter" idx="12"/>
-          </p:nvPr>
-        </p:nvSpPr>
-        <p:spPr/>
-        <p:txBody>
-          <a:bodyPr/>
-          <a:lstStyle/>
           <a:p>
             <a:fld id="{DC381697-53D4-4AAB-AE0E-1859396894CD}" type="slidenum">
               <a:rPr lang="en-US" smtClean="0"/>
@@ -2149,7 +2692,7 @@
     </p:spTree>
     <p:extLst>
       <p:ext uri="{BB962C8B-B14F-4D97-AF65-F5344CB8AC3E}">
-        <p14:creationId xmlns:p14="http://schemas.microsoft.com/office/powerpoint/2010/main" val="3851832347"/>
+        <p14:creationId xmlns:p14="http://schemas.microsoft.com/office/powerpoint/2010/main" val="1453896765"/>
       </p:ext>
     </p:extLst>
   </p:cSld>
@@ -2160,7 +2703,7 @@
 </file>
 
 <file path=ppt/slideLayouts/slideLayout9.xml><?xml version="1.0" encoding="utf-8"?>
-<p:sldLayout xmlns:a="http://schemas.openxmlformats.org/drawingml/2006/main" xmlns:r="http://schemas.openxmlformats.org/officeDocument/2006/relationships" xmlns:p="http://schemas.openxmlformats.org/presentationml/2006/main" type="picTx" preserve="1">
+<p:sldLayout xmlns:a="http://schemas.openxmlformats.org/drawingml/2006/main" xmlns:r="http://schemas.openxmlformats.org/officeDocument/2006/relationships" xmlns:p="http://schemas.openxmlformats.org/presentationml/2006/main" showMasterSp="0" type="picTx" preserve="1">
   <p:cSld name="Рисунок с подписью">
     <p:spTree>
       <p:nvGrpSpPr>
@@ -2178,7 +2721,83 @@
       </p:grpSpPr>
       <p:sp>
         <p:nvSpPr>
-          <p:cNvPr id="2" name="Заголовок 1"/>
+          <p:cNvPr id="8" name="Rectangle 7"/>
+          <p:cNvSpPr/>
+          <p:nvPr/>
+        </p:nvSpPr>
+        <p:spPr>
+          <a:xfrm>
+            <a:off x="0" y="4953000"/>
+            <a:ext cx="12188825" cy="1905000"/>
+          </a:xfrm>
+          <a:prstGeom prst="rect">
+            <a:avLst/>
+          </a:prstGeom>
+          <a:solidFill>
+            <a:schemeClr val="accent2"/>
+          </a:solidFill>
+          <a:ln>
+            <a:noFill/>
+          </a:ln>
+        </p:spPr>
+        <p:style>
+          <a:lnRef idx="2">
+            <a:schemeClr val="accent1">
+              <a:shade val="50000"/>
+            </a:schemeClr>
+          </a:lnRef>
+          <a:fillRef idx="1">
+            <a:schemeClr val="accent1"/>
+          </a:fillRef>
+          <a:effectRef idx="0">
+            <a:schemeClr val="accent1"/>
+          </a:effectRef>
+          <a:fontRef idx="minor">
+            <a:schemeClr val="lt1"/>
+          </a:fontRef>
+        </p:style>
+      </p:sp>
+      <p:sp>
+        <p:nvSpPr>
+          <p:cNvPr id="9" name="Rectangle 8"/>
+          <p:cNvSpPr/>
+          <p:nvPr/>
+        </p:nvSpPr>
+        <p:spPr>
+          <a:xfrm>
+            <a:off x="15" y="4915076"/>
+            <a:ext cx="12188825" cy="64008"/>
+          </a:xfrm>
+          <a:prstGeom prst="rect">
+            <a:avLst/>
+          </a:prstGeom>
+          <a:solidFill>
+            <a:schemeClr val="accent1"/>
+          </a:solidFill>
+          <a:ln>
+            <a:noFill/>
+          </a:ln>
+        </p:spPr>
+        <p:style>
+          <a:lnRef idx="2">
+            <a:schemeClr val="accent1">
+              <a:shade val="50000"/>
+            </a:schemeClr>
+          </a:lnRef>
+          <a:fillRef idx="1">
+            <a:schemeClr val="accent1"/>
+          </a:fillRef>
+          <a:effectRef idx="0">
+            <a:schemeClr val="accent1"/>
+          </a:effectRef>
+          <a:fontRef idx="minor">
+            <a:schemeClr val="lt1"/>
+          </a:fontRef>
+        </p:style>
+      </p:sp>
+      <p:sp>
+        <p:nvSpPr>
+          <p:cNvPr id="2" name="Title 1"/>
           <p:cNvSpPr>
             <a:spLocks noGrp="1"/>
           </p:cNvSpPr>
@@ -2188,31 +2807,37 @@
         </p:nvSpPr>
         <p:spPr>
           <a:xfrm>
-            <a:off x="839788" y="457200"/>
-            <a:ext cx="3932237" cy="1600200"/>
-          </a:xfrm>
-        </p:spPr>
-        <p:txBody>
-          <a:bodyPr anchor="b"/>
+            <a:off x="1097280" y="5074920"/>
+            <a:ext cx="10113264" cy="822960"/>
+          </a:xfrm>
+        </p:spPr>
+        <p:txBody>
+          <a:bodyPr lIns="91440" tIns="0" rIns="91440" bIns="0" anchor="b">
+            <a:noAutofit/>
+          </a:bodyPr>
           <a:lstStyle>
             <a:lvl1pPr>
-              <a:defRPr sz="3200"/>
+              <a:defRPr sz="3600" b="0">
+                <a:solidFill>
+                  <a:srgbClr val="FFFFFF"/>
+                </a:solidFill>
+              </a:defRPr>
             </a:lvl1pPr>
           </a:lstStyle>
           <a:p>
             <a:r>
-              <a:rPr lang="ru-RU" smtClean="0"/>
+              <a:rPr lang="ru-RU"/>
               <a:t>Образец заголовка</a:t>
             </a:r>
-            <a:endParaRPr lang="en-US"/>
-          </a:p>
-        </p:txBody>
-      </p:sp>
-      <p:sp>
-        <p:nvSpPr>
-          <p:cNvPr id="3" name="Рисунок 2"/>
-          <p:cNvSpPr>
-            <a:spLocks noGrp="1"/>
+            <a:endParaRPr lang="en-US" dirty="0"/>
+          </a:p>
+        </p:txBody>
+      </p:sp>
+      <p:sp>
+        <p:nvSpPr>
+          <p:cNvPr id="3" name="Picture Placeholder 2"/>
+          <p:cNvSpPr>
+            <a:spLocks noGrp="1" noChangeAspect="1"/>
           </p:cNvSpPr>
           <p:nvPr>
             <p:ph type="pic" idx="1"/>
@@ -2220,16 +2845,26 @@
         </p:nvSpPr>
         <p:spPr>
           <a:xfrm>
-            <a:off x="5183188" y="987425"/>
-            <a:ext cx="6172200" cy="4873625"/>
-          </a:xfrm>
-        </p:spPr>
-        <p:txBody>
-          <a:bodyPr/>
+            <a:off x="15" y="0"/>
+            <a:ext cx="12191985" cy="4915076"/>
+          </a:xfrm>
+          <a:blipFill>
+            <a:blip r:embed="rId2"/>
+            <a:stretch>
+              <a:fillRect/>
+            </a:stretch>
+          </a:blipFill>
+        </p:spPr>
+        <p:txBody>
+          <a:bodyPr lIns="457200" tIns="457200" anchor="t"/>
           <a:lstStyle>
             <a:lvl1pPr marL="0" indent="0">
               <a:buNone/>
-              <a:defRPr sz="3200"/>
+              <a:defRPr sz="3200">
+                <a:solidFill>
+                  <a:schemeClr val="bg1"/>
+                </a:solidFill>
+              </a:defRPr>
             </a:lvl1pPr>
             <a:lvl2pPr marL="457200" indent="0">
               <a:buNone/>
@@ -2265,13 +2900,17 @@
             </a:lvl9pPr>
           </a:lstStyle>
           <a:p>
-            <a:endParaRPr lang="en-US"/>
-          </a:p>
-        </p:txBody>
-      </p:sp>
-      <p:sp>
-        <p:nvSpPr>
-          <p:cNvPr id="4" name="Текст 3"/>
+            <a:r>
+              <a:rPr lang="ru-RU"/>
+              <a:t>Вставка рисунка</a:t>
+            </a:r>
+            <a:endParaRPr lang="en-US" dirty="0"/>
+          </a:p>
+        </p:txBody>
+      </p:sp>
+      <p:sp>
+        <p:nvSpPr>
+          <p:cNvPr id="4" name="Text Placeholder 3"/>
           <p:cNvSpPr>
             <a:spLocks noGrp="1"/>
           </p:cNvSpPr>
@@ -2281,54 +2920,66 @@
         </p:nvSpPr>
         <p:spPr>
           <a:xfrm>
-            <a:off x="839788" y="2057400"/>
-            <a:ext cx="3932237" cy="3811588"/>
-          </a:xfrm>
-        </p:spPr>
-        <p:txBody>
-          <a:bodyPr/>
+            <a:off x="1097280" y="5907023"/>
+            <a:ext cx="10113264" cy="594360"/>
+          </a:xfrm>
+        </p:spPr>
+        <p:txBody>
+          <a:bodyPr lIns="91440" tIns="0" rIns="91440" bIns="0">
+            <a:normAutofit/>
+          </a:bodyPr>
           <a:lstStyle>
             <a:lvl1pPr marL="0" indent="0">
-              <a:buNone/>
-              <a:defRPr sz="1600"/>
+              <a:spcBef>
+                <a:spcPts val="0"/>
+              </a:spcBef>
+              <a:spcAft>
+                <a:spcPts val="600"/>
+              </a:spcAft>
+              <a:buNone/>
+              <a:defRPr sz="1500">
+                <a:solidFill>
+                  <a:srgbClr val="FFFFFF"/>
+                </a:solidFill>
+              </a:defRPr>
             </a:lvl1pPr>
             <a:lvl2pPr marL="457200" indent="0">
               <a:buNone/>
-              <a:defRPr sz="1400"/>
+              <a:defRPr sz="1200"/>
             </a:lvl2pPr>
             <a:lvl3pPr marL="914400" indent="0">
               <a:buNone/>
-              <a:defRPr sz="1200"/>
+              <a:defRPr sz="1000"/>
             </a:lvl3pPr>
             <a:lvl4pPr marL="1371600" indent="0">
               <a:buNone/>
-              <a:defRPr sz="1000"/>
+              <a:defRPr sz="900"/>
             </a:lvl4pPr>
             <a:lvl5pPr marL="1828800" indent="0">
               <a:buNone/>
-              <a:defRPr sz="1000"/>
+              <a:defRPr sz="900"/>
             </a:lvl5pPr>
             <a:lvl6pPr marL="2286000" indent="0">
               <a:buNone/>
-              <a:defRPr sz="1000"/>
+              <a:defRPr sz="900"/>
             </a:lvl6pPr>
             <a:lvl7pPr marL="2743200" indent="0">
               <a:buNone/>
-              <a:defRPr sz="1000"/>
+              <a:defRPr sz="900"/>
             </a:lvl7pPr>
             <a:lvl8pPr marL="3200400" indent="0">
               <a:buNone/>
-              <a:defRPr sz="1000"/>
+              <a:defRPr sz="900"/>
             </a:lvl8pPr>
             <a:lvl9pPr marL="3657600" indent="0">
               <a:buNone/>
-              <a:defRPr sz="1000"/>
+              <a:defRPr sz="900"/>
             </a:lvl9pPr>
           </a:lstStyle>
           <a:p>
             <a:pPr lvl="0"/>
             <a:r>
-              <a:rPr lang="ru-RU" smtClean="0"/>
+              <a:rPr lang="ru-RU"/>
               <a:t>Образец текста</a:t>
             </a:r>
           </a:p>
@@ -2336,7 +2987,7 @@
       </p:sp>
       <p:sp>
         <p:nvSpPr>
-          <p:cNvPr id="5" name="Дата 4"/>
+          <p:cNvPr id="5" name="Date Placeholder 4"/>
           <p:cNvSpPr>
             <a:spLocks noGrp="1"/>
           </p:cNvSpPr>
@@ -2351,7 +3002,7 @@
           <a:p>
             <a:fld id="{1202CAAE-B88B-4A0D-9AC5-2205A6F72F37}" type="datetimeFigureOut">
               <a:rPr lang="en-US" smtClean="0"/>
-              <a:t>12/17/2024</a:t>
+              <a:t>12/18/2024</a:t>
             </a:fld>
             <a:endParaRPr lang="en-US"/>
           </a:p>
@@ -2359,7 +3010,7 @@
       </p:sp>
       <p:sp>
         <p:nvSpPr>
-          <p:cNvPr id="6" name="Нижний колонтитул 5"/>
+          <p:cNvPr id="6" name="Footer Placeholder 5"/>
           <p:cNvSpPr>
             <a:spLocks noGrp="1"/>
           </p:cNvSpPr>
@@ -2378,7 +3029,7 @@
       </p:sp>
       <p:sp>
         <p:nvSpPr>
-          <p:cNvPr id="7" name="Номер слайда 6"/>
+          <p:cNvPr id="7" name="Slide Number Placeholder 6"/>
           <p:cNvSpPr>
             <a:spLocks noGrp="1"/>
           </p:cNvSpPr>
@@ -2402,7 +3053,7 @@
     </p:spTree>
     <p:extLst>
       <p:ext uri="{BB962C8B-B14F-4D97-AF65-F5344CB8AC3E}">
-        <p14:creationId xmlns:p14="http://schemas.microsoft.com/office/powerpoint/2010/main" val="3086253538"/>
+        <p14:creationId xmlns:p14="http://schemas.microsoft.com/office/powerpoint/2010/main" val="1883695353"/>
       </p:ext>
     </p:extLst>
   </p:cSld>
@@ -2436,127 +3087,201 @@
       </p:grpSpPr>
       <p:sp>
         <p:nvSpPr>
-          <p:cNvPr id="2" name="Заголовок 1"/>
-          <p:cNvSpPr>
-            <a:spLocks noGrp="1"/>
-          </p:cNvSpPr>
-          <p:nvPr>
-            <p:ph type="title"/>
-          </p:nvPr>
-        </p:nvSpPr>
-        <p:spPr>
-          <a:xfrm>
-            <a:off x="838200" y="365125"/>
-            <a:ext cx="10515600" cy="1325563"/>
+          <p:cNvPr id="7" name="Rectangle 6"/>
+          <p:cNvSpPr/>
+          <p:nvPr/>
+        </p:nvSpPr>
+        <p:spPr>
+          <a:xfrm>
+            <a:off x="1" y="6400800"/>
+            <a:ext cx="12192000" cy="457200"/>
           </a:xfrm>
           <a:prstGeom prst="rect">
             <a:avLst/>
           </a:prstGeom>
-        </p:spPr>
-        <p:txBody>
-          <a:bodyPr vert="horz" lIns="91440" tIns="45720" rIns="91440" bIns="45720" rtlCol="0" anchor="ctr">
-            <a:normAutofit/>
-          </a:bodyPr>
-          <a:lstStyle/>
-          <a:p>
-            <a:r>
-              <a:rPr lang="ru-RU" smtClean="0"/>
-              <a:t>Образец заголовка</a:t>
-            </a:r>
-            <a:endParaRPr lang="en-US"/>
-          </a:p>
-        </p:txBody>
-      </p:sp>
-      <p:sp>
-        <p:nvSpPr>
-          <p:cNvPr id="3" name="Текст 2"/>
-          <p:cNvSpPr>
-            <a:spLocks noGrp="1"/>
-          </p:cNvSpPr>
-          <p:nvPr>
-            <p:ph type="body" idx="1"/>
-          </p:nvPr>
-        </p:nvSpPr>
-        <p:spPr>
-          <a:xfrm>
-            <a:off x="838200" y="1825625"/>
-            <a:ext cx="10515600" cy="4351338"/>
+          <a:solidFill>
+            <a:schemeClr val="accent2"/>
+          </a:solidFill>
+          <a:ln>
+            <a:noFill/>
+          </a:ln>
+        </p:spPr>
+        <p:style>
+          <a:lnRef idx="2">
+            <a:schemeClr val="accent1">
+              <a:shade val="50000"/>
+            </a:schemeClr>
+          </a:lnRef>
+          <a:fillRef idx="1">
+            <a:schemeClr val="accent1"/>
+          </a:fillRef>
+          <a:effectRef idx="0">
+            <a:schemeClr val="accent1"/>
+          </a:effectRef>
+          <a:fontRef idx="minor">
+            <a:schemeClr val="lt1"/>
+          </a:fontRef>
+        </p:style>
+      </p:sp>
+      <p:sp>
+        <p:nvSpPr>
+          <p:cNvPr id="9" name="Rectangle 8"/>
+          <p:cNvSpPr/>
+          <p:nvPr/>
+        </p:nvSpPr>
+        <p:spPr>
+          <a:xfrm>
+            <a:off x="0" y="6334316"/>
+            <a:ext cx="12192001" cy="65998"/>
           </a:xfrm>
           <a:prstGeom prst="rect">
             <a:avLst/>
           </a:prstGeom>
-        </p:spPr>
-        <p:txBody>
-          <a:bodyPr vert="horz" lIns="91440" tIns="45720" rIns="91440" bIns="45720" rtlCol="0">
-            <a:normAutofit/>
-          </a:bodyPr>
-          <a:lstStyle/>
-          <a:p>
-            <a:pPr lvl="0"/>
-            <a:r>
-              <a:rPr lang="ru-RU" smtClean="0"/>
-              <a:t>Образец текста</a:t>
-            </a:r>
-          </a:p>
-          <a:p>
-            <a:pPr lvl="1"/>
-            <a:r>
-              <a:rPr lang="ru-RU" smtClean="0"/>
-              <a:t>Второй уровень</a:t>
-            </a:r>
-          </a:p>
-          <a:p>
-            <a:pPr lvl="2"/>
-            <a:r>
-              <a:rPr lang="ru-RU" smtClean="0"/>
-              <a:t>Третий уровень</a:t>
-            </a:r>
-          </a:p>
-          <a:p>
-            <a:pPr lvl="3"/>
-            <a:r>
-              <a:rPr lang="ru-RU" smtClean="0"/>
-              <a:t>Четвертый уровень</a:t>
-            </a:r>
-          </a:p>
-          <a:p>
-            <a:pPr lvl="4"/>
-            <a:r>
-              <a:rPr lang="ru-RU" smtClean="0"/>
-              <a:t>Пятый уровень</a:t>
-            </a:r>
-            <a:endParaRPr lang="en-US"/>
-          </a:p>
-        </p:txBody>
-      </p:sp>
-      <p:sp>
-        <p:nvSpPr>
-          <p:cNvPr id="4" name="Дата 3"/>
-          <p:cNvSpPr>
-            <a:spLocks noGrp="1"/>
-          </p:cNvSpPr>
-          <p:nvPr>
-            <p:ph type="dt" sz="half" idx="2"/>
-          </p:nvPr>
-        </p:nvSpPr>
-        <p:spPr>
-          <a:xfrm>
-            <a:off x="838200" y="6356350"/>
-            <a:ext cx="2743200" cy="365125"/>
+          <a:solidFill>
+            <a:schemeClr val="accent1"/>
+          </a:solidFill>
+          <a:ln>
+            <a:noFill/>
+          </a:ln>
+        </p:spPr>
+        <p:style>
+          <a:lnRef idx="2">
+            <a:schemeClr val="accent1">
+              <a:shade val="50000"/>
+            </a:schemeClr>
+          </a:lnRef>
+          <a:fillRef idx="1">
+            <a:schemeClr val="accent1"/>
+          </a:fillRef>
+          <a:effectRef idx="0">
+            <a:schemeClr val="accent1"/>
+          </a:effectRef>
+          <a:fontRef idx="minor">
+            <a:schemeClr val="lt1"/>
+          </a:fontRef>
+        </p:style>
+      </p:sp>
+      <p:sp>
+        <p:nvSpPr>
+          <p:cNvPr id="2" name="Title Placeholder 1"/>
+          <p:cNvSpPr>
+            <a:spLocks noGrp="1"/>
+          </p:cNvSpPr>
+          <p:nvPr>
+            <p:ph type="title"/>
+          </p:nvPr>
+        </p:nvSpPr>
+        <p:spPr>
+          <a:xfrm>
+            <a:off x="1097280" y="286603"/>
+            <a:ext cx="10058400" cy="1450757"/>
           </a:xfrm>
           <a:prstGeom prst="rect">
             <a:avLst/>
           </a:prstGeom>
         </p:spPr>
         <p:txBody>
+          <a:bodyPr vert="horz" lIns="91440" tIns="45720" rIns="91440" bIns="45720" rtlCol="0" anchor="b">
+            <a:normAutofit/>
+          </a:bodyPr>
+          <a:lstStyle/>
+          <a:p>
+            <a:r>
+              <a:rPr lang="ru-RU"/>
+              <a:t>Образец заголовка</a:t>
+            </a:r>
+            <a:endParaRPr lang="en-US" dirty="0"/>
+          </a:p>
+        </p:txBody>
+      </p:sp>
+      <p:sp>
+        <p:nvSpPr>
+          <p:cNvPr id="3" name="Text Placeholder 2"/>
+          <p:cNvSpPr>
+            <a:spLocks noGrp="1"/>
+          </p:cNvSpPr>
+          <p:nvPr>
+            <p:ph type="body" idx="1"/>
+          </p:nvPr>
+        </p:nvSpPr>
+        <p:spPr>
+          <a:xfrm>
+            <a:off x="1097280" y="1845734"/>
+            <a:ext cx="10058400" cy="4023360"/>
+          </a:xfrm>
+          <a:prstGeom prst="rect">
+            <a:avLst/>
+          </a:prstGeom>
+        </p:spPr>
+        <p:txBody>
+          <a:bodyPr vert="horz" lIns="0" tIns="45720" rIns="0" bIns="45720" rtlCol="0">
+            <a:normAutofit/>
+          </a:bodyPr>
+          <a:lstStyle/>
+          <a:p>
+            <a:pPr lvl="0"/>
+            <a:r>
+              <a:rPr lang="ru-RU"/>
+              <a:t>Образец текста</a:t>
+            </a:r>
+          </a:p>
+          <a:p>
+            <a:pPr lvl="1"/>
+            <a:r>
+              <a:rPr lang="ru-RU"/>
+              <a:t>Второй уровень</a:t>
+            </a:r>
+          </a:p>
+          <a:p>
+            <a:pPr lvl="2"/>
+            <a:r>
+              <a:rPr lang="ru-RU"/>
+              <a:t>Третий уровень</a:t>
+            </a:r>
+          </a:p>
+          <a:p>
+            <a:pPr lvl="3"/>
+            <a:r>
+              <a:rPr lang="ru-RU"/>
+              <a:t>Четвертый уровень</a:t>
+            </a:r>
+          </a:p>
+          <a:p>
+            <a:pPr lvl="4"/>
+            <a:r>
+              <a:rPr lang="ru-RU"/>
+              <a:t>Пятый уровень</a:t>
+            </a:r>
+            <a:endParaRPr lang="en-US" dirty="0"/>
+          </a:p>
+        </p:txBody>
+      </p:sp>
+      <p:sp>
+        <p:nvSpPr>
+          <p:cNvPr id="4" name="Date Placeholder 3"/>
+          <p:cNvSpPr>
+            <a:spLocks noGrp="1"/>
+          </p:cNvSpPr>
+          <p:nvPr>
+            <p:ph type="dt" sz="half" idx="2"/>
+          </p:nvPr>
+        </p:nvSpPr>
+        <p:spPr>
+          <a:xfrm>
+            <a:off x="1097280" y="6459785"/>
+            <a:ext cx="2472271" cy="365125"/>
+          </a:xfrm>
+          <a:prstGeom prst="rect">
+            <a:avLst/>
+          </a:prstGeom>
+        </p:spPr>
+        <p:txBody>
           <a:bodyPr vert="horz" lIns="91440" tIns="45720" rIns="91440" bIns="45720" rtlCol="0" anchor="ctr"/>
           <a:lstStyle>
             <a:lvl1pPr algn="l">
-              <a:defRPr sz="1200">
+              <a:defRPr sz="900">
                 <a:solidFill>
-                  <a:schemeClr val="tx1">
-                    <a:tint val="75000"/>
-                  </a:schemeClr>
+                  <a:srgbClr val="FFFFFF"/>
                 </a:solidFill>
               </a:defRPr>
             </a:lvl1pPr>
@@ -2564,7 +3289,7 @@
           <a:p>
             <a:fld id="{1202CAAE-B88B-4A0D-9AC5-2205A6F72F37}" type="datetimeFigureOut">
               <a:rPr lang="en-US" smtClean="0"/>
-              <a:t>12/17/2024</a:t>
+              <a:t>12/18/2024</a:t>
             </a:fld>
             <a:endParaRPr lang="en-US"/>
           </a:p>
@@ -2572,7 +3297,7 @@
       </p:sp>
       <p:sp>
         <p:nvSpPr>
-          <p:cNvPr id="5" name="Нижний колонтитул 4"/>
+          <p:cNvPr id="5" name="Footer Placeholder 4"/>
           <p:cNvSpPr>
             <a:spLocks noGrp="1"/>
           </p:cNvSpPr>
@@ -2582,8 +3307,8 @@
         </p:nvSpPr>
         <p:spPr>
           <a:xfrm>
-            <a:off x="4038600" y="6356350"/>
-            <a:ext cx="4114800" cy="365125"/>
+            <a:off x="3686185" y="6459785"/>
+            <a:ext cx="4822804" cy="365125"/>
           </a:xfrm>
           <a:prstGeom prst="rect">
             <a:avLst/>
@@ -2593,11 +3318,9 @@
           <a:bodyPr vert="horz" lIns="91440" tIns="45720" rIns="91440" bIns="45720" rtlCol="0" anchor="ctr"/>
           <a:lstStyle>
             <a:lvl1pPr algn="ctr">
-              <a:defRPr sz="1200">
+              <a:defRPr sz="900" cap="all" baseline="0">
                 <a:solidFill>
-                  <a:schemeClr val="tx1">
-                    <a:tint val="75000"/>
-                  </a:schemeClr>
+                  <a:srgbClr val="FFFFFF"/>
                 </a:solidFill>
               </a:defRPr>
             </a:lvl1pPr>
@@ -2609,7 +3332,7 @@
       </p:sp>
       <p:sp>
         <p:nvSpPr>
-          <p:cNvPr id="6" name="Номер слайда 5"/>
+          <p:cNvPr id="6" name="Slide Number Placeholder 5"/>
           <p:cNvSpPr>
             <a:spLocks noGrp="1"/>
           </p:cNvSpPr>
@@ -2619,8 +3342,8 @@
         </p:nvSpPr>
         <p:spPr>
           <a:xfrm>
-            <a:off x="8610600" y="6356350"/>
-            <a:ext cx="2743200" cy="365125"/>
+            <a:off x="9900458" y="6459785"/>
+            <a:ext cx="1312025" cy="365125"/>
           </a:xfrm>
           <a:prstGeom prst="rect">
             <a:avLst/>
@@ -2630,11 +3353,9 @@
           <a:bodyPr vert="horz" lIns="91440" tIns="45720" rIns="91440" bIns="45720" rtlCol="0" anchor="ctr"/>
           <a:lstStyle>
             <a:lvl1pPr algn="r">
-              <a:defRPr sz="1200">
+              <a:defRPr sz="1050">
                 <a:solidFill>
-                  <a:schemeClr val="tx1">
-                    <a:tint val="75000"/>
-                  </a:schemeClr>
+                  <a:srgbClr val="FFFFFF"/>
                 </a:solidFill>
               </a:defRPr>
             </a:lvl1pPr>
@@ -2648,40 +3369,81 @@
           </a:p>
         </p:txBody>
       </p:sp>
+      <p:cxnSp>
+        <p:nvCxnSpPr>
+          <p:cNvPr id="10" name="Straight Connector 9"/>
+          <p:cNvCxnSpPr/>
+          <p:nvPr/>
+        </p:nvCxnSpPr>
+        <p:spPr>
+          <a:xfrm>
+            <a:off x="1193532" y="1737845"/>
+            <a:ext cx="9966960" cy="0"/>
+          </a:xfrm>
+          <a:prstGeom prst="line">
+            <a:avLst/>
+          </a:prstGeom>
+          <a:ln w="6350">
+            <a:solidFill>
+              <a:schemeClr val="tx1">
+                <a:lumMod val="50000"/>
+                <a:lumOff val="50000"/>
+              </a:schemeClr>
+            </a:solidFill>
+          </a:ln>
+        </p:spPr>
+        <p:style>
+          <a:lnRef idx="1">
+            <a:schemeClr val="accent1"/>
+          </a:lnRef>
+          <a:fillRef idx="0">
+            <a:schemeClr val="accent1"/>
+          </a:fillRef>
+          <a:effectRef idx="0">
+            <a:schemeClr val="accent1"/>
+          </a:effectRef>
+          <a:fontRef idx="minor">
+            <a:schemeClr val="tx1"/>
+          </a:fontRef>
+        </p:style>
+      </p:cxnSp>
     </p:spTree>
     <p:extLst>
       <p:ext uri="{BB962C8B-B14F-4D97-AF65-F5344CB8AC3E}">
-        <p14:creationId xmlns:p14="http://schemas.microsoft.com/office/powerpoint/2010/main" val="288516643"/>
+        <p14:creationId xmlns:p14="http://schemas.microsoft.com/office/powerpoint/2010/main" val="2341573248"/>
       </p:ext>
     </p:extLst>
   </p:cSld>
   <p:clrMap bg1="lt1" tx1="dk1" bg2="lt2" tx2="dk2" accent1="accent1" accent2="accent2" accent3="accent3" accent4="accent4" accent5="accent5" accent6="accent6" hlink="hlink" folHlink="folHlink"/>
   <p:sldLayoutIdLst>
-    <p:sldLayoutId id="2147483649" r:id="rId1"/>
-    <p:sldLayoutId id="2147483650" r:id="rId2"/>
-    <p:sldLayoutId id="2147483651" r:id="rId3"/>
-    <p:sldLayoutId id="2147483652" r:id="rId4"/>
-    <p:sldLayoutId id="2147483653" r:id="rId5"/>
-    <p:sldLayoutId id="2147483654" r:id="rId6"/>
-    <p:sldLayoutId id="2147483655" r:id="rId7"/>
-    <p:sldLayoutId id="2147483656" r:id="rId8"/>
-    <p:sldLayoutId id="2147483657" r:id="rId9"/>
-    <p:sldLayoutId id="2147483658" r:id="rId10"/>
-    <p:sldLayoutId id="2147483659" r:id="rId11"/>
+    <p:sldLayoutId id="2147483768" r:id="rId1"/>
+    <p:sldLayoutId id="2147483769" r:id="rId2"/>
+    <p:sldLayoutId id="2147483770" r:id="rId3"/>
+    <p:sldLayoutId id="2147483771" r:id="rId4"/>
+    <p:sldLayoutId id="2147483772" r:id="rId5"/>
+    <p:sldLayoutId id="2147483773" r:id="rId6"/>
+    <p:sldLayoutId id="2147483774" r:id="rId7"/>
+    <p:sldLayoutId id="2147483775" r:id="rId8"/>
+    <p:sldLayoutId id="2147483776" r:id="rId9"/>
+    <p:sldLayoutId id="2147483777" r:id="rId10"/>
+    <p:sldLayoutId id="2147483778" r:id="rId11"/>
   </p:sldLayoutIdLst>
   <p:txStyles>
     <p:titleStyle>
       <a:lvl1pPr algn="l" defTabSz="914400" rtl="0" eaLnBrk="1" latinLnBrk="0" hangingPunct="1">
         <a:lnSpc>
-          <a:spcPct val="90000"/>
+          <a:spcPct val="85000"/>
         </a:lnSpc>
         <a:spcBef>
           <a:spcPct val="0"/>
         </a:spcBef>
         <a:buNone/>
-        <a:defRPr sz="4400" kern="1200">
+        <a:defRPr sz="4800" kern="1200" spc="-50" baseline="0">
           <a:solidFill>
-            <a:schemeClr val="tx1"/>
+            <a:schemeClr val="tx1">
+              <a:lumMod val="75000"/>
+              <a:lumOff val="25000"/>
+            </a:schemeClr>
           </a:solidFill>
           <a:latin typeface="+mj-lt"/>
           <a:ea typeface="+mj-ea"/>
@@ -2690,162 +3452,244 @@
       </a:lvl1pPr>
     </p:titleStyle>
     <p:bodyStyle>
-      <a:lvl1pPr marL="228600" indent="-228600" algn="l" defTabSz="914400" rtl="0" eaLnBrk="1" latinLnBrk="0" hangingPunct="1">
+      <a:lvl1pPr marL="91440" indent="-91440" algn="l" defTabSz="914400" rtl="0" eaLnBrk="1" latinLnBrk="0" hangingPunct="1">
         <a:lnSpc>
           <a:spcPct val="90000"/>
         </a:lnSpc>
         <a:spcBef>
-          <a:spcPts val="1000"/>
+          <a:spcPts val="1200"/>
         </a:spcBef>
-        <a:buFont typeface="Arial" panose="020B0604020202020204" pitchFamily="34" charset="0"/>
-        <a:buChar char="•"/>
-        <a:defRPr sz="2800" kern="1200">
+        <a:spcAft>
+          <a:spcPts val="200"/>
+        </a:spcAft>
+        <a:buClr>
+          <a:schemeClr val="accent1"/>
+        </a:buClr>
+        <a:buSzPct val="100000"/>
+        <a:buFont typeface="Calibri" panose="020F0502020204030204" pitchFamily="34" charset="0"/>
+        <a:buChar char=" "/>
+        <a:defRPr sz="2000" kern="1200">
           <a:solidFill>
-            <a:schemeClr val="tx1"/>
+            <a:schemeClr val="tx1">
+              <a:lumMod val="75000"/>
+              <a:lumOff val="25000"/>
+            </a:schemeClr>
           </a:solidFill>
           <a:latin typeface="+mn-lt"/>
           <a:ea typeface="+mn-ea"/>
           <a:cs typeface="+mn-cs"/>
         </a:defRPr>
       </a:lvl1pPr>
-      <a:lvl2pPr marL="685800" indent="-228600" algn="l" defTabSz="914400" rtl="0" eaLnBrk="1" latinLnBrk="0" hangingPunct="1">
+      <a:lvl2pPr marL="384048" indent="-182880" algn="l" defTabSz="914400" rtl="0" eaLnBrk="1" latinLnBrk="0" hangingPunct="1">
         <a:lnSpc>
           <a:spcPct val="90000"/>
         </a:lnSpc>
         <a:spcBef>
-          <a:spcPts val="500"/>
+          <a:spcPts val="200"/>
         </a:spcBef>
-        <a:buFont typeface="Arial" panose="020B0604020202020204" pitchFamily="34" charset="0"/>
-        <a:buChar char="•"/>
-        <a:defRPr sz="2400" kern="1200">
+        <a:spcAft>
+          <a:spcPts val="400"/>
+        </a:spcAft>
+        <a:buClr>
+          <a:schemeClr val="accent1"/>
+        </a:buClr>
+        <a:buFont typeface="Calibri" pitchFamily="34" charset="0"/>
+        <a:buChar char="◦"/>
+        <a:defRPr sz="1800" kern="1200">
           <a:solidFill>
-            <a:schemeClr val="tx1"/>
+            <a:schemeClr val="tx1">
+              <a:lumMod val="75000"/>
+              <a:lumOff val="25000"/>
+            </a:schemeClr>
           </a:solidFill>
           <a:latin typeface="+mn-lt"/>
           <a:ea typeface="+mn-ea"/>
           <a:cs typeface="+mn-cs"/>
         </a:defRPr>
       </a:lvl2pPr>
-      <a:lvl3pPr marL="1143000" indent="-228600" algn="l" defTabSz="914400" rtl="0" eaLnBrk="1" latinLnBrk="0" hangingPunct="1">
+      <a:lvl3pPr marL="566928" indent="-182880" algn="l" defTabSz="914400" rtl="0" eaLnBrk="1" latinLnBrk="0" hangingPunct="1">
         <a:lnSpc>
           <a:spcPct val="90000"/>
         </a:lnSpc>
         <a:spcBef>
-          <a:spcPts val="500"/>
+          <a:spcPts val="200"/>
         </a:spcBef>
-        <a:buFont typeface="Arial" panose="020B0604020202020204" pitchFamily="34" charset="0"/>
-        <a:buChar char="•"/>
-        <a:defRPr sz="2000" kern="1200">
+        <a:spcAft>
+          <a:spcPts val="400"/>
+        </a:spcAft>
+        <a:buClr>
+          <a:schemeClr val="accent1"/>
+        </a:buClr>
+        <a:buFont typeface="Calibri" pitchFamily="34" charset="0"/>
+        <a:buChar char="◦"/>
+        <a:defRPr sz="1400" kern="1200">
           <a:solidFill>
-            <a:schemeClr val="tx1"/>
+            <a:schemeClr val="tx1">
+              <a:lumMod val="75000"/>
+              <a:lumOff val="25000"/>
+            </a:schemeClr>
           </a:solidFill>
           <a:latin typeface="+mn-lt"/>
           <a:ea typeface="+mn-ea"/>
           <a:cs typeface="+mn-cs"/>
         </a:defRPr>
       </a:lvl3pPr>
-      <a:lvl4pPr marL="1600200" indent="-228600" algn="l" defTabSz="914400" rtl="0" eaLnBrk="1" latinLnBrk="0" hangingPunct="1">
+      <a:lvl4pPr marL="749808" indent="-182880" algn="l" defTabSz="914400" rtl="0" eaLnBrk="1" latinLnBrk="0" hangingPunct="1">
         <a:lnSpc>
           <a:spcPct val="90000"/>
         </a:lnSpc>
         <a:spcBef>
-          <a:spcPts val="500"/>
+          <a:spcPts val="200"/>
         </a:spcBef>
-        <a:buFont typeface="Arial" panose="020B0604020202020204" pitchFamily="34" charset="0"/>
-        <a:buChar char="•"/>
-        <a:defRPr sz="1800" kern="1200">
+        <a:spcAft>
+          <a:spcPts val="400"/>
+        </a:spcAft>
+        <a:buClr>
+          <a:schemeClr val="accent1"/>
+        </a:buClr>
+        <a:buFont typeface="Calibri" pitchFamily="34" charset="0"/>
+        <a:buChar char="◦"/>
+        <a:defRPr sz="1400" kern="1200">
           <a:solidFill>
-            <a:schemeClr val="tx1"/>
+            <a:schemeClr val="tx1">
+              <a:lumMod val="75000"/>
+              <a:lumOff val="25000"/>
+            </a:schemeClr>
           </a:solidFill>
           <a:latin typeface="+mn-lt"/>
           <a:ea typeface="+mn-ea"/>
           <a:cs typeface="+mn-cs"/>
         </a:defRPr>
       </a:lvl4pPr>
-      <a:lvl5pPr marL="2057400" indent="-228600" algn="l" defTabSz="914400" rtl="0" eaLnBrk="1" latinLnBrk="0" hangingPunct="1">
+      <a:lvl5pPr marL="932688" indent="-182880" algn="l" defTabSz="914400" rtl="0" eaLnBrk="1" latinLnBrk="0" hangingPunct="1">
         <a:lnSpc>
           <a:spcPct val="90000"/>
         </a:lnSpc>
         <a:spcBef>
-          <a:spcPts val="500"/>
+          <a:spcPts val="200"/>
         </a:spcBef>
-        <a:buFont typeface="Arial" panose="020B0604020202020204" pitchFamily="34" charset="0"/>
-        <a:buChar char="•"/>
-        <a:defRPr sz="1800" kern="1200">
+        <a:spcAft>
+          <a:spcPts val="400"/>
+        </a:spcAft>
+        <a:buClr>
+          <a:schemeClr val="accent1"/>
+        </a:buClr>
+        <a:buFont typeface="Calibri" pitchFamily="34" charset="0"/>
+        <a:buChar char="◦"/>
+        <a:defRPr sz="1400" kern="1200">
           <a:solidFill>
-            <a:schemeClr val="tx1"/>
+            <a:schemeClr val="tx1">
+              <a:lumMod val="75000"/>
+              <a:lumOff val="25000"/>
+            </a:schemeClr>
           </a:solidFill>
           <a:latin typeface="+mn-lt"/>
           <a:ea typeface="+mn-ea"/>
           <a:cs typeface="+mn-cs"/>
         </a:defRPr>
       </a:lvl5pPr>
-      <a:lvl6pPr marL="2514600" indent="-228600" algn="l" defTabSz="914400" rtl="0" eaLnBrk="1" latinLnBrk="0" hangingPunct="1">
+      <a:lvl6pPr marL="1100000" indent="-228600" algn="l" defTabSz="914400" rtl="0" eaLnBrk="1" latinLnBrk="0" hangingPunct="1">
         <a:lnSpc>
           <a:spcPct val="90000"/>
         </a:lnSpc>
         <a:spcBef>
-          <a:spcPts val="500"/>
+          <a:spcPts val="200"/>
         </a:spcBef>
-        <a:buFont typeface="Arial" panose="020B0604020202020204" pitchFamily="34" charset="0"/>
-        <a:buChar char="•"/>
-        <a:defRPr sz="1800" kern="1200">
+        <a:spcAft>
+          <a:spcPts val="400"/>
+        </a:spcAft>
+        <a:buClr>
+          <a:schemeClr val="accent1"/>
+        </a:buClr>
+        <a:buFont typeface="Calibri" pitchFamily="34" charset="0"/>
+        <a:buChar char="◦"/>
+        <a:defRPr sz="1400" kern="1200">
           <a:solidFill>
-            <a:schemeClr val="tx1"/>
+            <a:schemeClr val="tx1">
+              <a:lumMod val="75000"/>
+              <a:lumOff val="25000"/>
+            </a:schemeClr>
           </a:solidFill>
           <a:latin typeface="+mn-lt"/>
           <a:ea typeface="+mn-ea"/>
           <a:cs typeface="+mn-cs"/>
         </a:defRPr>
       </a:lvl6pPr>
-      <a:lvl7pPr marL="2971800" indent="-228600" algn="l" defTabSz="914400" rtl="0" eaLnBrk="1" latinLnBrk="0" hangingPunct="1">
+      <a:lvl7pPr marL="1300000" indent="-228600" algn="l" defTabSz="914400" rtl="0" eaLnBrk="1" latinLnBrk="0" hangingPunct="1">
         <a:lnSpc>
           <a:spcPct val="90000"/>
         </a:lnSpc>
         <a:spcBef>
-          <a:spcPts val="500"/>
+          <a:spcPts val="200"/>
         </a:spcBef>
-        <a:buFont typeface="Arial" panose="020B0604020202020204" pitchFamily="34" charset="0"/>
-        <a:buChar char="•"/>
-        <a:defRPr sz="1800" kern="1200">
+        <a:spcAft>
+          <a:spcPts val="400"/>
+        </a:spcAft>
+        <a:buClr>
+          <a:schemeClr val="accent1"/>
+        </a:buClr>
+        <a:buFont typeface="Calibri" pitchFamily="34" charset="0"/>
+        <a:buChar char="◦"/>
+        <a:defRPr sz="1400" kern="1200">
           <a:solidFill>
-            <a:schemeClr val="tx1"/>
+            <a:schemeClr val="tx1">
+              <a:lumMod val="75000"/>
+              <a:lumOff val="25000"/>
+            </a:schemeClr>
           </a:solidFill>
           <a:latin typeface="+mn-lt"/>
           <a:ea typeface="+mn-ea"/>
           <a:cs typeface="+mn-cs"/>
         </a:defRPr>
       </a:lvl7pPr>
-      <a:lvl8pPr marL="3429000" indent="-228600" algn="l" defTabSz="914400" rtl="0" eaLnBrk="1" latinLnBrk="0" hangingPunct="1">
+      <a:lvl8pPr marL="1500000" indent="-228600" algn="l" defTabSz="914400" rtl="0" eaLnBrk="1" latinLnBrk="0" hangingPunct="1">
         <a:lnSpc>
           <a:spcPct val="90000"/>
         </a:lnSpc>
         <a:spcBef>
-          <a:spcPts val="500"/>
+          <a:spcPts val="200"/>
         </a:spcBef>
-        <a:buFont typeface="Arial" panose="020B0604020202020204" pitchFamily="34" charset="0"/>
-        <a:buChar char="•"/>
-        <a:defRPr sz="1800" kern="1200">
+        <a:spcAft>
+          <a:spcPts val="400"/>
+        </a:spcAft>
+        <a:buClr>
+          <a:schemeClr val="accent1"/>
+        </a:buClr>
+        <a:buFont typeface="Calibri" pitchFamily="34" charset="0"/>
+        <a:buChar char="◦"/>
+        <a:defRPr sz="1400" kern="1200">
           <a:solidFill>
-            <a:schemeClr val="tx1"/>
+            <a:schemeClr val="tx1">
+              <a:lumMod val="75000"/>
+              <a:lumOff val="25000"/>
+            </a:schemeClr>
           </a:solidFill>
           <a:latin typeface="+mn-lt"/>
           <a:ea typeface="+mn-ea"/>
           <a:cs typeface="+mn-cs"/>
         </a:defRPr>
       </a:lvl8pPr>
-      <a:lvl9pPr marL="3886200" indent="-228600" algn="l" defTabSz="914400" rtl="0" eaLnBrk="1" latinLnBrk="0" hangingPunct="1">
+      <a:lvl9pPr marL="1700000" indent="-228600" algn="l" defTabSz="914400" rtl="0" eaLnBrk="1" latinLnBrk="0" hangingPunct="1">
         <a:lnSpc>
           <a:spcPct val="90000"/>
         </a:lnSpc>
         <a:spcBef>
-          <a:spcPts val="500"/>
+          <a:spcPts val="200"/>
         </a:spcBef>
-        <a:buFont typeface="Arial" panose="020B0604020202020204" pitchFamily="34" charset="0"/>
-        <a:buChar char="•"/>
-        <a:defRPr sz="1800" kern="1200">
+        <a:spcAft>
+          <a:spcPts val="400"/>
+        </a:spcAft>
+        <a:buClr>
+          <a:schemeClr val="accent1"/>
+        </a:buClr>
+        <a:buFont typeface="Calibri" pitchFamily="34" charset="0"/>
+        <a:buChar char="◦"/>
+        <a:defRPr sz="1400" kern="1200">
           <a:solidFill>
-            <a:schemeClr val="tx1"/>
+            <a:schemeClr val="tx1">
+              <a:lumMod val="75000"/>
+              <a:lumOff val="25000"/>
+            </a:schemeClr>
           </a:solidFill>
           <a:latin typeface="+mn-lt"/>
           <a:ea typeface="+mn-ea"/>
@@ -2955,20 +3799,6 @@
 <file path=ppt/slides/slide1.xml><?xml version="1.0" encoding="utf-8"?>
 <p:sld xmlns:a="http://schemas.openxmlformats.org/drawingml/2006/main" xmlns:r="http://schemas.openxmlformats.org/officeDocument/2006/relationships" xmlns:p="http://schemas.openxmlformats.org/presentationml/2006/main">
   <p:cSld>
-    <p:bg>
-      <p:bgPr>
-        <a:blipFill dpi="0" rotWithShape="1">
-          <a:blip r:embed="rId2">
-            <a:lum/>
-          </a:blip>
-          <a:srcRect/>
-          <a:stretch>
-            <a:fillRect l="-5000" r="-5000"/>
-          </a:stretch>
-        </a:blipFill>
-        <a:effectLst/>
-      </p:bgPr>
-    </p:bg>
     <p:spTree>
       <p:nvGrpSpPr>
         <p:cNvPr id="1" name=""/>
@@ -2991,7 +3821,7 @@
         </p:nvSpPr>
         <p:spPr>
           <a:xfrm>
-            <a:off x="3194011" y="0"/>
+            <a:off x="3241821" y="1726361"/>
             <a:ext cx="5708358" cy="923330"/>
           </a:xfrm>
           <a:prstGeom prst="rect">
@@ -3007,38 +3837,17 @@
           <a:p>
             <a:pPr algn="ctr"/>
             <a:r>
-              <a:rPr lang="ru-RU" sz="5400" b="1" cap="none" spc="0" dirty="0" smtClean="0">
+              <a:rPr lang="ru-RU" sz="5400" b="1" cap="none" spc="0" dirty="0">
                 <a:ln w="22225">
                   <a:solidFill>
                     <a:schemeClr val="accent2"/>
                   </a:solidFill>
                   <a:prstDash val="solid"/>
                 </a:ln>
-                <a:solidFill>
-                  <a:schemeClr val="accent4">
-                    <a:lumMod val="60000"/>
-                    <a:lumOff val="40000"/>
-                  </a:schemeClr>
-                </a:solidFill>
                 <a:effectLst/>
               </a:rPr>
               <a:t>Генератор музыки</a:t>
             </a:r>
-            <a:endParaRPr lang="ru-RU" sz="5400" b="1" cap="none" spc="0" dirty="0">
-              <a:ln w="22225">
-                <a:solidFill>
-                  <a:schemeClr val="accent2"/>
-                </a:solidFill>
-                <a:prstDash val="solid"/>
-              </a:ln>
-              <a:solidFill>
-                <a:schemeClr val="accent4">
-                  <a:lumMod val="60000"/>
-                  <a:lumOff val="40000"/>
-                </a:schemeClr>
-              </a:solidFill>
-              <a:effectLst/>
-            </a:endParaRPr>
           </a:p>
         </p:txBody>
       </p:sp>
@@ -3050,8 +3859,8 @@
         </p:nvSpPr>
         <p:spPr>
           <a:xfrm>
-            <a:off x="-55347" y="4598911"/>
-            <a:ext cx="9908738" cy="1938992"/>
+            <a:off x="960267" y="4386634"/>
+            <a:ext cx="9736063" cy="1938992"/>
           </a:xfrm>
           <a:prstGeom prst="rect">
             <a:avLst/>
@@ -3065,38 +3874,39 @@
           <a:lstStyle/>
           <a:p>
             <a:r>
-              <a:rPr lang="ru-RU" sz="4000" b="1" dirty="0" smtClean="0">
+              <a:rPr lang="ru-RU" sz="4000" b="1" dirty="0">
                 <a:ln w="22225">
                   <a:solidFill>
                     <a:schemeClr val="accent2"/>
                   </a:solidFill>
                   <a:prstDash val="solid"/>
                 </a:ln>
-                <a:solidFill>
-                  <a:schemeClr val="accent2">
-                    <a:lumMod val="40000"/>
-                    <a:lumOff val="60000"/>
-                  </a:schemeClr>
-                </a:solidFill>
               </a:rPr>
               <a:t>Команда</a:t>
             </a:r>
             <a:r>
-              <a:rPr lang="en-US" sz="4000" b="1" dirty="0" smtClean="0">
+              <a:rPr lang="en-US" sz="4000" b="1" dirty="0">
                 <a:ln w="22225">
                   <a:solidFill>
                     <a:schemeClr val="accent2"/>
                   </a:solidFill>
                   <a:prstDash val="solid"/>
                 </a:ln>
-                <a:solidFill>
-                  <a:schemeClr val="accent2">
-                    <a:lumMod val="40000"/>
-                    <a:lumOff val="60000"/>
-                  </a:schemeClr>
-                </a:solidFill>
               </a:rPr>
               <a:t>:</a:t>
+            </a:r>
+          </a:p>
+          <a:p>
+            <a:r>
+              <a:rPr lang="ru-RU" sz="4000" b="1" dirty="0">
+                <a:ln w="22225">
+                  <a:solidFill>
+                    <a:schemeClr val="accent2"/>
+                  </a:solidFill>
+                  <a:prstDash val="solid"/>
+                </a:ln>
+              </a:rPr>
+              <a:t>Яковлев Андрей (интерфейс)</a:t>
             </a:r>
             <a:endParaRPr lang="en-US" sz="4000" b="1" dirty="0">
               <a:ln w="22225">
@@ -3105,48 +3915,19 @@
                 </a:solidFill>
                 <a:prstDash val="solid"/>
               </a:ln>
-              <a:solidFill>
-                <a:schemeClr val="accent2">
-                  <a:lumMod val="40000"/>
-                  <a:lumOff val="60000"/>
-                </a:schemeClr>
-              </a:solidFill>
             </a:endParaRPr>
           </a:p>
           <a:p>
             <a:r>
-              <a:rPr lang="en-US" sz="4000" b="1" dirty="0" smtClean="0">
+              <a:rPr lang="ru-RU" sz="4000" b="1" dirty="0">
                 <a:ln w="22225">
                   <a:solidFill>
                     <a:schemeClr val="accent2"/>
                   </a:solidFill>
                   <a:prstDash val="solid"/>
                 </a:ln>
-                <a:solidFill>
-                  <a:schemeClr val="accent2">
-                    <a:lumMod val="40000"/>
-                    <a:lumOff val="60000"/>
-                  </a:schemeClr>
-                </a:solidFill>
               </a:rPr>
-              <a:t>1)</a:t>
-            </a:r>
-            <a:r>
-              <a:rPr lang="ru-RU" sz="4000" b="1" dirty="0" smtClean="0">
-                <a:ln w="22225">
-                  <a:solidFill>
-                    <a:schemeClr val="accent2"/>
-                  </a:solidFill>
-                  <a:prstDash val="solid"/>
-                </a:ln>
-                <a:solidFill>
-                  <a:schemeClr val="accent2">
-                    <a:lumMod val="40000"/>
-                    <a:lumOff val="60000"/>
-                  </a:schemeClr>
-                </a:solidFill>
-              </a:rPr>
-              <a:t>Яковлев Андрей (интерфейс)</a:t>
+              <a:t>Расторгуев Александр (генерация музыки)</a:t>
             </a:r>
             <a:endParaRPr lang="en-US" sz="4000" b="1" dirty="0">
               <a:ln w="22225">
@@ -3155,62 +3936,6 @@
                 </a:solidFill>
                 <a:prstDash val="solid"/>
               </a:ln>
-              <a:solidFill>
-                <a:schemeClr val="accent2">
-                  <a:lumMod val="40000"/>
-                  <a:lumOff val="60000"/>
-                </a:schemeClr>
-              </a:solidFill>
-            </a:endParaRPr>
-          </a:p>
-          <a:p>
-            <a:r>
-              <a:rPr lang="en-US" sz="4000" b="1" dirty="0" smtClean="0">
-                <a:ln w="22225">
-                  <a:solidFill>
-                    <a:schemeClr val="accent2"/>
-                  </a:solidFill>
-                  <a:prstDash val="solid"/>
-                </a:ln>
-                <a:solidFill>
-                  <a:schemeClr val="accent2">
-                    <a:lumMod val="40000"/>
-                    <a:lumOff val="60000"/>
-                  </a:schemeClr>
-                </a:solidFill>
-              </a:rPr>
-              <a:t>2)</a:t>
-            </a:r>
-            <a:r>
-              <a:rPr lang="ru-RU" sz="4000" b="1" dirty="0" smtClean="0">
-                <a:ln w="22225">
-                  <a:solidFill>
-                    <a:schemeClr val="accent2"/>
-                  </a:solidFill>
-                  <a:prstDash val="solid"/>
-                </a:ln>
-                <a:solidFill>
-                  <a:schemeClr val="accent2">
-                    <a:lumMod val="40000"/>
-                    <a:lumOff val="60000"/>
-                  </a:schemeClr>
-                </a:solidFill>
-              </a:rPr>
-              <a:t>Расторгуев Александр (создание музыки)</a:t>
-            </a:r>
-            <a:endParaRPr lang="en-US" sz="4000" b="1" dirty="0" smtClean="0">
-              <a:ln w="22225">
-                <a:solidFill>
-                  <a:schemeClr val="accent2"/>
-                </a:solidFill>
-                <a:prstDash val="solid"/>
-              </a:ln>
-              <a:solidFill>
-                <a:schemeClr val="accent2">
-                  <a:lumMod val="40000"/>
-                  <a:lumOff val="60000"/>
-                </a:schemeClr>
-              </a:solidFill>
             </a:endParaRPr>
           </a:p>
         </p:txBody>
@@ -3231,20 +3956,6 @@
 <file path=ppt/slides/slide2.xml><?xml version="1.0" encoding="utf-8"?>
 <p:sld xmlns:a="http://schemas.openxmlformats.org/drawingml/2006/main" xmlns:r="http://schemas.openxmlformats.org/officeDocument/2006/relationships" xmlns:p="http://schemas.openxmlformats.org/presentationml/2006/main">
   <p:cSld>
-    <p:bg>
-      <p:bgPr>
-        <a:blipFill dpi="0" rotWithShape="1">
-          <a:blip r:embed="rId2">
-            <a:lum/>
-          </a:blip>
-          <a:srcRect/>
-          <a:stretch>
-            <a:fillRect t="-6000" b="-6000"/>
-          </a:stretch>
-        </a:blipFill>
-        <a:effectLst/>
-      </p:bgPr>
-    </p:bg>
     <p:spTree>
       <p:nvGrpSpPr>
         <p:cNvPr id="1" name=""/>
@@ -3267,51 +3978,31 @@
         </p:nvSpPr>
         <p:spPr>
           <a:xfrm>
-            <a:off x="3028470" y="285981"/>
-            <a:ext cx="6163341" cy="646331"/>
+            <a:off x="3945956" y="528457"/>
+            <a:ext cx="4300088" cy="769441"/>
           </a:xfrm>
           <a:prstGeom prst="rect">
             <a:avLst/>
           </a:prstGeom>
         </p:spPr>
         <p:txBody>
-          <a:bodyPr wrap="square">
+          <a:bodyPr wrap="none">
             <a:spAutoFit/>
           </a:bodyPr>
           <a:lstStyle/>
           <a:p>
             <a:pPr algn="ctr"/>
             <a:r>
-              <a:rPr lang="ru-RU" sz="3600" b="1" dirty="0" smtClean="0">
+              <a:rPr lang="ru-RU" sz="4400" b="1" dirty="0">
                 <a:ln w="22225">
                   <a:solidFill>
                     <a:schemeClr val="accent2"/>
                   </a:solidFill>
                   <a:prstDash val="solid"/>
                 </a:ln>
-                <a:solidFill>
-                  <a:schemeClr val="accent4">
-                    <a:lumMod val="60000"/>
-                    <a:lumOff val="40000"/>
-                  </a:schemeClr>
-                </a:solidFill>
               </a:rPr>
               <a:t>Инструментарий</a:t>
             </a:r>
-            <a:endParaRPr lang="ru-RU" sz="3600" b="1" dirty="0">
-              <a:ln w="22225">
-                <a:solidFill>
-                  <a:schemeClr val="accent2"/>
-                </a:solidFill>
-                <a:prstDash val="solid"/>
-              </a:ln>
-              <a:solidFill>
-                <a:schemeClr val="accent4">
-                  <a:lumMod val="60000"/>
-                  <a:lumOff val="40000"/>
-                </a:schemeClr>
-              </a:solidFill>
-            </a:endParaRPr>
           </a:p>
         </p:txBody>
       </p:sp>
@@ -3323,53 +4014,19 @@
         </p:nvSpPr>
         <p:spPr>
           <a:xfrm>
-            <a:off x="96890" y="1274118"/>
-            <a:ext cx="4956613" cy="1569660"/>
+            <a:off x="111258" y="1798586"/>
+            <a:ext cx="11685346" cy="1569660"/>
           </a:xfrm>
           <a:prstGeom prst="rect">
             <a:avLst/>
           </a:prstGeom>
         </p:spPr>
         <p:txBody>
-          <a:bodyPr wrap="none">
+          <a:bodyPr wrap="square">
             <a:spAutoFit/>
           </a:bodyPr>
           <a:lstStyle/>
           <a:p>
-            <a:r>
-              <a:rPr lang="ru-RU" sz="3200" b="1" dirty="0" smtClean="0">
-                <a:ln w="22225">
-                  <a:solidFill>
-                    <a:schemeClr val="accent2"/>
-                  </a:solidFill>
-                  <a:prstDash val="solid"/>
-                </a:ln>
-                <a:solidFill>
-                  <a:schemeClr val="accent2">
-                    <a:lumMod val="40000"/>
-                    <a:lumOff val="60000"/>
-                  </a:schemeClr>
-                </a:solidFill>
-              </a:rPr>
-              <a:t>1)</a:t>
-            </a:r>
-            <a:r>
-              <a:rPr lang="en-US" sz="3200" b="1" dirty="0" smtClean="0">
-                <a:ln w="22225">
-                  <a:solidFill>
-                    <a:schemeClr val="accent2"/>
-                  </a:solidFill>
-                  <a:prstDash val="solid"/>
-                </a:ln>
-                <a:solidFill>
-                  <a:schemeClr val="accent2">
-                    <a:lumMod val="40000"/>
-                    <a:lumOff val="60000"/>
-                  </a:schemeClr>
-                </a:solidFill>
-              </a:rPr>
-              <a:t>Tkinter</a:t>
-            </a:r>
             <a:r>
               <a:rPr lang="ru-RU" sz="3200" b="1" dirty="0">
                 <a:ln w="22225">
@@ -3378,50 +4035,98 @@
                   </a:solidFill>
                   <a:prstDash val="solid"/>
                 </a:ln>
-                <a:solidFill>
-                  <a:schemeClr val="accent2">
-                    <a:lumMod val="40000"/>
-                    <a:lumOff val="60000"/>
-                  </a:schemeClr>
-                </a:solidFill>
               </a:rPr>
-              <a:t> </a:t>
-            </a:r>
-            <a:r>
-              <a:rPr lang="ru-RU" sz="3200" b="1" dirty="0" smtClean="0">
+              <a:t>1) </a:t>
+            </a:r>
+            <a:r>
+              <a:rPr lang="en-US" sz="3200" b="1" dirty="0" err="1">
                 <a:ln w="22225">
                   <a:solidFill>
                     <a:schemeClr val="accent2"/>
                   </a:solidFill>
                   <a:prstDash val="solid"/>
                 </a:ln>
-                <a:solidFill>
-                  <a:schemeClr val="accent2">
-                    <a:lumMod val="40000"/>
-                    <a:lumOff val="60000"/>
-                  </a:schemeClr>
-                </a:solidFill>
               </a:rPr>
-              <a:t>(для интерфейса)</a:t>
-            </a:r>
-          </a:p>
-          <a:p>
-            <a:r>
-              <a:rPr lang="ru-RU" sz="3200" b="1" dirty="0" smtClean="0">
+              <a:t>Tkinter</a:t>
+            </a:r>
+            <a:r>
+              <a:rPr lang="ru-RU" sz="3200" b="1" dirty="0">
                 <a:ln w="22225">
                   <a:solidFill>
                     <a:schemeClr val="accent2"/>
                   </a:solidFill>
                   <a:prstDash val="solid"/>
                 </a:ln>
-                <a:solidFill>
-                  <a:schemeClr val="accent2">
-                    <a:lumMod val="40000"/>
-                    <a:lumOff val="60000"/>
-                  </a:schemeClr>
-                </a:solidFill>
+              </a:rPr>
+              <a:t> (интерфейс)</a:t>
+            </a:r>
+          </a:p>
+          <a:p>
+            <a:r>
+              <a:rPr lang="ru-RU" sz="3200" b="1" dirty="0">
+                <a:ln w="22225">
+                  <a:solidFill>
+                    <a:schemeClr val="accent2"/>
+                  </a:solidFill>
+                  <a:prstDash val="solid"/>
+                </a:ln>
               </a:rPr>
               <a:t>2)</a:t>
+            </a:r>
+            <a:r>
+              <a:rPr lang="en-US" sz="3200" b="1" dirty="0">
+                <a:ln w="22225">
+                  <a:solidFill>
+                    <a:schemeClr val="accent2"/>
+                  </a:solidFill>
+                  <a:prstDash val="solid"/>
+                </a:ln>
+              </a:rPr>
+              <a:t> Transformers, torch, </a:t>
+            </a:r>
+            <a:r>
+              <a:rPr lang="en-US" sz="3200" b="1" dirty="0" err="1">
+                <a:ln w="22225">
+                  <a:solidFill>
+                    <a:schemeClr val="accent2"/>
+                  </a:solidFill>
+                  <a:prstDash val="solid"/>
+                </a:ln>
+              </a:rPr>
+              <a:t>scipy</a:t>
+            </a:r>
+            <a:r>
+              <a:rPr lang="en-US" sz="3200" b="1" dirty="0">
+                <a:ln w="22225">
+                  <a:solidFill>
+                    <a:schemeClr val="accent2"/>
+                  </a:solidFill>
+                  <a:prstDash val="solid"/>
+                </a:ln>
+              </a:rPr>
+              <a:t> (</a:t>
+            </a:r>
+            <a:r>
+              <a:rPr lang="ru-RU" sz="3200" b="1" dirty="0">
+                <a:ln w="22225">
+                  <a:solidFill>
+                    <a:schemeClr val="accent2"/>
+                  </a:solidFill>
+                  <a:prstDash val="solid"/>
+                </a:ln>
+              </a:rPr>
+              <a:t>генерация звука</a:t>
+            </a:r>
+            <a:r>
+              <a:rPr lang="en-US" sz="3200" b="1" dirty="0">
+                <a:ln w="22225">
+                  <a:solidFill>
+                    <a:schemeClr val="accent2"/>
+                  </a:solidFill>
+                  <a:prstDash val="solid"/>
+                </a:ln>
+              </a:rPr>
+              <a:t>)</a:t>
             </a:r>
             <a:endParaRPr lang="ru-RU" sz="3200" b="1" dirty="0">
               <a:ln w="22225">
@@ -3430,255 +4135,71 @@
                 </a:solidFill>
                 <a:prstDash val="solid"/>
               </a:ln>
-              <a:solidFill>
-                <a:schemeClr val="accent2">
-                  <a:lumMod val="40000"/>
-                  <a:lumOff val="60000"/>
-                </a:schemeClr>
-              </a:solidFill>
             </a:endParaRPr>
           </a:p>
           <a:p>
-            <a:endParaRPr lang="ru-RU" sz="3200" b="1" dirty="0" smtClean="0">
+            <a:r>
+              <a:rPr lang="ru-RU" sz="3200" b="1" dirty="0">
+                <a:ln w="22225">
+                  <a:solidFill>
+                    <a:schemeClr val="accent2"/>
+                  </a:solidFill>
+                  <a:prstDash val="solid"/>
+                </a:ln>
+              </a:rPr>
+              <a:t>3) </a:t>
+            </a:r>
+            <a:r>
+              <a:rPr lang="en-US" sz="3200" b="1" dirty="0" err="1">
+                <a:ln w="22225">
+                  <a:solidFill>
+                    <a:schemeClr val="accent2"/>
+                  </a:solidFill>
+                  <a:prstDash val="solid"/>
+                </a:ln>
+              </a:rPr>
+              <a:t>Pygame</a:t>
+            </a:r>
+            <a:r>
+              <a:rPr lang="en-US" sz="3200" b="1" dirty="0">
+                <a:ln w="22225">
+                  <a:solidFill>
+                    <a:schemeClr val="accent2"/>
+                  </a:solidFill>
+                  <a:prstDash val="solid"/>
+                </a:ln>
+              </a:rPr>
+              <a:t> (</a:t>
+            </a:r>
+            <a:r>
+              <a:rPr lang="ru-RU" sz="3200" b="1" dirty="0">
+                <a:ln w="22225">
+                  <a:solidFill>
+                    <a:schemeClr val="accent2"/>
+                  </a:solidFill>
+                  <a:prstDash val="solid"/>
+                </a:ln>
+              </a:rPr>
+              <a:t>воспроизведение звука</a:t>
+            </a:r>
+            <a:r>
+              <a:rPr lang="en-US" sz="3200" b="1" dirty="0">
+                <a:ln w="22225">
+                  <a:solidFill>
+                    <a:schemeClr val="accent2"/>
+                  </a:solidFill>
+                  <a:prstDash val="solid"/>
+                </a:ln>
+              </a:rPr>
+              <a:t>)</a:t>
+            </a:r>
+            <a:endParaRPr lang="ru-RU" sz="3200" b="1" dirty="0">
               <a:ln w="22225">
                 <a:solidFill>
                   <a:schemeClr val="accent2"/>
                 </a:solidFill>
                 <a:prstDash val="solid"/>
               </a:ln>
-              <a:solidFill>
-                <a:schemeClr val="accent2">
-                  <a:lumMod val="40000"/>
-                  <a:lumOff val="60000"/>
-                </a:schemeClr>
-              </a:solidFill>
-            </a:endParaRPr>
-          </a:p>
-        </p:txBody>
-      </p:sp>
-    </p:spTree>
-    <p:extLst>
-      <p:ext uri="{BB962C8B-B14F-4D97-AF65-F5344CB8AC3E}">
-        <p14:creationId xmlns:p14="http://schemas.microsoft.com/office/powerpoint/2010/main" val="1242205974"/>
-      </p:ext>
-    </p:extLst>
-  </p:cSld>
-  <p:clrMapOvr>
-    <a:masterClrMapping/>
-  </p:clrMapOvr>
-</p:sld>
-</file>
-
-<file path=ppt/slides/slide3.xml><?xml version="1.0" encoding="utf-8"?>
-<p:sld xmlns:a="http://schemas.openxmlformats.org/drawingml/2006/main" xmlns:r="http://schemas.openxmlformats.org/officeDocument/2006/relationships" xmlns:p="http://schemas.openxmlformats.org/presentationml/2006/main">
-  <p:cSld>
-    <p:bg>
-      <p:bgPr>
-        <a:blipFill dpi="0" rotWithShape="1">
-          <a:blip r:embed="rId2">
-            <a:lum/>
-          </a:blip>
-          <a:srcRect/>
-          <a:stretch>
-            <a:fillRect l="-1000" r="-1000"/>
-          </a:stretch>
-        </a:blipFill>
-        <a:effectLst/>
-      </p:bgPr>
-    </p:bg>
-    <p:spTree>
-      <p:nvGrpSpPr>
-        <p:cNvPr id="1" name=""/>
-        <p:cNvGrpSpPr/>
-        <p:nvPr/>
-      </p:nvGrpSpPr>
-      <p:grpSpPr>
-        <a:xfrm>
-          <a:off x="0" y="0"/>
-          <a:ext cx="0" cy="0"/>
-          <a:chOff x="0" y="0"/>
-          <a:chExt cx="0" cy="0"/>
-        </a:xfrm>
-      </p:grpSpPr>
-      <p:sp>
-        <p:nvSpPr>
-          <p:cNvPr id="2" name="Прямоугольник 1"/>
-          <p:cNvSpPr/>
-          <p:nvPr/>
-        </p:nvSpPr>
-        <p:spPr>
-          <a:xfrm>
-            <a:off x="4872486" y="136569"/>
-            <a:ext cx="2877326" cy="769441"/>
-          </a:xfrm>
-          <a:prstGeom prst="rect">
-            <a:avLst/>
-          </a:prstGeom>
-        </p:spPr>
-        <p:txBody>
-          <a:bodyPr wrap="none">
-            <a:spAutoFit/>
-          </a:bodyPr>
-          <a:lstStyle/>
-          <a:p>
-            <a:pPr algn="ctr"/>
-            <a:r>
-              <a:rPr lang="ru-RU" sz="4400" b="1" dirty="0" smtClean="0">
-                <a:ln w="22225">
-                  <a:solidFill>
-                    <a:schemeClr val="accent2"/>
-                  </a:solidFill>
-                  <a:prstDash val="solid"/>
-                </a:ln>
-                <a:solidFill>
-                  <a:schemeClr val="accent4">
-                    <a:lumMod val="60000"/>
-                    <a:lumOff val="40000"/>
-                  </a:schemeClr>
-                </a:solidFill>
-              </a:rPr>
-              <a:t>Интерфейс</a:t>
-            </a:r>
-            <a:endParaRPr lang="ru-RU" sz="4400" b="1" dirty="0" smtClean="0">
-              <a:ln w="22225">
-                <a:solidFill>
-                  <a:schemeClr val="accent2"/>
-                </a:solidFill>
-                <a:prstDash val="solid"/>
-              </a:ln>
-              <a:solidFill>
-                <a:schemeClr val="accent4">
-                  <a:lumMod val="60000"/>
-                  <a:lumOff val="40000"/>
-                </a:schemeClr>
-              </a:solidFill>
-            </a:endParaRPr>
-          </a:p>
-        </p:txBody>
-      </p:sp>
-      <p:sp>
-        <p:nvSpPr>
-          <p:cNvPr id="3" name="Прямоугольник 2"/>
-          <p:cNvSpPr/>
-          <p:nvPr/>
-        </p:nvSpPr>
-        <p:spPr>
-          <a:xfrm>
-            <a:off x="111258" y="5064301"/>
-            <a:ext cx="11685346" cy="1569660"/>
-          </a:xfrm>
-          <a:prstGeom prst="rect">
-            <a:avLst/>
-          </a:prstGeom>
-        </p:spPr>
-        <p:txBody>
-          <a:bodyPr wrap="square">
-            <a:spAutoFit/>
-          </a:bodyPr>
-          <a:lstStyle/>
-          <a:p>
-            <a:r>
-              <a:rPr lang="ru-RU" sz="3200" b="1" dirty="0" smtClean="0">
-                <a:ln w="22225">
-                  <a:solidFill>
-                    <a:schemeClr val="accent2"/>
-                  </a:solidFill>
-                  <a:prstDash val="solid"/>
-                </a:ln>
-                <a:solidFill>
-                  <a:schemeClr val="accent2">
-                    <a:lumMod val="40000"/>
-                    <a:lumOff val="60000"/>
-                  </a:schemeClr>
-                </a:solidFill>
-              </a:rPr>
-              <a:t>Для создания интерфейса использовалась библиотека </a:t>
-            </a:r>
-            <a:r>
-              <a:rPr lang="en-US" sz="3200" b="1" dirty="0" smtClean="0">
-                <a:ln w="22225">
-                  <a:solidFill>
-                    <a:schemeClr val="accent2"/>
-                  </a:solidFill>
-                  <a:prstDash val="solid"/>
-                </a:ln>
-                <a:solidFill>
-                  <a:schemeClr val="accent2">
-                    <a:lumMod val="40000"/>
-                    <a:lumOff val="60000"/>
-                  </a:schemeClr>
-                </a:solidFill>
-              </a:rPr>
-              <a:t>Tkinter</a:t>
-            </a:r>
-            <a:r>
-              <a:rPr lang="ru-RU" sz="3200" b="1" dirty="0" smtClean="0">
-                <a:ln w="22225">
-                  <a:solidFill>
-                    <a:schemeClr val="accent2"/>
-                  </a:solidFill>
-                  <a:prstDash val="solid"/>
-                </a:ln>
-                <a:solidFill>
-                  <a:schemeClr val="accent2">
-                    <a:lumMod val="40000"/>
-                    <a:lumOff val="60000"/>
-                  </a:schemeClr>
-                </a:solidFill>
-              </a:rPr>
-              <a:t>.</a:t>
-            </a:r>
-          </a:p>
-          <a:p>
-            <a:r>
-              <a:rPr lang="ru-RU" sz="3200" b="1" dirty="0" smtClean="0">
-                <a:ln w="22225">
-                  <a:solidFill>
-                    <a:schemeClr val="accent2"/>
-                  </a:solidFill>
-                  <a:prstDash val="solid"/>
-                </a:ln>
-                <a:solidFill>
-                  <a:schemeClr val="accent2">
-                    <a:lumMod val="40000"/>
-                    <a:lumOff val="60000"/>
-                  </a:schemeClr>
-                </a:solidFill>
-              </a:rPr>
-              <a:t>Создаётся главное окно, несколько полей для ввода запросов, </a:t>
-            </a:r>
-          </a:p>
-          <a:p>
-            <a:r>
-              <a:rPr lang="ru-RU" sz="3200" b="1" dirty="0" smtClean="0">
-                <a:ln w="22225">
-                  <a:solidFill>
-                    <a:schemeClr val="accent2"/>
-                  </a:solidFill>
-                  <a:prstDash val="solid"/>
-                </a:ln>
-                <a:solidFill>
-                  <a:schemeClr val="accent2">
-                    <a:lumMod val="40000"/>
-                    <a:lumOff val="60000"/>
-                  </a:schemeClr>
-                </a:solidFill>
-              </a:rPr>
-              <a:t>инструментарий для проигрывания музыки.</a:t>
-            </a:r>
-            <a:endParaRPr lang="ru-RU" sz="3200" b="1" dirty="0" smtClean="0">
-              <a:ln w="22225">
-                <a:solidFill>
-                  <a:schemeClr val="accent2"/>
-                </a:solidFill>
-                <a:prstDash val="solid"/>
-              </a:ln>
-              <a:solidFill>
-                <a:schemeClr val="accent2">
-                  <a:lumMod val="40000"/>
-                  <a:lumOff val="60000"/>
-                </a:schemeClr>
-              </a:solidFill>
             </a:endParaRPr>
           </a:p>
         </p:txBody>
@@ -3696,26 +4217,18 @@
 </p:sld>
 </file>
 
-<file path=ppt/slides/slide4.xml><?xml version="1.0" encoding="utf-8"?>
+<file path=ppt/slides/slide3.xml><?xml version="1.0" encoding="utf-8"?>
 <p:sld xmlns:a="http://schemas.openxmlformats.org/drawingml/2006/main" xmlns:r="http://schemas.openxmlformats.org/officeDocument/2006/relationships" xmlns:p="http://schemas.openxmlformats.org/presentationml/2006/main">
   <p:cSld>
-    <p:bg>
-      <p:bgPr>
-        <a:blipFill dpi="0" rotWithShape="1">
-          <a:blip r:embed="rId2">
-            <a:lum/>
-          </a:blip>
-          <a:srcRect/>
-          <a:stretch>
-            <a:fillRect t="-39000" b="-39000"/>
-          </a:stretch>
-        </a:blipFill>
-        <a:effectLst/>
-      </p:bgPr>
-    </p:bg>
     <p:spTree>
       <p:nvGrpSpPr>
-        <p:cNvPr id="1" name=""/>
+        <p:cNvPr id="1" name="">
+          <a:extLst>
+            <a:ext uri="{FF2B5EF4-FFF2-40B4-BE49-F238E27FC236}">
+              <a16:creationId xmlns:a16="http://schemas.microsoft.com/office/drawing/2014/main" id="{5269CC3A-5413-665E-DBA5-A0D09E209CB5}"/>
+            </a:ext>
+          </a:extLst>
+        </p:cNvPr>
         <p:cNvGrpSpPr/>
         <p:nvPr/>
       </p:nvGrpSpPr>
@@ -3729,14 +4242,20 @@
       </p:grpSpPr>
       <p:sp>
         <p:nvSpPr>
-          <p:cNvPr id="3" name="Прямоугольник 2"/>
+          <p:cNvPr id="2" name="Прямоугольник 1">
+            <a:extLst>
+              <a:ext uri="{FF2B5EF4-FFF2-40B4-BE49-F238E27FC236}">
+                <a16:creationId xmlns:a16="http://schemas.microsoft.com/office/drawing/2014/main" id="{EA6AA44B-3D76-BC5D-DD45-7241C57F9B88}"/>
+              </a:ext>
+            </a:extLst>
+          </p:cNvPr>
           <p:cNvSpPr/>
           <p:nvPr/>
         </p:nvSpPr>
         <p:spPr>
           <a:xfrm>
-            <a:off x="3878326" y="0"/>
-            <a:ext cx="4566828" cy="769441"/>
+            <a:off x="4657337" y="528457"/>
+            <a:ext cx="2877326" cy="769441"/>
           </a:xfrm>
           <a:prstGeom prst="rect">
             <a:avLst/>
@@ -3750,21 +4269,104 @@
           <a:p>
             <a:pPr algn="ctr"/>
             <a:r>
-              <a:rPr lang="ru-RU" sz="4400" b="1" dirty="0" smtClean="0">
+              <a:rPr lang="ru-RU" sz="4400" b="1" dirty="0">
                 <a:ln w="22225">
                   <a:solidFill>
                     <a:schemeClr val="accent2"/>
                   </a:solidFill>
                   <a:prstDash val="solid"/>
                 </a:ln>
-                <a:solidFill>
-                  <a:schemeClr val="accent4">
-                    <a:lumMod val="60000"/>
-                    <a:lumOff val="40000"/>
-                  </a:schemeClr>
-                </a:solidFill>
               </a:rPr>
-              <a:t>Создание музыки</a:t>
+              <a:t>Интерфейс</a:t>
+            </a:r>
+          </a:p>
+        </p:txBody>
+      </p:sp>
+      <p:sp>
+        <p:nvSpPr>
+          <p:cNvPr id="3" name="Прямоугольник 2">
+            <a:extLst>
+              <a:ext uri="{FF2B5EF4-FFF2-40B4-BE49-F238E27FC236}">
+                <a16:creationId xmlns:a16="http://schemas.microsoft.com/office/drawing/2014/main" id="{2FE71B64-8325-D69A-1664-FC39DE10E62C}"/>
+              </a:ext>
+            </a:extLst>
+          </p:cNvPr>
+          <p:cNvSpPr/>
+          <p:nvPr/>
+        </p:nvSpPr>
+        <p:spPr>
+          <a:xfrm>
+            <a:off x="111258" y="1798586"/>
+            <a:ext cx="11685346" cy="1569660"/>
+          </a:xfrm>
+          <a:prstGeom prst="rect">
+            <a:avLst/>
+          </a:prstGeom>
+        </p:spPr>
+        <p:txBody>
+          <a:bodyPr wrap="square">
+            <a:spAutoFit/>
+          </a:bodyPr>
+          <a:lstStyle/>
+          <a:p>
+            <a:r>
+              <a:rPr lang="ru-RU" sz="3200" b="1" dirty="0">
+                <a:ln w="22225">
+                  <a:solidFill>
+                    <a:schemeClr val="accent2"/>
+                  </a:solidFill>
+                  <a:prstDash val="solid"/>
+                </a:ln>
+              </a:rPr>
+              <a:t>Для создания интерфейса использовалась библиотека </a:t>
+            </a:r>
+            <a:r>
+              <a:rPr lang="en-US" sz="3200" b="1" dirty="0">
+                <a:ln w="22225">
+                  <a:solidFill>
+                    <a:schemeClr val="accent2"/>
+                  </a:solidFill>
+                  <a:prstDash val="solid"/>
+                </a:ln>
+              </a:rPr>
+              <a:t>Tkinter</a:t>
+            </a:r>
+            <a:r>
+              <a:rPr lang="ru-RU" sz="3200" b="1" dirty="0">
+                <a:ln w="22225">
+                  <a:solidFill>
+                    <a:schemeClr val="accent2"/>
+                  </a:solidFill>
+                  <a:prstDash val="solid"/>
+                </a:ln>
+              </a:rPr>
+              <a:t>.</a:t>
+            </a:r>
+          </a:p>
+          <a:p>
+            <a:r>
+              <a:rPr lang="ru-RU" sz="3200" b="1" dirty="0">
+                <a:ln w="22225">
+                  <a:solidFill>
+                    <a:schemeClr val="accent2"/>
+                  </a:solidFill>
+                  <a:prstDash val="solid"/>
+                </a:ln>
+              </a:rPr>
+              <a:t>Создаётся главное окно, несколько полей для ввода запросов, </a:t>
+            </a:r>
+          </a:p>
+          <a:p>
+            <a:r>
+              <a:rPr lang="ru-RU" sz="3200" b="1" dirty="0">
+                <a:ln w="22225">
+                  <a:solidFill>
+                    <a:schemeClr val="accent2"/>
+                  </a:solidFill>
+                  <a:prstDash val="solid"/>
+                </a:ln>
+              </a:rPr>
+              <a:t>инструментарий для проигрывания музыки.</a:t>
             </a:r>
           </a:p>
         </p:txBody>
@@ -3772,7 +4374,258 @@
     </p:spTree>
     <p:extLst>
       <p:ext uri="{BB962C8B-B14F-4D97-AF65-F5344CB8AC3E}">
-        <p14:creationId xmlns:p14="http://schemas.microsoft.com/office/powerpoint/2010/main" val="2357887914"/>
+        <p14:creationId xmlns:p14="http://schemas.microsoft.com/office/powerpoint/2010/main" val="2602104388"/>
+      </p:ext>
+    </p:extLst>
+  </p:cSld>
+  <p:clrMapOvr>
+    <a:masterClrMapping/>
+  </p:clrMapOvr>
+</p:sld>
+</file>
+
+<file path=ppt/slides/slide4.xml><?xml version="1.0" encoding="utf-8"?>
+<p:sld xmlns:a="http://schemas.openxmlformats.org/drawingml/2006/main" xmlns:r="http://schemas.openxmlformats.org/officeDocument/2006/relationships" xmlns:p="http://schemas.openxmlformats.org/presentationml/2006/main">
+  <p:cSld>
+    <p:spTree>
+      <p:nvGrpSpPr>
+        <p:cNvPr id="1" name="">
+          <a:extLst>
+            <a:ext uri="{FF2B5EF4-FFF2-40B4-BE49-F238E27FC236}">
+              <a16:creationId xmlns:a16="http://schemas.microsoft.com/office/drawing/2014/main" id="{64E01E13-0457-515C-B229-AB256792DCE2}"/>
+            </a:ext>
+          </a:extLst>
+        </p:cNvPr>
+        <p:cNvGrpSpPr/>
+        <p:nvPr/>
+      </p:nvGrpSpPr>
+      <p:grpSpPr>
+        <a:xfrm>
+          <a:off x="0" y="0"/>
+          <a:ext cx="0" cy="0"/>
+          <a:chOff x="0" y="0"/>
+          <a:chExt cx="0" cy="0"/>
+        </a:xfrm>
+      </p:grpSpPr>
+      <p:sp>
+        <p:nvSpPr>
+          <p:cNvPr id="2" name="Прямоугольник 1">
+            <a:extLst>
+              <a:ext uri="{FF2B5EF4-FFF2-40B4-BE49-F238E27FC236}">
+                <a16:creationId xmlns:a16="http://schemas.microsoft.com/office/drawing/2014/main" id="{7B7CD332-7559-B760-8130-3CFA04A52752}"/>
+              </a:ext>
+            </a:extLst>
+          </p:cNvPr>
+          <p:cNvSpPr/>
+          <p:nvPr/>
+        </p:nvSpPr>
+        <p:spPr>
+          <a:xfrm>
+            <a:off x="3706275" y="528457"/>
+            <a:ext cx="4779450" cy="769441"/>
+          </a:xfrm>
+          <a:prstGeom prst="rect">
+            <a:avLst/>
+          </a:prstGeom>
+        </p:spPr>
+        <p:txBody>
+          <a:bodyPr wrap="none">
+            <a:spAutoFit/>
+          </a:bodyPr>
+          <a:lstStyle/>
+          <a:p>
+            <a:pPr algn="ctr"/>
+            <a:r>
+              <a:rPr lang="ru-RU" sz="4400" b="1" dirty="0">
+                <a:ln w="22225">
+                  <a:solidFill>
+                    <a:schemeClr val="accent2"/>
+                  </a:solidFill>
+                  <a:prstDash val="solid"/>
+                </a:ln>
+              </a:rPr>
+              <a:t>Генерация музыки</a:t>
+            </a:r>
+          </a:p>
+        </p:txBody>
+      </p:sp>
+      <p:sp>
+        <p:nvSpPr>
+          <p:cNvPr id="3" name="Прямоугольник 2">
+            <a:extLst>
+              <a:ext uri="{FF2B5EF4-FFF2-40B4-BE49-F238E27FC236}">
+                <a16:creationId xmlns:a16="http://schemas.microsoft.com/office/drawing/2014/main" id="{E9D27843-6295-7713-7430-7CBDC1AF0EA2}"/>
+              </a:ext>
+            </a:extLst>
+          </p:cNvPr>
+          <p:cNvSpPr/>
+          <p:nvPr/>
+        </p:nvSpPr>
+        <p:spPr>
+          <a:xfrm>
+            <a:off x="111258" y="1798586"/>
+            <a:ext cx="11685346" cy="3046988"/>
+          </a:xfrm>
+          <a:prstGeom prst="rect">
+            <a:avLst/>
+          </a:prstGeom>
+        </p:spPr>
+        <p:txBody>
+          <a:bodyPr wrap="square">
+            <a:spAutoFit/>
+          </a:bodyPr>
+          <a:lstStyle/>
+          <a:p>
+            <a:r>
+              <a:rPr lang="ru-RU" sz="3200" b="1" dirty="0">
+                <a:ln w="22225">
+                  <a:solidFill>
+                    <a:schemeClr val="accent2"/>
+                  </a:solidFill>
+                  <a:prstDash val="solid"/>
+                </a:ln>
+              </a:rPr>
+              <a:t>Для создания треков используется</a:t>
+            </a:r>
+            <a:r>
+              <a:rPr lang="en-US" sz="3200" b="1" dirty="0">
+                <a:ln w="22225">
+                  <a:solidFill>
+                    <a:schemeClr val="accent2"/>
+                  </a:solidFill>
+                  <a:prstDash val="solid"/>
+                </a:ln>
+              </a:rPr>
+              <a:t> open-source </a:t>
+            </a:r>
+            <a:r>
+              <a:rPr lang="ru-RU" sz="3200" b="1" dirty="0">
+                <a:ln w="22225">
+                  <a:solidFill>
+                    <a:schemeClr val="accent2"/>
+                  </a:solidFill>
+                  <a:prstDash val="solid"/>
+                </a:ln>
+              </a:rPr>
+              <a:t>модель</a:t>
+            </a:r>
+            <a:r>
+              <a:rPr lang="en-US" sz="3200" b="1" dirty="0">
+                <a:ln w="22225">
+                  <a:solidFill>
+                    <a:schemeClr val="accent2"/>
+                  </a:solidFill>
+                  <a:prstDash val="solid"/>
+                </a:ln>
+              </a:rPr>
+              <a:t> </a:t>
+            </a:r>
+            <a:r>
+              <a:rPr lang="en-US" sz="3200" b="1" dirty="0" err="1">
+                <a:ln w="22225">
+                  <a:solidFill>
+                    <a:schemeClr val="accent2"/>
+                  </a:solidFill>
+                  <a:prstDash val="solid"/>
+                </a:ln>
+              </a:rPr>
+              <a:t>MusicGen</a:t>
+            </a:r>
+            <a:r>
+              <a:rPr lang="ru-RU" sz="3200" b="1" dirty="0">
+                <a:ln w="22225">
+                  <a:solidFill>
+                    <a:schemeClr val="accent2"/>
+                  </a:solidFill>
+                  <a:prstDash val="solid"/>
+                </a:ln>
+              </a:rPr>
+              <a:t>-</a:t>
+            </a:r>
+            <a:r>
+              <a:rPr lang="en-US" sz="3200" b="1" dirty="0">
+                <a:ln w="22225">
+                  <a:solidFill>
+                    <a:schemeClr val="accent2"/>
+                  </a:solidFill>
+                  <a:prstDash val="solid"/>
+                </a:ln>
+              </a:rPr>
+              <a:t>Small</a:t>
+            </a:r>
+            <a:r>
+              <a:rPr lang="ru-RU" sz="3200" b="1" dirty="0">
+                <a:ln w="22225">
+                  <a:solidFill>
+                    <a:schemeClr val="accent2"/>
+                  </a:solidFill>
+                  <a:prstDash val="solid"/>
+                </a:ln>
+              </a:rPr>
+              <a:t> типа Трансформер, самая маленькая из семейства. Она быстрее всех и хорошо подходит для демо, но качество результатов</a:t>
+            </a:r>
+            <a:r>
+              <a:rPr lang="en-US" sz="3200" b="1" dirty="0">
+                <a:ln w="22225">
+                  <a:solidFill>
+                    <a:schemeClr val="accent2"/>
+                  </a:solidFill>
+                  <a:prstDash val="solid"/>
+                </a:ln>
+              </a:rPr>
+              <a:t> </a:t>
+            </a:r>
+            <a:r>
+              <a:rPr lang="ru-RU" sz="3200" b="1" dirty="0">
+                <a:ln w="22225">
+                  <a:solidFill>
+                    <a:schemeClr val="accent2"/>
+                  </a:solidFill>
+                  <a:prstDash val="solid"/>
+                </a:ln>
+              </a:rPr>
+              <a:t>ниже, чем у больших моделей. Для локальной установки требуется наличие ядер </a:t>
+            </a:r>
+            <a:r>
+              <a:rPr lang="en-US" sz="3200" b="1" dirty="0">
+                <a:ln w="22225">
+                  <a:solidFill>
+                    <a:schemeClr val="accent2"/>
+                  </a:solidFill>
+                  <a:prstDash val="solid"/>
+                </a:ln>
+              </a:rPr>
+              <a:t>CUDA </a:t>
+            </a:r>
+            <a:r>
+              <a:rPr lang="ru-RU" sz="3200" b="1">
+                <a:ln w="22225">
+                  <a:solidFill>
+                    <a:schemeClr val="accent2"/>
+                  </a:solidFill>
+                  <a:prstDash val="solid"/>
+                </a:ln>
+              </a:rPr>
+              <a:t>и большой </a:t>
+            </a:r>
+            <a:r>
+              <a:rPr lang="ru-RU" sz="3200" b="1" dirty="0">
+                <a:ln w="22225">
+                  <a:solidFill>
+                    <a:schemeClr val="accent2"/>
+                  </a:solidFill>
+                  <a:prstDash val="solid"/>
+                </a:ln>
+              </a:rPr>
+              <a:t>объём видеопамяти.</a:t>
+            </a:r>
+          </a:p>
+        </p:txBody>
+      </p:sp>
+    </p:spTree>
+    <p:extLst>
+      <p:ext uri="{BB962C8B-B14F-4D97-AF65-F5344CB8AC3E}">
+        <p14:creationId xmlns:p14="http://schemas.microsoft.com/office/powerpoint/2010/main" val="3473936992"/>
       </p:ext>
     </p:extLst>
   </p:cSld>
@@ -3785,23 +4638,15 @@
 <file path=ppt/slides/slide5.xml><?xml version="1.0" encoding="utf-8"?>
 <p:sld xmlns:a="http://schemas.openxmlformats.org/drawingml/2006/main" xmlns:r="http://schemas.openxmlformats.org/officeDocument/2006/relationships" xmlns:p="http://schemas.openxmlformats.org/presentationml/2006/main">
   <p:cSld>
-    <p:bg>
-      <p:bgPr>
-        <a:blipFill dpi="0" rotWithShape="1">
-          <a:blip r:embed="rId2">
-            <a:lum/>
-          </a:blip>
-          <a:srcRect/>
-          <a:stretch>
-            <a:fillRect/>
-          </a:stretch>
-        </a:blipFill>
-        <a:effectLst/>
-      </p:bgPr>
-    </p:bg>
     <p:spTree>
       <p:nvGrpSpPr>
-        <p:cNvPr id="1" name=""/>
+        <p:cNvPr id="1" name="">
+          <a:extLst>
+            <a:ext uri="{FF2B5EF4-FFF2-40B4-BE49-F238E27FC236}">
+              <a16:creationId xmlns:a16="http://schemas.microsoft.com/office/drawing/2014/main" id="{688332E4-A35A-AB4C-33D5-8B1F6121FC6B}"/>
+            </a:ext>
+          </a:extLst>
+        </p:cNvPr>
         <p:cNvGrpSpPr/>
         <p:nvPr/>
       </p:nvGrpSpPr>
@@ -3815,14 +4660,20 @@
       </p:grpSpPr>
       <p:sp>
         <p:nvSpPr>
-          <p:cNvPr id="2" name="Прямоугольник 1"/>
+          <p:cNvPr id="2" name="Прямоугольник 1">
+            <a:extLst>
+              <a:ext uri="{FF2B5EF4-FFF2-40B4-BE49-F238E27FC236}">
+                <a16:creationId xmlns:a16="http://schemas.microsoft.com/office/drawing/2014/main" id="{7A29438A-2985-5764-6617-A784D06AF894}"/>
+              </a:ext>
+            </a:extLst>
+          </p:cNvPr>
           <p:cNvSpPr/>
           <p:nvPr/>
         </p:nvSpPr>
         <p:spPr>
           <a:xfrm>
-            <a:off x="3050522" y="82781"/>
-            <a:ext cx="5684569" cy="769441"/>
+            <a:off x="3253716" y="528457"/>
+            <a:ext cx="5684568" cy="769441"/>
           </a:xfrm>
           <a:prstGeom prst="rect">
             <a:avLst/>
@@ -3836,49 +4687,35 @@
           <a:p>
             <a:pPr algn="ctr"/>
             <a:r>
-              <a:rPr lang="ru-RU" sz="4400" b="1" dirty="0" smtClean="0">
+              <a:rPr lang="ru-RU" sz="4400" b="1" dirty="0">
                 <a:ln w="22225">
                   <a:solidFill>
                     <a:schemeClr val="accent2"/>
                   </a:solidFill>
                   <a:prstDash val="solid"/>
                 </a:ln>
-                <a:solidFill>
-                  <a:schemeClr val="accent4">
-                    <a:lumMod val="60000"/>
-                    <a:lumOff val="40000"/>
-                  </a:schemeClr>
-                </a:solidFill>
               </a:rPr>
               <a:t>Дальнейшее развитие</a:t>
             </a:r>
-            <a:endParaRPr lang="ru-RU" sz="4400" b="1" dirty="0" smtClean="0">
-              <a:ln w="22225">
-                <a:solidFill>
-                  <a:schemeClr val="accent2"/>
-                </a:solidFill>
-                <a:prstDash val="solid"/>
-              </a:ln>
-              <a:solidFill>
-                <a:schemeClr val="accent4">
-                  <a:lumMod val="60000"/>
-                  <a:lumOff val="40000"/>
-                </a:schemeClr>
-              </a:solidFill>
-            </a:endParaRPr>
-          </a:p>
-        </p:txBody>
-      </p:sp>
-      <p:sp>
-        <p:nvSpPr>
-          <p:cNvPr id="3" name="Прямоугольник 2"/>
+          </a:p>
+        </p:txBody>
+      </p:sp>
+      <p:sp>
+        <p:nvSpPr>
+          <p:cNvPr id="3" name="Прямоугольник 2">
+            <a:extLst>
+              <a:ext uri="{FF2B5EF4-FFF2-40B4-BE49-F238E27FC236}">
+                <a16:creationId xmlns:a16="http://schemas.microsoft.com/office/drawing/2014/main" id="{2CE8D913-93D0-8D98-1213-3366150F6665}"/>
+              </a:ext>
+            </a:extLst>
+          </p:cNvPr>
           <p:cNvSpPr/>
           <p:nvPr/>
         </p:nvSpPr>
         <p:spPr>
           <a:xfrm>
-            <a:off x="0" y="960281"/>
-            <a:ext cx="11146117" cy="1200329"/>
+            <a:off x="111258" y="1798586"/>
+            <a:ext cx="11685346" cy="1569660"/>
           </a:xfrm>
           <a:prstGeom prst="rect">
             <a:avLst/>
@@ -3891,129 +4728,23 @@
           <a:lstStyle/>
           <a:p>
             <a:r>
-              <a:rPr lang="ru-RU" sz="3600" b="1" dirty="0" smtClean="0">
+              <a:rPr lang="ru-RU" sz="3200" b="1" dirty="0">
                 <a:ln w="22225">
                   <a:solidFill>
                     <a:schemeClr val="accent2"/>
                   </a:solidFill>
                   <a:prstDash val="solid"/>
                 </a:ln>
-                <a:solidFill>
-                  <a:schemeClr val="accent2">
-                    <a:lumMod val="40000"/>
-                    <a:lumOff val="60000"/>
-                  </a:schemeClr>
-                </a:solidFill>
               </a:rPr>
-              <a:t>Создание сервиса, который будет работать в онлайн режиме.</a:t>
-            </a:r>
-            <a:endParaRPr lang="ru-RU" sz="3600" b="1" dirty="0" smtClean="0">
-              <a:ln w="22225">
-                <a:solidFill>
-                  <a:schemeClr val="accent2"/>
-                </a:solidFill>
-                <a:prstDash val="solid"/>
-              </a:ln>
-              <a:solidFill>
-                <a:schemeClr val="accent2">
-                  <a:lumMod val="40000"/>
-                  <a:lumOff val="60000"/>
-                </a:schemeClr>
-              </a:solidFill>
-            </a:endParaRPr>
+              <a:t>Создание сервиса, который будет работать в онлайн режиме, расширение набора моделей на выбор, добавление новых возможностей по настройке и дообучению модели.</a:t>
+            </a:r>
           </a:p>
         </p:txBody>
       </p:sp>
     </p:spTree>
     <p:extLst>
       <p:ext uri="{BB962C8B-B14F-4D97-AF65-F5344CB8AC3E}">
-        <p14:creationId xmlns:p14="http://schemas.microsoft.com/office/powerpoint/2010/main" val="1091690974"/>
-      </p:ext>
-    </p:extLst>
-  </p:cSld>
-  <p:clrMapOvr>
-    <a:masterClrMapping/>
-  </p:clrMapOvr>
-</p:sld>
-</file>
-
-<file path=ppt/slides/slide6.xml><?xml version="1.0" encoding="utf-8"?>
-<p:sld xmlns:a="http://schemas.openxmlformats.org/drawingml/2006/main" xmlns:r="http://schemas.openxmlformats.org/officeDocument/2006/relationships" xmlns:p="http://schemas.openxmlformats.org/presentationml/2006/main">
-  <p:cSld>
-    <p:bg>
-      <p:bgPr>
-        <a:blipFill dpi="0" rotWithShape="1">
-          <a:blip r:embed="rId2">
-            <a:lum/>
-          </a:blip>
-          <a:srcRect/>
-          <a:stretch>
-            <a:fillRect t="-9000" b="-9000"/>
-          </a:stretch>
-        </a:blipFill>
-        <a:effectLst/>
-      </p:bgPr>
-    </p:bg>
-    <p:spTree>
-      <p:nvGrpSpPr>
-        <p:cNvPr id="1" name=""/>
-        <p:cNvGrpSpPr/>
-        <p:nvPr/>
-      </p:nvGrpSpPr>
-      <p:grpSpPr>
-        <a:xfrm>
-          <a:off x="0" y="0"/>
-          <a:ext cx="0" cy="0"/>
-          <a:chOff x="0" y="0"/>
-          <a:chExt cx="0" cy="0"/>
-        </a:xfrm>
-      </p:grpSpPr>
-      <p:sp>
-        <p:nvSpPr>
-          <p:cNvPr id="2" name="Прямоугольник 1"/>
-          <p:cNvSpPr/>
-          <p:nvPr/>
-        </p:nvSpPr>
-        <p:spPr>
-          <a:xfrm>
-            <a:off x="3108748" y="662499"/>
-            <a:ext cx="5663730" cy="769441"/>
-          </a:xfrm>
-          <a:prstGeom prst="rect">
-            <a:avLst/>
-          </a:prstGeom>
-        </p:spPr>
-        <p:txBody>
-          <a:bodyPr wrap="none">
-            <a:spAutoFit/>
-          </a:bodyPr>
-          <a:lstStyle/>
-          <a:p>
-            <a:pPr algn="ctr"/>
-            <a:r>
-              <a:rPr lang="ru-RU" sz="4400" b="1" dirty="0" smtClean="0">
-                <a:ln w="22225">
-                  <a:solidFill>
-                    <a:schemeClr val="accent2"/>
-                  </a:solidFill>
-                  <a:prstDash val="solid"/>
-                </a:ln>
-                <a:solidFill>
-                  <a:schemeClr val="accent4">
-                    <a:lumMod val="60000"/>
-                    <a:lumOff val="40000"/>
-                  </a:schemeClr>
-                </a:solidFill>
-              </a:rPr>
-              <a:t>Спасибо за внимание!</a:t>
-            </a:r>
-          </a:p>
-        </p:txBody>
-      </p:sp>
-    </p:spTree>
-    <p:extLst>
-      <p:ext uri="{BB962C8B-B14F-4D97-AF65-F5344CB8AC3E}">
-        <p14:creationId xmlns:p14="http://schemas.microsoft.com/office/powerpoint/2010/main" val="410347812"/>
+        <p14:creationId xmlns:p14="http://schemas.microsoft.com/office/powerpoint/2010/main" val="3850009728"/>
       </p:ext>
     </p:extLst>
   </p:cSld>
@@ -4024,47 +4755,47 @@
 </file>
 
 <file path=ppt/theme/theme1.xml><?xml version="1.0" encoding="utf-8"?>
-<a:theme xmlns:a="http://schemas.openxmlformats.org/drawingml/2006/main" name="Тема Office">
+<a:theme xmlns:a="http://schemas.openxmlformats.org/drawingml/2006/main" name="Ретро">
   <a:themeElements>
-    <a:clrScheme name="Стандартная">
+    <a:clrScheme name="Ретро">
       <a:dk1>
-        <a:sysClr val="windowText" lastClr="000000"/>
+        <a:srgbClr val="000000"/>
       </a:dk1>
       <a:lt1>
         <a:sysClr val="window" lastClr="FFFFFF"/>
       </a:lt1>
       <a:dk2>
-        <a:srgbClr val="44546A"/>
+        <a:srgbClr val="637052"/>
       </a:dk2>
       <a:lt2>
-        <a:srgbClr val="E7E6E6"/>
+        <a:srgbClr val="CCDDEA"/>
       </a:lt2>
       <a:accent1>
-        <a:srgbClr val="5B9BD5"/>
+        <a:srgbClr val="E48312"/>
       </a:accent1>
       <a:accent2>
-        <a:srgbClr val="ED7D31"/>
+        <a:srgbClr val="BD582C"/>
       </a:accent2>
       <a:accent3>
-        <a:srgbClr val="A5A5A5"/>
+        <a:srgbClr val="865640"/>
       </a:accent3>
       <a:accent4>
-        <a:srgbClr val="FFC000"/>
+        <a:srgbClr val="9B8357"/>
       </a:accent4>
       <a:accent5>
-        <a:srgbClr val="4472C4"/>
+        <a:srgbClr val="C2BC80"/>
       </a:accent5>
       <a:accent6>
-        <a:srgbClr val="70AD47"/>
+        <a:srgbClr val="94A088"/>
       </a:accent6>
       <a:hlink>
-        <a:srgbClr val="0563C1"/>
+        <a:srgbClr val="2998E3"/>
       </a:hlink>
       <a:folHlink>
-        <a:srgbClr val="954F72"/>
+        <a:srgbClr val="8C8C8C"/>
       </a:folHlink>
     </a:clrScheme>
-    <a:fontScheme name="Стандартная">
+    <a:fontScheme name="Ретро">
       <a:majorFont>
         <a:latin typeface="Calibri Light" panose="020F0302020204030204"/>
         <a:ea typeface=""/>
@@ -4136,7 +4867,7 @@
         <a:font script="Geor" typeface="Sylfaen"/>
       </a:minorFont>
     </a:fontScheme>
-    <a:fmtScheme name="Стандартная">
+    <a:fmtScheme name="Ретро">
       <a:fillStyleLst>
         <a:solidFill>
           <a:schemeClr val="phClr"/>
@@ -4145,76 +4876,81 @@
           <a:gsLst>
             <a:gs pos="0">
               <a:schemeClr val="phClr">
-                <a:lumMod val="110000"/>
-                <a:satMod val="105000"/>
-                <a:tint val="67000"/>
+                <a:tint val="65000"/>
+                <a:shade val="92000"/>
+                <a:satMod val="130000"/>
               </a:schemeClr>
             </a:gs>
-            <a:gs pos="50000">
+            <a:gs pos="45000">
               <a:schemeClr val="phClr">
-                <a:lumMod val="105000"/>
-                <a:satMod val="103000"/>
-                <a:tint val="73000"/>
+                <a:tint val="60000"/>
+                <a:shade val="99000"/>
+                <a:satMod val="120000"/>
               </a:schemeClr>
             </a:gs>
             <a:gs pos="100000">
               <a:schemeClr val="phClr">
-                <a:lumMod val="105000"/>
-                <a:satMod val="109000"/>
-                <a:tint val="81000"/>
+                <a:tint val="55000"/>
+                <a:satMod val="140000"/>
               </a:schemeClr>
             </a:gs>
           </a:gsLst>
-          <a:lin ang="5400000" scaled="0"/>
+          <a:path path="circle">
+            <a:fillToRect l="100000" t="100000" r="100000" b="100000"/>
+          </a:path>
         </a:gradFill>
         <a:gradFill rotWithShape="1">
           <a:gsLst>
             <a:gs pos="0">
               <a:schemeClr val="phClr">
-                <a:satMod val="103000"/>
-                <a:lumMod val="102000"/>
-                <a:tint val="94000"/>
+                <a:shade val="85000"/>
+                <a:satMod val="130000"/>
               </a:schemeClr>
             </a:gs>
-            <a:gs pos="50000">
+            <a:gs pos="34000">
               <a:schemeClr val="phClr">
-                <a:satMod val="110000"/>
-                <a:lumMod val="100000"/>
-                <a:shade val="100000"/>
+                <a:shade val="87000"/>
+                <a:satMod val="125000"/>
+              </a:schemeClr>
+            </a:gs>
+            <a:gs pos="70000">
+              <a:schemeClr val="phClr">
+                <a:tint val="100000"/>
+                <a:shade val="90000"/>
+                <a:satMod val="130000"/>
               </a:schemeClr>
             </a:gs>
             <a:gs pos="100000">
               <a:schemeClr val="phClr">
-                <a:lumMod val="99000"/>
-                <a:satMod val="120000"/>
-                <a:shade val="78000"/>
+                <a:tint val="100000"/>
+                <a:shade val="100000"/>
+                <a:satMod val="110000"/>
               </a:schemeClr>
             </a:gs>
           </a:gsLst>
-          <a:lin ang="5400000" scaled="0"/>
+          <a:path path="circle">
+            <a:fillToRect l="100000" t="100000" r="100000" b="100000"/>
+          </a:path>
         </a:gradFill>
       </a:fillStyleLst>
       <a:lnStyleLst>
-        <a:ln w="6350" cap="flat" cmpd="sng" algn="ctr">
-          <a:solidFill>
-            <a:schemeClr val="phClr"/>
-          </a:solidFill>
-          <a:prstDash val="solid"/>
-          <a:miter lim="800000"/>
-        </a:ln>
         <a:ln w="12700" cap="flat" cmpd="sng" algn="ctr">
           <a:solidFill>
             <a:schemeClr val="phClr"/>
           </a:solidFill>
           <a:prstDash val="solid"/>
-          <a:miter lim="800000"/>
         </a:ln>
-        <a:ln w="19050" cap="flat" cmpd="sng" algn="ctr">
+        <a:ln w="15875" cap="flat" cmpd="sng" algn="ctr">
           <a:solidFill>
             <a:schemeClr val="phClr"/>
           </a:solidFill>
           <a:prstDash val="solid"/>
-          <a:miter lim="800000"/>
+        </a:ln>
+        <a:ln w="25400" cap="flat" cmpd="sng" algn="ctr">
+          <a:solidFill>
+            <a:schemeClr val="phClr"/>
+          </a:solidFill>
+          <a:prstDash val="solid"/>
         </a:ln>
       </a:lnStyleLst>
       <a:effectStyleLst>
@@ -4222,16 +4958,33 @@
           <a:effectLst/>
         </a:effectStyle>
         <a:effectStyle>
-          <a:effectLst/>
+          <a:effectLst>
+            <a:outerShdw blurRad="38100" dist="25400" dir="2700000" algn="br" rotWithShape="0">
+              <a:srgbClr val="000000">
+                <a:alpha val="60000"/>
+              </a:srgbClr>
+            </a:outerShdw>
+          </a:effectLst>
         </a:effectStyle>
         <a:effectStyle>
           <a:effectLst>
-            <a:outerShdw blurRad="57150" dist="19050" dir="5400000" algn="ctr" rotWithShape="0">
+            <a:outerShdw blurRad="44450" dist="25400" dir="2700000" algn="br" rotWithShape="0">
               <a:srgbClr val="000000">
-                <a:alpha val="63000"/>
+                <a:alpha val="60000"/>
               </a:srgbClr>
             </a:outerShdw>
           </a:effectLst>
+          <a:scene3d>
+            <a:camera prst="orthographicFront">
+              <a:rot lat="0" lon="0" rev="0"/>
+            </a:camera>
+            <a:lightRig rig="threePt" dir="t">
+              <a:rot lat="0" lon="0" rev="19800000"/>
+            </a:lightRig>
+          </a:scene3d>
+          <a:sp3d prstMaterial="flat">
+            <a:bevelT w="25400" h="31750"/>
+          </a:sp3d>
         </a:effectStyle>
       </a:effectStyleLst>
       <a:bgFillStyleLst>
@@ -4240,36 +4993,36 @@
         </a:solidFill>
         <a:solidFill>
           <a:schemeClr val="phClr">
-            <a:tint val="95000"/>
-            <a:satMod val="170000"/>
+            <a:tint val="90000"/>
+            <a:shade val="97000"/>
+            <a:satMod val="130000"/>
           </a:schemeClr>
         </a:solidFill>
         <a:gradFill rotWithShape="1">
           <a:gsLst>
             <a:gs pos="0">
               <a:schemeClr val="phClr">
-                <a:tint val="93000"/>
-                <a:satMod val="150000"/>
-                <a:shade val="98000"/>
-                <a:lumMod val="102000"/>
+                <a:tint val="96000"/>
+                <a:shade val="99000"/>
+                <a:satMod val="140000"/>
               </a:schemeClr>
             </a:gs>
-            <a:gs pos="50000">
+            <a:gs pos="65000">
               <a:schemeClr val="phClr">
-                <a:tint val="98000"/>
+                <a:tint val="100000"/>
+                <a:shade val="80000"/>
                 <a:satMod val="130000"/>
-                <a:shade val="90000"/>
-                <a:lumMod val="103000"/>
               </a:schemeClr>
             </a:gs>
             <a:gs pos="100000">
               <a:schemeClr val="phClr">
-                <a:shade val="63000"/>
+                <a:tint val="100000"/>
+                <a:shade val="48000"/>
                 <a:satMod val="120000"/>
               </a:schemeClr>
             </a:gs>
           </a:gsLst>
-          <a:lin ang="5400000" scaled="0"/>
+          <a:lin ang="16200000" scaled="0"/>
         </a:gradFill>
       </a:bgFillStyleLst>
     </a:fmtScheme>
@@ -4278,7 +5031,7 @@
   <a:extraClrSchemeLst/>
   <a:extLst>
     <a:ext uri="{05A4C25C-085E-4340-85A3-A5531E510DB2}">
-      <thm15:themeFamily xmlns:thm15="http://schemas.microsoft.com/office/thememl/2012/main" name="Office Theme" id="{62F939B6-93AF-4DB8-9C6B-D6C7DFDC589F}" vid="{4A3C46E8-61CC-4603-A589-7422A47A8E4A}"/>
+      <thm15:themeFamily xmlns:thm15="http://schemas.microsoft.com/office/thememl/2012/main" name="Retrospect" id="{5F128B03-DCCA-4EEB-AB3B-CF2899314A46}" vid="{3F1AAB62-24C6-49D2-8E01-B56FAC9A3DCD}"/>
     </a:ext>
   </a:extLst>
 </a:theme>

--- a/Презентация1.pptx
+++ b/Презентация1.pptx
@@ -10,6 +10,7 @@
     <p:sldId id="263" r:id="rId4"/>
     <p:sldId id="264" r:id="rId5"/>
     <p:sldId id="265" r:id="rId6"/>
+    <p:sldId id="266" r:id="rId7"/>
   </p:sldIdLst>
   <p:sldSz cx="12192000" cy="6858000"/>
   <p:notesSz cx="6858000" cy="9144000"/>
@@ -4225,7 +4226,7 @@
         <p:cNvPr id="1" name="">
           <a:extLst>
             <a:ext uri="{FF2B5EF4-FFF2-40B4-BE49-F238E27FC236}">
-              <a16:creationId xmlns:a16="http://schemas.microsoft.com/office/drawing/2014/main" id="{5269CC3A-5413-665E-DBA5-A0D09E209CB5}"/>
+              <a16:creationId xmlns:a16="http://schemas.microsoft.com/office/drawing/2014/main" xmlns="" id="{5269CC3A-5413-665E-DBA5-A0D09E209CB5}"/>
             </a:ext>
           </a:extLst>
         </p:cNvPr>
@@ -4245,7 +4246,7 @@
           <p:cNvPr id="2" name="Прямоугольник 1">
             <a:extLst>
               <a:ext uri="{FF2B5EF4-FFF2-40B4-BE49-F238E27FC236}">
-                <a16:creationId xmlns:a16="http://schemas.microsoft.com/office/drawing/2014/main" id="{EA6AA44B-3D76-BC5D-DD45-7241C57F9B88}"/>
+                <a16:creationId xmlns:a16="http://schemas.microsoft.com/office/drawing/2014/main" xmlns="" id="{EA6AA44B-3D76-BC5D-DD45-7241C57F9B88}"/>
               </a:ext>
             </a:extLst>
           </p:cNvPr>
@@ -4287,7 +4288,7 @@
           <p:cNvPr id="3" name="Прямоугольник 2">
             <a:extLst>
               <a:ext uri="{FF2B5EF4-FFF2-40B4-BE49-F238E27FC236}">
-                <a16:creationId xmlns:a16="http://schemas.microsoft.com/office/drawing/2014/main" id="{2FE71B64-8325-D69A-1664-FC39DE10E62C}"/>
+                <a16:creationId xmlns:a16="http://schemas.microsoft.com/office/drawing/2014/main" xmlns="" id="{2FE71B64-8325-D69A-1664-FC39DE10E62C}"/>
               </a:ext>
             </a:extLst>
           </p:cNvPr>
@@ -4392,7 +4393,7 @@
         <p:cNvPr id="1" name="">
           <a:extLst>
             <a:ext uri="{FF2B5EF4-FFF2-40B4-BE49-F238E27FC236}">
-              <a16:creationId xmlns:a16="http://schemas.microsoft.com/office/drawing/2014/main" id="{64E01E13-0457-515C-B229-AB256792DCE2}"/>
+              <a16:creationId xmlns:a16="http://schemas.microsoft.com/office/drawing/2014/main" xmlns="" id="{64E01E13-0457-515C-B229-AB256792DCE2}"/>
             </a:ext>
           </a:extLst>
         </p:cNvPr>
@@ -4412,7 +4413,7 @@
           <p:cNvPr id="2" name="Прямоугольник 1">
             <a:extLst>
               <a:ext uri="{FF2B5EF4-FFF2-40B4-BE49-F238E27FC236}">
-                <a16:creationId xmlns:a16="http://schemas.microsoft.com/office/drawing/2014/main" id="{7B7CD332-7559-B760-8130-3CFA04A52752}"/>
+                <a16:creationId xmlns:a16="http://schemas.microsoft.com/office/drawing/2014/main" xmlns="" id="{7B7CD332-7559-B760-8130-3CFA04A52752}"/>
               </a:ext>
             </a:extLst>
           </p:cNvPr>
@@ -4454,7 +4455,7 @@
           <p:cNvPr id="3" name="Прямоугольник 2">
             <a:extLst>
               <a:ext uri="{FF2B5EF4-FFF2-40B4-BE49-F238E27FC236}">
-                <a16:creationId xmlns:a16="http://schemas.microsoft.com/office/drawing/2014/main" id="{E9D27843-6295-7713-7430-7CBDC1AF0EA2}"/>
+                <a16:creationId xmlns:a16="http://schemas.microsoft.com/office/drawing/2014/main" xmlns="" id="{E9D27843-6295-7713-7430-7CBDC1AF0EA2}"/>
               </a:ext>
             </a:extLst>
           </p:cNvPr>
@@ -4643,7 +4644,7 @@
         <p:cNvPr id="1" name="">
           <a:extLst>
             <a:ext uri="{FF2B5EF4-FFF2-40B4-BE49-F238E27FC236}">
-              <a16:creationId xmlns:a16="http://schemas.microsoft.com/office/drawing/2014/main" id="{688332E4-A35A-AB4C-33D5-8B1F6121FC6B}"/>
+              <a16:creationId xmlns:a16="http://schemas.microsoft.com/office/drawing/2014/main" xmlns="" id="{688332E4-A35A-AB4C-33D5-8B1F6121FC6B}"/>
             </a:ext>
           </a:extLst>
         </p:cNvPr>
@@ -4663,7 +4664,7 @@
           <p:cNvPr id="2" name="Прямоугольник 1">
             <a:extLst>
               <a:ext uri="{FF2B5EF4-FFF2-40B4-BE49-F238E27FC236}">
-                <a16:creationId xmlns:a16="http://schemas.microsoft.com/office/drawing/2014/main" id="{7A29438A-2985-5764-6617-A784D06AF894}"/>
+                <a16:creationId xmlns:a16="http://schemas.microsoft.com/office/drawing/2014/main" xmlns="" id="{7A29438A-2985-5764-6617-A784D06AF894}"/>
               </a:ext>
             </a:extLst>
           </p:cNvPr>
@@ -4705,7 +4706,7 @@
           <p:cNvPr id="3" name="Прямоугольник 2">
             <a:extLst>
               <a:ext uri="{FF2B5EF4-FFF2-40B4-BE49-F238E27FC236}">
-                <a16:creationId xmlns:a16="http://schemas.microsoft.com/office/drawing/2014/main" id="{2CE8D913-93D0-8D98-1213-3366150F6665}"/>
+                <a16:creationId xmlns:a16="http://schemas.microsoft.com/office/drawing/2014/main" xmlns="" id="{2CE8D913-93D0-8D98-1213-3366150F6665}"/>
               </a:ext>
             </a:extLst>
           </p:cNvPr>
@@ -4745,6 +4746,80 @@
     <p:extLst>
       <p:ext uri="{BB962C8B-B14F-4D97-AF65-F5344CB8AC3E}">
         <p14:creationId xmlns:p14="http://schemas.microsoft.com/office/powerpoint/2010/main" val="3850009728"/>
+      </p:ext>
+    </p:extLst>
+  </p:cSld>
+  <p:clrMapOvr>
+    <a:masterClrMapping/>
+  </p:clrMapOvr>
+</p:sld>
+</file>
+
+<file path=ppt/slides/slide6.xml><?xml version="1.0" encoding="utf-8"?>
+<p:sld xmlns:a="http://schemas.openxmlformats.org/drawingml/2006/main" xmlns:r="http://schemas.openxmlformats.org/officeDocument/2006/relationships" xmlns:p="http://schemas.openxmlformats.org/presentationml/2006/main">
+  <p:cSld>
+    <p:spTree>
+      <p:nvGrpSpPr>
+        <p:cNvPr id="1" name=""/>
+        <p:cNvGrpSpPr/>
+        <p:nvPr/>
+      </p:nvGrpSpPr>
+      <p:grpSpPr>
+        <a:xfrm>
+          <a:off x="0" y="0"/>
+          <a:ext cx="0" cy="0"/>
+          <a:chOff x="0" y="0"/>
+          <a:chExt cx="0" cy="0"/>
+        </a:xfrm>
+      </p:grpSpPr>
+      <p:sp>
+        <p:nvSpPr>
+          <p:cNvPr id="2" name="Прямоугольник 1"/>
+          <p:cNvSpPr/>
+          <p:nvPr/>
+        </p:nvSpPr>
+        <p:spPr>
+          <a:xfrm>
+            <a:off x="3150581" y="441370"/>
+            <a:ext cx="5663731" cy="769441"/>
+          </a:xfrm>
+          <a:prstGeom prst="rect">
+            <a:avLst/>
+          </a:prstGeom>
+        </p:spPr>
+        <p:txBody>
+          <a:bodyPr wrap="none">
+            <a:spAutoFit/>
+          </a:bodyPr>
+          <a:lstStyle/>
+          <a:p>
+            <a:pPr algn="ctr"/>
+            <a:r>
+              <a:rPr lang="ru-RU" sz="4400" b="1" dirty="0" smtClean="0">
+                <a:ln w="22225">
+                  <a:solidFill>
+                    <a:schemeClr val="accent2"/>
+                  </a:solidFill>
+                  <a:prstDash val="solid"/>
+                </a:ln>
+              </a:rPr>
+              <a:t>Спасибо за внимание!</a:t>
+            </a:r>
+            <a:endParaRPr lang="ru-RU" sz="4400" b="1" dirty="0">
+              <a:ln w="22225">
+                <a:solidFill>
+                  <a:schemeClr val="accent2"/>
+                </a:solidFill>
+                <a:prstDash val="solid"/>
+              </a:ln>
+            </a:endParaRPr>
+          </a:p>
+        </p:txBody>
+      </p:sp>
+    </p:spTree>
+    <p:extLst>
+      <p:ext uri="{BB962C8B-B14F-4D97-AF65-F5344CB8AC3E}">
+        <p14:creationId xmlns:p14="http://schemas.microsoft.com/office/powerpoint/2010/main" val="2927368816"/>
       </p:ext>
     </p:extLst>
   </p:cSld>
